--- a/StudyGenieAI.pptx
+++ b/StudyGenieAI.pptx
@@ -4,6 +4,9 @@
   <p:sldMasterIdLst>
     <p:sldMasterId id="2147483648" r:id="rId1"/>
   </p:sldMasterIdLst>
+  <p:notesMasterIdLst>
+    <p:notesMasterId r:id="rId10"/>
+  </p:notesMasterIdLst>
   <p:sldIdLst>
     <p:sldId id="256" r:id="rId2"/>
     <p:sldId id="257" r:id="rId3"/>
@@ -14,9 +17,6 @@
     <p:sldId id="262" r:id="rId8"/>
     <p:sldId id="263" r:id="rId9"/>
   </p:sldIdLst>
-  <p:notesMasterIdLst>
-    <p:notesMasterId r:id="rId10"/>
-  </p:notesMasterIdLst>
   <p:sldSz cx="12192000" cy="6858000"/>
   <p:notesSz cx="6858000" cy="12192000"/>
   <p:defaultTextStyle>
@@ -111,6 +111,11 @@
       </a:defRPr>
     </a:lvl9pPr>
   </p:defaultTextStyle>
+  <p:extLst>
+    <p:ext uri="{EFAFB233-063F-42B5-8137-9DF3F51BA10A}">
+      <p15:sldGuideLst xmlns:p15="http://schemas.microsoft.com/office/powerpoint/2012/main"/>
+    </p:ext>
+  </p:extLst>
 </p:presentation>
 </file>
 
@@ -136,234 +141,10 @@
           <a:chExt cx="0" cy="0"/>
         </a:xfrm>
       </p:grpSpPr>
-      <p:sp>
-        <p:nvSpPr>
-          <p:cNvPr id="2" name="Header Placeholder 1"/>
-          <p:cNvSpPr>
-            <a:spLocks noGrp="1"/>
-          </p:cNvSpPr>
-          <p:nvPr>
-            <p:ph type="hdr" sz="quarter"/>
-          </p:nvPr>
-        </p:nvSpPr>
-        <p:spPr>
-          <a:xfrm>
-            <a:off x="0" y="0"/>
-            <a:ext cx="2971800" cy="458788"/>
-          </a:xfrm>
-          <a:prstGeom prst="rect">
-            <a:avLst/>
-          </a:prstGeom>
-        </p:spPr>
-        <p:txBody>
-          <a:bodyPr vert="horz" lIns="91440" tIns="45720" rIns="91440" bIns="45720" rtlCol="0"/>
-          <a:lstStyle>
-            <a:lvl1pPr algn="l">
-              <a:defRPr sz="1200"/>
-            </a:lvl1pPr>
-          </a:lstStyle>
-          <a:p>
-            <a:endParaRPr lang="en-US"/>
-          </a:p>
-        </p:txBody>
-      </p:sp>
-      <p:sp>
-        <p:nvSpPr>
-          <p:cNvPr id="3" name="Date Placeholder 2"/>
-          <p:cNvSpPr>
-            <a:spLocks noGrp="1"/>
-          </p:cNvSpPr>
-          <p:nvPr>
-            <p:ph type="dt" idx="1"/>
-          </p:nvPr>
-        </p:nvSpPr>
-        <p:spPr>
-          <a:xfrm>
-            <a:off x="3884613" y="0"/>
-            <a:ext cx="2971800" cy="458788"/>
-          </a:xfrm>
-          <a:prstGeom prst="rect">
-            <a:avLst/>
-          </a:prstGeom>
-        </p:spPr>
-        <p:txBody>
-          <a:bodyPr vert="horz" lIns="91440" tIns="45720" rIns="91440" bIns="45720" rtlCol="0"/>
-          <a:lstStyle>
-            <a:lvl1pPr algn="r">
-              <a:defRPr sz="1200"/>
-            </a:lvl1pPr>
-          </a:lstStyle>
-          <a:p>
-            <a:fld id="{5282F153-3F37-0F45-9E97-73ACFA13230C}" type="datetimeFigureOut">
-              <a:rPr lang="en-US"/>
-              <a:t>7/23/19</a:t>
-            </a:fld>
-            <a:endParaRPr lang="en-US"/>
-          </a:p>
-        </p:txBody>
-      </p:sp>
-      <p:sp>
-        <p:nvSpPr>
-          <p:cNvPr id="4" name="Slide Image Placeholder 3"/>
-          <p:cNvSpPr>
-            <a:spLocks noGrp="1" noRot="1" noChangeAspect="1"/>
-          </p:cNvSpPr>
-          <p:nvPr>
-            <p:ph type="sldImg" idx="2"/>
-          </p:nvPr>
-        </p:nvSpPr>
-        <p:spPr>
-          <a:xfrm>
-            <a:off x="685800" y="1143000"/>
-            <a:ext cx="5486400" cy="3086100"/>
-          </a:xfrm>
-          <a:prstGeom prst="rect">
-            <a:avLst/>
-          </a:prstGeom>
-          <a:noFill/>
-          <a:ln w="12700">
-            <a:solidFill>
-              <a:prstClr val="black"/>
-            </a:solidFill>
-          </a:ln>
-        </p:spPr>
-        <p:txBody>
-          <a:bodyPr vert="horz" lIns="91440" tIns="45720" rIns="91440" bIns="45720" rtlCol="0" anchor="ctr"/>
-          <a:lstStyle/>
-          <a:p>
-            <a:endParaRPr lang="en-US"/>
-          </a:p>
-        </p:txBody>
-      </p:sp>
-      <p:sp>
-        <p:nvSpPr>
-          <p:cNvPr id="5" name="Notes Placeholder 4"/>
-          <p:cNvSpPr>
-            <a:spLocks noGrp="1"/>
-          </p:cNvSpPr>
-          <p:nvPr>
-            <p:ph type="body" sz="quarter" idx="3"/>
-          </p:nvPr>
-        </p:nvSpPr>
-        <p:spPr>
-          <a:xfrm>
-            <a:off x="685800" y="4400550"/>
-            <a:ext cx="5486400" cy="3600450"/>
-          </a:xfrm>
-          <a:prstGeom prst="rect">
-            <a:avLst/>
-          </a:prstGeom>
-        </p:spPr>
-        <p:txBody>
-          <a:bodyPr vert="horz" lIns="91440" tIns="45720" rIns="91440" bIns="45720" rtlCol="0"/>
-          <a:lstStyle/>
-          <a:p>
-            <a:pPr lvl="0"/>
-            <a:r>
-              <a:rPr lang="en-US"/>
-              <a:t>Click to edit Master text styles</a:t>
-            </a:r>
-          </a:p>
-          <a:p>
-            <a:pPr lvl="1"/>
-            <a:r>
-              <a:rPr lang="en-US"/>
-              <a:t>Second level</a:t>
-            </a:r>
-          </a:p>
-          <a:p>
-            <a:pPr lvl="2"/>
-            <a:r>
-              <a:rPr lang="en-US"/>
-              <a:t>Third level</a:t>
-            </a:r>
-          </a:p>
-          <a:p>
-            <a:pPr lvl="3"/>
-            <a:r>
-              <a:rPr lang="en-US"/>
-              <a:t>Fourth level</a:t>
-            </a:r>
-          </a:p>
-          <a:p>
-            <a:pPr lvl="4"/>
-            <a:r>
-              <a:rPr lang="en-US"/>
-              <a:t>Fifth level</a:t>
-            </a:r>
-          </a:p>
-        </p:txBody>
-      </p:sp>
-      <p:sp>
-        <p:nvSpPr>
-          <p:cNvPr id="6" name="Footer Placeholder 5"/>
-          <p:cNvSpPr>
-            <a:spLocks noGrp="1"/>
-          </p:cNvSpPr>
-          <p:nvPr>
-            <p:ph type="ftr" sz="quarter" idx="4"/>
-          </p:nvPr>
-        </p:nvSpPr>
-        <p:spPr>
-          <a:xfrm>
-            <a:off x="0" y="8685213"/>
-            <a:ext cx="2971800" cy="458787"/>
-          </a:xfrm>
-          <a:prstGeom prst="rect">
-            <a:avLst/>
-          </a:prstGeom>
-        </p:spPr>
-        <p:txBody>
-          <a:bodyPr vert="horz" lIns="91440" tIns="45720" rIns="91440" bIns="45720" rtlCol="0" anchor="b"/>
-          <a:lstStyle>
-            <a:lvl1pPr algn="l">
-              <a:defRPr sz="1200"/>
-            </a:lvl1pPr>
-          </a:lstStyle>
-          <a:p>
-            <a:endParaRPr lang="en-US"/>
-          </a:p>
-        </p:txBody>
-      </p:sp>
-      <p:sp>
-        <p:nvSpPr>
-          <p:cNvPr id="7" name="Slide Number Placeholder 6"/>
-          <p:cNvSpPr>
-            <a:spLocks noGrp="1"/>
-          </p:cNvSpPr>
-          <p:nvPr>
-            <p:ph type="sldNum" sz="quarter" idx="5"/>
-          </p:nvPr>
-        </p:nvSpPr>
-        <p:spPr>
-          <a:xfrm>
-            <a:off x="3884613" y="8685213"/>
-            <a:ext cx="2971800" cy="458787"/>
-          </a:xfrm>
-          <a:prstGeom prst="rect">
-            <a:avLst/>
-          </a:prstGeom>
-        </p:spPr>
-        <p:txBody>
-          <a:bodyPr vert="horz" lIns="91440" tIns="45720" rIns="91440" bIns="45720" rtlCol="0" anchor="b"/>
-          <a:lstStyle>
-            <a:lvl1pPr algn="r">
-              <a:defRPr sz="1200"/>
-            </a:lvl1pPr>
-          </a:lstStyle>
-          <a:p>
-            <a:fld id="{CE5E9CC1-C706-0F49-92D6-E571CC5EEA8F}" type="slidenum">
-              <a:rPr lang="en-US"/>
-              <a:t>‹#›</a:t>
-            </a:fld>
-            <a:endParaRPr lang="en-US"/>
-          </a:p>
-        </p:txBody>
-      </p:sp>
     </p:spTree>
     <p:extLst>
       <p:ext uri="{BB962C8B-B14F-4D97-AF65-F5344CB8AC3E}">
-        <p14:creationId xmlns:p14="http://schemas.microsoft.com/office/powerpoint/2010/main" val="1024086991"/>
+        <p14:creationId xmlns:p14="http://schemas.microsoft.com/office/powerpoint/2010/main" val="3224738109"/>
       </p:ext>
     </p:extLst>
   </p:cSld>
@@ -507,10 +288,6 @@
           <a:bodyPr/>
           <a:lstStyle/>
           <a:p>
-            <a:r>
-              <a:rPr lang="en-US" dirty="0"/>
-              <a:t/>
-            </a:r>
             <a:endParaRPr lang="en-US" dirty="0"/>
           </a:p>
         </p:txBody>
@@ -595,10 +372,6 @@
           <a:bodyPr/>
           <a:lstStyle/>
           <a:p>
-            <a:r>
-              <a:rPr lang="en-US" dirty="0"/>
-              <a:t/>
-            </a:r>
             <a:endParaRPr lang="en-US" dirty="0"/>
           </a:p>
         </p:txBody>
@@ -683,10 +456,6 @@
           <a:bodyPr/>
           <a:lstStyle/>
           <a:p>
-            <a:r>
-              <a:rPr lang="en-US" dirty="0"/>
-              <a:t/>
-            </a:r>
             <a:endParaRPr lang="en-US" dirty="0"/>
           </a:p>
         </p:txBody>
@@ -771,10 +540,6 @@
           <a:bodyPr/>
           <a:lstStyle/>
           <a:p>
-            <a:r>
-              <a:rPr lang="en-US" dirty="0"/>
-              <a:t/>
-            </a:r>
             <a:endParaRPr lang="en-US" dirty="0"/>
           </a:p>
         </p:txBody>
@@ -859,10 +624,6 @@
           <a:bodyPr/>
           <a:lstStyle/>
           <a:p>
-            <a:r>
-              <a:rPr lang="en-US" dirty="0"/>
-              <a:t/>
-            </a:r>
             <a:endParaRPr lang="en-US" dirty="0"/>
           </a:p>
         </p:txBody>
@@ -947,10 +708,6 @@
           <a:bodyPr/>
           <a:lstStyle/>
           <a:p>
-            <a:r>
-              <a:rPr lang="en-US" dirty="0"/>
-              <a:t/>
-            </a:r>
             <a:endParaRPr lang="en-US" dirty="0"/>
           </a:p>
         </p:txBody>
@@ -1035,10 +792,6 @@
           <a:bodyPr/>
           <a:lstStyle/>
           <a:p>
-            <a:r>
-              <a:rPr lang="en-US" dirty="0"/>
-              <a:t/>
-            </a:r>
             <a:endParaRPr lang="en-US" dirty="0"/>
           </a:p>
         </p:txBody>
@@ -1123,10 +876,6 @@
           <a:bodyPr/>
           <a:lstStyle/>
           <a:p>
-            <a:r>
-              <a:rPr lang="en-US" dirty="0"/>
-              <a:t/>
-            </a:r>
             <a:endParaRPr lang="en-US" dirty="0"/>
           </a:p>
         </p:txBody>
@@ -1194,12 +943,29 @@
   <p:clrMapOvr>
     <a:masterClrMapping/>
   </p:clrMapOvr>
+  <mc:AlternateContent xmlns:mc="http://schemas.openxmlformats.org/markup-compatibility/2006" xmlns:p159="http://schemas.microsoft.com/office/powerpoint/2015/09/main">
+    <mc:Choice Requires="p159">
+      <p:transition xmlns:p14="http://schemas.microsoft.com/office/powerpoint/2010/main" spd="slow" p14:dur="2000">
+        <p159:morph option="byObject"/>
+      </p:transition>
+    </mc:Choice>
+    <mc:Fallback xmlns="">
+      <p:transition spd="slow">
+        <p:fade/>
+      </p:transition>
+    </mc:Fallback>
+  </mc:AlternateContent>
 </p:sldLayout>
 </file>
 
 <file path=ppt/slideMasters/slideMaster1.xml><?xml version="1.0" encoding="utf-8"?>
 <p:sldMaster xmlns:a="http://schemas.openxmlformats.org/drawingml/2006/main" xmlns:r="http://schemas.openxmlformats.org/officeDocument/2006/relationships" xmlns:p="http://schemas.openxmlformats.org/presentationml/2006/main">
   <p:cSld>
+    <p:bg>
+      <p:bgRef idx="1001">
+        <a:schemeClr val="bg1"/>
+      </p:bgRef>
+    </p:bg>
     <p:spTree>
       <p:nvGrpSpPr>
         <p:cNvPr id="1" name=""/>
@@ -1220,6 +986,18 @@
   <p:sldLayoutIdLst>
     <p:sldLayoutId id="2147483649" r:id="rId1"/>
   </p:sldLayoutIdLst>
+  <mc:AlternateContent xmlns:mc="http://schemas.openxmlformats.org/markup-compatibility/2006" xmlns:p159="http://schemas.microsoft.com/office/powerpoint/2015/09/main">
+    <mc:Choice Requires="p159">
+      <p:transition xmlns:p14="http://schemas.microsoft.com/office/powerpoint/2010/main" spd="slow" p14:dur="2000">
+        <p159:morph option="byObject"/>
+      </p:transition>
+    </mc:Choice>
+    <mc:Fallback xmlns="">
+      <p:transition spd="slow">
+        <p:fade/>
+      </p:transition>
+    </mc:Fallback>
+  </mc:AlternateContent>
   <p:hf sldNum="0" hdr="0" ftr="0" dt="0"/>
   <p:txStyles>
     <p:titleStyle>
@@ -1482,6 +1260,7 @@
         <a:solidFill>
           <a:srgbClr val="2D2150"/>
         </a:solidFill>
+        <a:effectLst/>
       </p:bgPr>
     </p:bg>
     <p:spTree>
@@ -1519,6 +1298,13 @@
           </a:solidFill>
           <a:ln/>
         </p:spPr>
+        <p:txBody>
+          <a:bodyPr/>
+          <a:lstStyle/>
+          <a:p>
+            <a:endParaRPr lang="en-IN"/>
+          </a:p>
+        </p:txBody>
       </p:sp>
       <p:sp>
         <p:nvSpPr>
@@ -1541,6 +1327,13 @@
           </a:solidFill>
           <a:ln/>
         </p:spPr>
+        <p:txBody>
+          <a:bodyPr/>
+          <a:lstStyle/>
+          <a:p>
+            <a:endParaRPr lang="en-IN"/>
+          </a:p>
+        </p:txBody>
       </p:sp>
       <p:sp>
         <p:nvSpPr>
@@ -1561,17 +1354,24 @@
           </a:solidFill>
           <a:ln/>
         </p:spPr>
+        <p:txBody>
+          <a:bodyPr/>
+          <a:lstStyle/>
+          <a:p>
+            <a:endParaRPr lang="en-IN"/>
+          </a:p>
+        </p:txBody>
       </p:sp>
       <p:pic>
         <p:nvPicPr>
-          <p:cNvPr id="5" name="Image 0" descr="/home/claude/studygenie/icons/brain_peach.png">    </p:cNvPr>
+          <p:cNvPr id="5" name="Image 0" descr="/home/claude/studygenie/icons/brain_peach.png"/>
           <p:cNvPicPr>
             <a:picLocks noChangeAspect="1"/>
           </p:cNvPicPr>
           <p:nvPr/>
         </p:nvPicPr>
         <p:blipFill>
-          <a:blip r:embed="rId1"/>
+          <a:blip r:embed="rId3"/>
           <a:stretch>
             <a:fillRect/>
           </a:stretch>
@@ -1607,11 +1407,11 @@
           <a:bodyPr wrap="square" rtlCol="0" anchor="ctr"/>
           <a:lstStyle/>
           <a:p>
-            <a:pPr algn="ctr" indent="0" marL="0">
+            <a:pPr marL="0" indent="0" algn="ctr">
               <a:buNone/>
             </a:pPr>
             <a:r>
-              <a:rPr lang="en-US" sz="5000" b="1" dirty="0">
+              <a:rPr lang="en-US" sz="5400" b="1" dirty="0">
                 <a:solidFill>
                   <a:srgbClr val="FFFFFF"/>
                 </a:solidFill>
@@ -1621,7 +1421,7 @@
               </a:rPr>
               <a:t>StudyGenie AI</a:t>
             </a:r>
-            <a:endParaRPr lang="en-US" sz="5000" dirty="0"/>
+            <a:endParaRPr lang="en-US" sz="5400" dirty="0"/>
           </a:p>
         </p:txBody>
       </p:sp>
@@ -1646,11 +1446,11 @@
           <a:bodyPr wrap="square" rtlCol="0" anchor="ctr"/>
           <a:lstStyle/>
           <a:p>
-            <a:pPr algn="ctr" indent="0" marL="0">
+            <a:pPr marL="0" indent="0" algn="ctr">
               <a:buNone/>
             </a:pPr>
             <a:r>
-              <a:rPr lang="en-US" sz="1900" dirty="0">
+              <a:rPr lang="en-US" sz="2400" dirty="0">
                 <a:solidFill>
                   <a:srgbClr val="D9CFF0"/>
                 </a:solidFill>
@@ -1660,7 +1460,7 @@
               </a:rPr>
               <a:t>Personalized Study Planner using Generative AI</a:t>
             </a:r>
-            <a:endParaRPr lang="en-US" sz="1900" dirty="0"/>
+            <a:endParaRPr lang="en-US" sz="2400" dirty="0"/>
           </a:p>
         </p:txBody>
       </p:sp>
@@ -1686,10 +1486,17 @@
             <a:prstDash val="solid"/>
           </a:ln>
         </p:spPr>
-      </p:sp>
-      <p:sp>
-        <p:nvSpPr>
-          <p:cNvPr id="9" name="Shape 6"/>
+        <p:txBody>
+          <a:bodyPr/>
+          <a:lstStyle/>
+          <a:p>
+            <a:endParaRPr lang="en-IN"/>
+          </a:p>
+        </p:txBody>
+      </p:sp>
+      <p:sp>
+        <p:nvSpPr>
+          <p:cNvPr id="10" name="Text 7"/>
           <p:cNvSpPr/>
           <p:nvPr/>
         </p:nvSpPr>
@@ -1698,28 +1505,6 @@
             <a:off x="4480560" y="4251960"/>
             <a:ext cx="3200400" cy="502920"/>
           </a:xfrm>
-          <a:prstGeom prst="roundRect">
-            <a:avLst>
-              <a:gd name="adj" fmla="val 50909"/>
-            </a:avLst>
-          </a:prstGeom>
-          <a:solidFill>
-            <a:srgbClr val="473A6E"/>
-          </a:solidFill>
-          <a:ln/>
-        </p:spPr>
-      </p:sp>
-      <p:sp>
-        <p:nvSpPr>
-          <p:cNvPr id="10" name="Text 7"/>
-          <p:cNvSpPr/>
-          <p:nvPr/>
-        </p:nvSpPr>
-        <p:spPr>
-          <a:xfrm>
-            <a:off x="4480560" y="4251960"/>
-            <a:ext cx="3200400" cy="502920"/>
-          </a:xfrm>
           <a:prstGeom prst="rect">
             <a:avLst/>
           </a:prstGeom>
@@ -1730,21 +1515,133 @@
           <a:bodyPr wrap="square" rtlCol="0" anchor="ctr"/>
           <a:lstStyle/>
           <a:p>
-            <a:pPr algn="ctr" indent="0" marL="0">
+            <a:pPr marL="0" indent="0" algn="ctr">
               <a:buNone/>
             </a:pPr>
-            <a:r>
-              <a:rPr lang="en-US" sz="1150" b="1" dirty="0">
-                <a:solidFill>
-                  <a:srgbClr val="F6C89F"/>
-                </a:solidFill>
-                <a:latin typeface="Calibri" pitchFamily="34" charset="0"/>
-                <a:ea typeface="Calibri" pitchFamily="34" charset="-122"/>
-                <a:cs typeface="Calibri" pitchFamily="34" charset="-120"/>
-              </a:rPr>
-              <a:t>Course: Python with Generative AI (VAC)</a:t>
-            </a:r>
             <a:endParaRPr lang="en-US" sz="1150" dirty="0"/>
+          </a:p>
+        </p:txBody>
+      </p:sp>
+      <p:sp>
+        <p:nvSpPr>
+          <p:cNvPr id="11" name="TextBox 10">
+            <a:extLst>
+              <a:ext uri="{FF2B5EF4-FFF2-40B4-BE49-F238E27FC236}">
+                <a16:creationId xmlns:a16="http://schemas.microsoft.com/office/drawing/2014/main" id="{9B1C62CC-40AE-FEEC-6B57-91496F435090}"/>
+              </a:ext>
+            </a:extLst>
+          </p:cNvPr>
+          <p:cNvSpPr txBox="1"/>
+          <p:nvPr/>
+        </p:nvSpPr>
+        <p:spPr>
+          <a:xfrm>
+            <a:off x="2266950" y="4977675"/>
+            <a:ext cx="4791075" cy="1200329"/>
+          </a:xfrm>
+          <a:prstGeom prst="rect">
+            <a:avLst/>
+          </a:prstGeom>
+          <a:noFill/>
+        </p:spPr>
+        <p:txBody>
+          <a:bodyPr wrap="square" rtlCol="0">
+            <a:spAutoFit/>
+          </a:bodyPr>
+          <a:lstStyle/>
+          <a:p>
+            <a:r>
+              <a:rPr lang="en-IN" dirty="0">
+                <a:solidFill>
+                  <a:schemeClr val="accent1">
+                    <a:lumMod val="40000"/>
+                    <a:lumOff val="60000"/>
+                  </a:schemeClr>
+                </a:solidFill>
+              </a:rPr>
+              <a:t>MITHRA R – 710725205066(IT)</a:t>
+            </a:r>
+          </a:p>
+          <a:p>
+            <a:r>
+              <a:rPr lang="en-IN" dirty="0">
+                <a:solidFill>
+                  <a:schemeClr val="accent1">
+                    <a:lumMod val="40000"/>
+                    <a:lumOff val="60000"/>
+                  </a:schemeClr>
+                </a:solidFill>
+              </a:rPr>
+              <a:t>PREETHA P – 710725205078(IT)</a:t>
+            </a:r>
+          </a:p>
+          <a:p>
+            <a:r>
+              <a:rPr lang="en-IN" dirty="0">
+                <a:solidFill>
+                  <a:schemeClr val="accent1">
+                    <a:lumMod val="40000"/>
+                    <a:lumOff val="60000"/>
+                  </a:schemeClr>
+                </a:solidFill>
+              </a:rPr>
+              <a:t>RITHIKA S – 710725205087(IT)</a:t>
+            </a:r>
+          </a:p>
+          <a:p>
+            <a:r>
+              <a:rPr lang="en-IN" dirty="0">
+                <a:solidFill>
+                  <a:schemeClr val="accent1">
+                    <a:lumMod val="40000"/>
+                    <a:lumOff val="60000"/>
+                  </a:schemeClr>
+                </a:solidFill>
+              </a:rPr>
+              <a:t>RITHISH M – 710725104145(CSE)</a:t>
+            </a:r>
+          </a:p>
+        </p:txBody>
+      </p:sp>
+      <p:sp>
+        <p:nvSpPr>
+          <p:cNvPr id="12" name="TextBox 11">
+            <a:extLst>
+              <a:ext uri="{FF2B5EF4-FFF2-40B4-BE49-F238E27FC236}">
+                <a16:creationId xmlns:a16="http://schemas.microsoft.com/office/drawing/2014/main" id="{E8F6CEEC-5E84-3568-D28D-7B0E8228B6B0}"/>
+              </a:ext>
+            </a:extLst>
+          </p:cNvPr>
+          <p:cNvSpPr txBox="1"/>
+          <p:nvPr/>
+        </p:nvSpPr>
+        <p:spPr>
+          <a:xfrm>
+            <a:off x="2377440" y="4453890"/>
+            <a:ext cx="3524250" cy="369332"/>
+          </a:xfrm>
+          <a:prstGeom prst="rect">
+            <a:avLst/>
+          </a:prstGeom>
+          <a:noFill/>
+        </p:spPr>
+        <p:txBody>
+          <a:bodyPr wrap="square" rtlCol="0">
+            <a:spAutoFit/>
+          </a:bodyPr>
+          <a:lstStyle/>
+          <a:p>
+            <a:r>
+              <a:rPr lang="en-IN" dirty="0">
+                <a:solidFill>
+                  <a:schemeClr val="accent1">
+                    <a:lumMod val="40000"/>
+                    <a:lumOff val="60000"/>
+                  </a:schemeClr>
+                </a:solidFill>
+              </a:rPr>
+              <a:t>PRESENTED BY:</a:t>
+            </a:r>
           </a:p>
         </p:txBody>
       </p:sp>
@@ -1753,6 +1650,18 @@
   <p:clrMapOvr>
     <a:masterClrMapping/>
   </p:clrMapOvr>
+  <mc:AlternateContent xmlns:mc="http://schemas.openxmlformats.org/markup-compatibility/2006" xmlns:p159="http://schemas.microsoft.com/office/powerpoint/2015/09/main">
+    <mc:Choice Requires="p159">
+      <p:transition xmlns:p14="http://schemas.microsoft.com/office/powerpoint/2010/main" spd="slow" p14:dur="2000">
+        <p159:morph option="byObject"/>
+      </p:transition>
+    </mc:Choice>
+    <mc:Fallback xmlns="">
+      <p:transition spd="slow">
+        <p:fade/>
+      </p:transition>
+    </mc:Fallback>
+  </mc:AlternateContent>
 </p:sld>
 </file>
 
@@ -1764,6 +1673,7 @@
         <a:solidFill>
           <a:srgbClr val="FAF8FC"/>
         </a:solidFill>
+        <a:effectLst/>
       </p:bgPr>
     </p:bg>
     <p:spTree>
@@ -1801,7 +1711,7 @@
           <a:bodyPr wrap="square" rtlCol="0" anchor="ctr"/>
           <a:lstStyle/>
           <a:p>
-            <a:pPr indent="0" marL="0">
+            <a:pPr marL="0" indent="0">
               <a:buNone/>
             </a:pPr>
             <a:r>
@@ -1827,7 +1737,7 @@
         </p:nvSpPr>
         <p:spPr>
           <a:xfrm>
-            <a:off x="548640" y="1188720"/>
+            <a:off x="579120" y="1325880"/>
             <a:ext cx="6492240" cy="2651760"/>
           </a:xfrm>
           <a:prstGeom prst="rect">
@@ -1840,14 +1750,14 @@
           <a:bodyPr wrap="square" rtlCol="0" anchor="t"/>
           <a:lstStyle/>
           <a:p>
-            <a:pPr indent="0" marL="0">
+            <a:pPr marL="0" indent="0">
               <a:lnSpc>
                 <a:spcPct val="128000"/>
               </a:lnSpc>
               <a:buNone/>
             </a:pPr>
             <a:r>
-              <a:rPr lang="en-US" sz="1350" dirty="0">
+              <a:rPr lang="en-US" sz="1600" dirty="0">
                 <a:solidFill>
                   <a:srgbClr val="746E8C"/>
                 </a:solidFill>
@@ -1858,14 +1768,8 @@
               <a:t>Students often struggle to manage their study time efficiently before exams. Creating a proper study plan, understanding difficult topics, preparing revision notes, and practicing questions require significant time and effort.
 </a:t>
             </a:r>
-            <a:pPr indent="0" marL="0">
-              <a:lnSpc>
-                <a:spcPct val="128000"/>
-              </a:lnSpc>
-              <a:buNone/>
-            </a:pPr>
-            <a:r>
-              <a:rPr lang="en-US" sz="1350" b="1" dirty="0">
+            <a:r>
+              <a:rPr lang="en-US" sz="1600" b="1" dirty="0">
                 <a:solidFill>
                   <a:srgbClr val="2D2150"/>
                 </a:solidFill>
@@ -1875,14 +1779,8 @@
               </a:rPr>
               <a:t>StudyGenie AI </a:t>
             </a:r>
-            <a:pPr indent="0" marL="0">
-              <a:lnSpc>
-                <a:spcPct val="128000"/>
-              </a:lnSpc>
-              <a:buNone/>
-            </a:pPr>
-            <a:r>
-              <a:rPr lang="en-US" sz="1350" dirty="0">
+            <a:r>
+              <a:rPr lang="en-US" sz="1600" dirty="0">
                 <a:solidFill>
                   <a:srgbClr val="746E8C"/>
                 </a:solidFill>
@@ -1892,7 +1790,7 @@
               </a:rPr>
               <a:t>is a Generative AI-based application that automatically creates a personalized study plan and provides additional learning assistance through AI.</a:t>
             </a:r>
-            <a:endParaRPr lang="en-US" sz="1350" dirty="0"/>
+            <a:endParaRPr lang="en-US" sz="1600" dirty="0"/>
           </a:p>
         </p:txBody>
       </p:sp>
@@ -1904,7 +1802,7 @@
         </p:nvSpPr>
         <p:spPr>
           <a:xfrm>
-            <a:off x="7360920" y="411480"/>
+            <a:off x="7223760" y="411480"/>
             <a:ext cx="4251960" cy="6035040"/>
           </a:xfrm>
           <a:prstGeom prst="roundRect">
@@ -1917,6 +1815,13 @@
           </a:solidFill>
           <a:ln/>
         </p:spPr>
+        <p:txBody>
+          <a:bodyPr/>
+          <a:lstStyle/>
+          <a:p>
+            <a:endParaRPr lang="en-IN" dirty="0"/>
+          </a:p>
+        </p:txBody>
       </p:sp>
       <p:sp>
         <p:nvSpPr>
@@ -1939,7 +1844,7 @@
           <a:bodyPr wrap="square" rtlCol="0" anchor="ctr"/>
           <a:lstStyle/>
           <a:p>
-            <a:pPr indent="0" marL="0">
+            <a:pPr marL="0" indent="0">
               <a:buNone/>
             </a:pPr>
             <a:r>
@@ -1976,176 +1881,17 @@
           </a:solidFill>
           <a:ln/>
         </p:spPr>
+        <p:txBody>
+          <a:bodyPr/>
+          <a:lstStyle/>
+          <a:p>
+            <a:endParaRPr lang="en-IN"/>
+          </a:p>
+        </p:txBody>
       </p:sp>
       <p:pic>
         <p:nvPicPr>
-          <p:cNvPr id="7" name="Image 0" descr="/home/claude/studygenie/icons/calendar_blush.png">    </p:cNvPr>
-          <p:cNvPicPr>
-            <a:picLocks noChangeAspect="1"/>
-          </p:cNvPicPr>
-          <p:nvPr/>
-        </p:nvPicPr>
-        <p:blipFill>
-          <a:blip r:embed="rId1"/>
-          <a:stretch>
-            <a:fillRect/>
-          </a:stretch>
-        </p:blipFill>
-        <p:spPr>
-          <a:xfrm>
-            <a:off x="7799832" y="1399032"/>
-            <a:ext cx="310896" cy="310896"/>
-          </a:xfrm>
-          <a:prstGeom prst="rect">
-            <a:avLst/>
-          </a:prstGeom>
-        </p:spPr>
-      </p:pic>
-      <p:sp>
-        <p:nvSpPr>
-          <p:cNvPr id="8" name="Text 5"/>
-          <p:cNvSpPr/>
-          <p:nvPr/>
-        </p:nvSpPr>
-        <p:spPr>
-          <a:xfrm>
-            <a:off x="8366760" y="1280160"/>
-            <a:ext cx="3063240" cy="548640"/>
-          </a:xfrm>
-          <a:prstGeom prst="rect">
-            <a:avLst/>
-          </a:prstGeom>
-          <a:noFill/>
-          <a:ln/>
-        </p:spPr>
-        <p:txBody>
-          <a:bodyPr wrap="square" rtlCol="0" anchor="ctr"/>
-          <a:lstStyle/>
-          <a:p>
-            <a:pPr indent="0" marL="0">
-              <a:buNone/>
-            </a:pPr>
-            <a:r>
-              <a:rPr lang="en-US" sz="1300" b="1" dirty="0">
-                <a:solidFill>
-                  <a:srgbClr val="FFFFFF"/>
-                </a:solidFill>
-                <a:latin typeface="Calibri" pitchFamily="34" charset="0"/>
-                <a:ea typeface="Calibri" pitchFamily="34" charset="-122"/>
-                <a:cs typeface="Calibri" pitchFamily="34" charset="-120"/>
-              </a:rPr>
-              <a:t>Personalized Study Planner</a:t>
-            </a:r>
-            <a:endParaRPr lang="en-US" sz="1300" dirty="0"/>
-          </a:p>
-        </p:txBody>
-      </p:sp>
-      <p:sp>
-        <p:nvSpPr>
-          <p:cNvPr id="9" name="Shape 6"/>
-          <p:cNvSpPr/>
-          <p:nvPr/>
-        </p:nvSpPr>
-        <p:spPr>
-          <a:xfrm>
-            <a:off x="7680960" y="2066544"/>
-            <a:ext cx="548640" cy="548640"/>
-          </a:xfrm>
-          <a:prstGeom prst="ellipse">
-            <a:avLst/>
-          </a:prstGeom>
-          <a:solidFill>
-            <a:srgbClr val="473A6E"/>
-          </a:solidFill>
-          <a:ln/>
-        </p:spPr>
-      </p:sp>
-      <p:pic>
-        <p:nvPicPr>
-          <p:cNvPr id="10" name="Image 1" descr="/home/claude/studygenie/icons/book_blush.png">    </p:cNvPr>
-          <p:cNvPicPr>
-            <a:picLocks noChangeAspect="1"/>
-          </p:cNvPicPr>
-          <p:nvPr/>
-        </p:nvPicPr>
-        <p:blipFill>
-          <a:blip r:embed="rId2"/>
-          <a:stretch>
-            <a:fillRect/>
-          </a:stretch>
-        </p:blipFill>
-        <p:spPr>
-          <a:xfrm>
-            <a:off x="7799832" y="2185416"/>
-            <a:ext cx="310896" cy="310896"/>
-          </a:xfrm>
-          <a:prstGeom prst="rect">
-            <a:avLst/>
-          </a:prstGeom>
-        </p:spPr>
-      </p:pic>
-      <p:sp>
-        <p:nvSpPr>
-          <p:cNvPr id="11" name="Text 7"/>
-          <p:cNvSpPr/>
-          <p:nvPr/>
-        </p:nvSpPr>
-        <p:spPr>
-          <a:xfrm>
-            <a:off x="8366760" y="2066544"/>
-            <a:ext cx="3063240" cy="548640"/>
-          </a:xfrm>
-          <a:prstGeom prst="rect">
-            <a:avLst/>
-          </a:prstGeom>
-          <a:noFill/>
-          <a:ln/>
-        </p:spPr>
-        <p:txBody>
-          <a:bodyPr wrap="square" rtlCol="0" anchor="ctr"/>
-          <a:lstStyle/>
-          <a:p>
-            <a:pPr indent="0" marL="0">
-              <a:buNone/>
-            </a:pPr>
-            <a:r>
-              <a:rPr lang="en-US" sz="1300" b="1" dirty="0">
-                <a:solidFill>
-                  <a:srgbClr val="FFFFFF"/>
-                </a:solidFill>
-                <a:latin typeface="Calibri" pitchFamily="34" charset="0"/>
-                <a:ea typeface="Calibri" pitchFamily="34" charset="-122"/>
-                <a:cs typeface="Calibri" pitchFamily="34" charset="-120"/>
-              </a:rPr>
-              <a:t>Topic Explanation</a:t>
-            </a:r>
-            <a:endParaRPr lang="en-US" sz="1300" dirty="0"/>
-          </a:p>
-        </p:txBody>
-      </p:sp>
-      <p:sp>
-        <p:nvSpPr>
-          <p:cNvPr id="12" name="Shape 8"/>
-          <p:cNvSpPr/>
-          <p:nvPr/>
-        </p:nvSpPr>
-        <p:spPr>
-          <a:xfrm>
-            <a:off x="7680960" y="2852928"/>
-            <a:ext cx="548640" cy="548640"/>
-          </a:xfrm>
-          <a:prstGeom prst="ellipse">
-            <a:avLst/>
-          </a:prstGeom>
-          <a:solidFill>
-            <a:srgbClr val="473A6E"/>
-          </a:solidFill>
-          <a:ln/>
-        </p:spPr>
-      </p:sp>
-      <p:pic>
-        <p:nvPicPr>
-          <p:cNvPr id="13" name="Image 2" descr="/home/claude/studygenie/icons/penfancy_blush.png">    </p:cNvPr>
+          <p:cNvPr id="7" name="Image 0" descr="/home/claude/studygenie/icons/calendar_blush.png"/>
           <p:cNvPicPr>
             <a:picLocks noChangeAspect="1"/>
           </p:cNvPicPr>
@@ -2159,7 +1905,7 @@
         </p:blipFill>
         <p:spPr>
           <a:xfrm>
-            <a:off x="7799832" y="2971800"/>
+            <a:off x="7799832" y="1399032"/>
             <a:ext cx="310896" cy="310896"/>
           </a:xfrm>
           <a:prstGeom prst="rect">
@@ -2169,13 +1915,13 @@
       </p:pic>
       <p:sp>
         <p:nvSpPr>
-          <p:cNvPr id="14" name="Text 9"/>
-          <p:cNvSpPr/>
-          <p:nvPr/>
-        </p:nvSpPr>
-        <p:spPr>
-          <a:xfrm>
-            <a:off x="8366760" y="2852928"/>
+          <p:cNvPr id="8" name="Text 5"/>
+          <p:cNvSpPr/>
+          <p:nvPr/>
+        </p:nvSpPr>
+        <p:spPr>
+          <a:xfrm>
+            <a:off x="8366760" y="1280160"/>
             <a:ext cx="3063240" cy="548640"/>
           </a:xfrm>
           <a:prstGeom prst="rect">
@@ -2188,11 +1934,11 @@
           <a:bodyPr wrap="square" rtlCol="0" anchor="ctr"/>
           <a:lstStyle/>
           <a:p>
-            <a:pPr indent="0" marL="0">
+            <a:pPr marL="0" indent="0">
               <a:buNone/>
             </a:pPr>
             <a:r>
-              <a:rPr lang="en-US" sz="1300" b="1" dirty="0">
+              <a:rPr lang="en-US" b="1" dirty="0">
                 <a:solidFill>
                   <a:srgbClr val="FFFFFF"/>
                 </a:solidFill>
@@ -2200,21 +1946,21 @@
                 <a:ea typeface="Calibri" pitchFamily="34" charset="-122"/>
                 <a:cs typeface="Calibri" pitchFamily="34" charset="-120"/>
               </a:rPr>
-              <a:t>Revision Notes</a:t>
-            </a:r>
-            <a:endParaRPr lang="en-US" sz="1300" dirty="0"/>
-          </a:p>
-        </p:txBody>
-      </p:sp>
-      <p:sp>
-        <p:nvSpPr>
-          <p:cNvPr id="15" name="Shape 10"/>
-          <p:cNvSpPr/>
-          <p:nvPr/>
-        </p:nvSpPr>
-        <p:spPr>
-          <a:xfrm>
-            <a:off x="7680960" y="3639312"/>
+              <a:t>Personalized Study Planner</a:t>
+            </a:r>
+            <a:endParaRPr lang="en-US" dirty="0"/>
+          </a:p>
+        </p:txBody>
+      </p:sp>
+      <p:sp>
+        <p:nvSpPr>
+          <p:cNvPr id="9" name="Shape 6"/>
+          <p:cNvSpPr/>
+          <p:nvPr/>
+        </p:nvSpPr>
+        <p:spPr>
+          <a:xfrm>
+            <a:off x="7680960" y="2066544"/>
             <a:ext cx="548640" cy="548640"/>
           </a:xfrm>
           <a:prstGeom prst="ellipse">
@@ -2225,10 +1971,17 @@
           </a:solidFill>
           <a:ln/>
         </p:spPr>
+        <p:txBody>
+          <a:bodyPr/>
+          <a:lstStyle/>
+          <a:p>
+            <a:endParaRPr lang="en-IN"/>
+          </a:p>
+        </p:txBody>
       </p:sp>
       <p:pic>
         <p:nvPicPr>
-          <p:cNvPr id="16" name="Image 3" descr="/home/claude/studygenie/icons/question_blush.png">    </p:cNvPr>
+          <p:cNvPr id="10" name="Image 1" descr="/home/claude/studygenie/icons/book_blush.png"/>
           <p:cNvPicPr>
             <a:picLocks noChangeAspect="1"/>
           </p:cNvPicPr>
@@ -2242,7 +1995,7 @@
         </p:blipFill>
         <p:spPr>
           <a:xfrm>
-            <a:off x="7799832" y="3758184"/>
+            <a:off x="7799832" y="2185416"/>
             <a:ext cx="310896" cy="310896"/>
           </a:xfrm>
           <a:prstGeom prst="rect">
@@ -2252,13 +2005,13 @@
       </p:pic>
       <p:sp>
         <p:nvSpPr>
-          <p:cNvPr id="17" name="Text 11"/>
-          <p:cNvSpPr/>
-          <p:nvPr/>
-        </p:nvSpPr>
-        <p:spPr>
-          <a:xfrm>
-            <a:off x="8366760" y="3639312"/>
+          <p:cNvPr id="11" name="Text 7"/>
+          <p:cNvSpPr/>
+          <p:nvPr/>
+        </p:nvSpPr>
+        <p:spPr>
+          <a:xfrm>
+            <a:off x="8366760" y="2066544"/>
             <a:ext cx="3063240" cy="548640"/>
           </a:xfrm>
           <a:prstGeom prst="rect">
@@ -2271,11 +2024,11 @@
           <a:bodyPr wrap="square" rtlCol="0" anchor="ctr"/>
           <a:lstStyle/>
           <a:p>
-            <a:pPr indent="0" marL="0">
+            <a:pPr marL="0" indent="0">
               <a:buNone/>
             </a:pPr>
             <a:r>
-              <a:rPr lang="en-US" sz="1300" b="1" dirty="0">
+              <a:rPr lang="en-US" b="1" dirty="0">
                 <a:solidFill>
                   <a:srgbClr val="FFFFFF"/>
                 </a:solidFill>
@@ -2283,21 +2036,21 @@
                 <a:ea typeface="Calibri" pitchFamily="34" charset="-122"/>
                 <a:cs typeface="Calibri" pitchFamily="34" charset="-120"/>
               </a:rPr>
-              <a:t>AI Doubt Solver</a:t>
-            </a:r>
-            <a:endParaRPr lang="en-US" sz="1300" dirty="0"/>
-          </a:p>
-        </p:txBody>
-      </p:sp>
-      <p:sp>
-        <p:nvSpPr>
-          <p:cNvPr id="18" name="Shape 12"/>
-          <p:cNvSpPr/>
-          <p:nvPr/>
-        </p:nvSpPr>
-        <p:spPr>
-          <a:xfrm>
-            <a:off x="7680960" y="4425696"/>
+              <a:t>Topic Explanation</a:t>
+            </a:r>
+            <a:endParaRPr lang="en-US" dirty="0"/>
+          </a:p>
+        </p:txBody>
+      </p:sp>
+      <p:sp>
+        <p:nvSpPr>
+          <p:cNvPr id="12" name="Shape 8"/>
+          <p:cNvSpPr/>
+          <p:nvPr/>
+        </p:nvSpPr>
+        <p:spPr>
+          <a:xfrm>
+            <a:off x="7680960" y="2852928"/>
             <a:ext cx="548640" cy="548640"/>
           </a:xfrm>
           <a:prstGeom prst="ellipse">
@@ -2308,10 +2061,17 @@
           </a:solidFill>
           <a:ln/>
         </p:spPr>
+        <p:txBody>
+          <a:bodyPr/>
+          <a:lstStyle/>
+          <a:p>
+            <a:endParaRPr lang="en-IN"/>
+          </a:p>
+        </p:txBody>
       </p:sp>
       <p:pic>
         <p:nvPicPr>
-          <p:cNvPr id="19" name="Image 4" descr="/home/claude/studygenie/icons/clipboardcheck_blush.png">    </p:cNvPr>
+          <p:cNvPr id="13" name="Image 2" descr="/home/claude/studygenie/icons/penfancy_blush.png"/>
           <p:cNvPicPr>
             <a:picLocks noChangeAspect="1"/>
           </p:cNvPicPr>
@@ -2325,7 +2085,7 @@
         </p:blipFill>
         <p:spPr>
           <a:xfrm>
-            <a:off x="7799832" y="4544568"/>
+            <a:off x="7799832" y="2971800"/>
             <a:ext cx="310896" cy="310896"/>
           </a:xfrm>
           <a:prstGeom prst="rect">
@@ -2335,13 +2095,13 @@
       </p:pic>
       <p:sp>
         <p:nvSpPr>
-          <p:cNvPr id="20" name="Text 13"/>
-          <p:cNvSpPr/>
-          <p:nvPr/>
-        </p:nvSpPr>
-        <p:spPr>
-          <a:xfrm>
-            <a:off x="8366760" y="4425696"/>
+          <p:cNvPr id="14" name="Text 9"/>
+          <p:cNvSpPr/>
+          <p:nvPr/>
+        </p:nvSpPr>
+        <p:spPr>
+          <a:xfrm>
+            <a:off x="8366760" y="2852928"/>
             <a:ext cx="3063240" cy="548640"/>
           </a:xfrm>
           <a:prstGeom prst="rect">
@@ -2354,11 +2114,11 @@
           <a:bodyPr wrap="square" rtlCol="0" anchor="ctr"/>
           <a:lstStyle/>
           <a:p>
-            <a:pPr indent="0" marL="0">
+            <a:pPr marL="0" indent="0">
               <a:buNone/>
             </a:pPr>
             <a:r>
-              <a:rPr lang="en-US" sz="1300" b="1" dirty="0">
+              <a:rPr lang="en-US" sz="2000" b="1" dirty="0">
                 <a:solidFill>
                   <a:srgbClr val="FFFFFF"/>
                 </a:solidFill>
@@ -2366,21 +2126,21 @@
                 <a:ea typeface="Calibri" pitchFamily="34" charset="-122"/>
                 <a:cs typeface="Calibri" pitchFamily="34" charset="-120"/>
               </a:rPr>
-              <a:t>AI Quiz Generator</a:t>
-            </a:r>
-            <a:endParaRPr lang="en-US" sz="1300" dirty="0"/>
-          </a:p>
-        </p:txBody>
-      </p:sp>
-      <p:sp>
-        <p:nvSpPr>
-          <p:cNvPr id="21" name="Shape 14"/>
-          <p:cNvSpPr/>
-          <p:nvPr/>
-        </p:nvSpPr>
-        <p:spPr>
-          <a:xfrm>
-            <a:off x="7680960" y="5212080"/>
+              <a:t>Revision Notes</a:t>
+            </a:r>
+            <a:endParaRPr lang="en-US" sz="2000" dirty="0"/>
+          </a:p>
+        </p:txBody>
+      </p:sp>
+      <p:sp>
+        <p:nvSpPr>
+          <p:cNvPr id="15" name="Shape 10"/>
+          <p:cNvSpPr/>
+          <p:nvPr/>
+        </p:nvSpPr>
+        <p:spPr>
+          <a:xfrm>
+            <a:off x="7680960" y="3639312"/>
             <a:ext cx="548640" cy="548640"/>
           </a:xfrm>
           <a:prstGeom prst="ellipse">
@@ -2391,10 +2151,17 @@
           </a:solidFill>
           <a:ln/>
         </p:spPr>
+        <p:txBody>
+          <a:bodyPr/>
+          <a:lstStyle/>
+          <a:p>
+            <a:endParaRPr lang="en-IN"/>
+          </a:p>
+        </p:txBody>
       </p:sp>
       <p:pic>
         <p:nvPicPr>
-          <p:cNvPr id="22" name="Image 5" descr="/home/claude/studygenie/icons/key_blush.png">    </p:cNvPr>
+          <p:cNvPr id="16" name="Image 3" descr="/home/claude/studygenie/icons/question_blush.png"/>
           <p:cNvPicPr>
             <a:picLocks noChangeAspect="1"/>
           </p:cNvPicPr>
@@ -2408,7 +2175,7 @@
         </p:blipFill>
         <p:spPr>
           <a:xfrm>
-            <a:off x="7799832" y="5330952"/>
+            <a:off x="7799832" y="3758184"/>
             <a:ext cx="310896" cy="310896"/>
           </a:xfrm>
           <a:prstGeom prst="rect">
@@ -2418,13 +2185,13 @@
       </p:pic>
       <p:sp>
         <p:nvSpPr>
-          <p:cNvPr id="23" name="Text 15"/>
-          <p:cNvSpPr/>
-          <p:nvPr/>
-        </p:nvSpPr>
-        <p:spPr>
-          <a:xfrm>
-            <a:off x="8366760" y="5212080"/>
+          <p:cNvPr id="17" name="Text 11"/>
+          <p:cNvSpPr/>
+          <p:nvPr/>
+        </p:nvSpPr>
+        <p:spPr>
+          <a:xfrm>
+            <a:off x="8366760" y="3639312"/>
             <a:ext cx="3063240" cy="548640"/>
           </a:xfrm>
           <a:prstGeom prst="rect">
@@ -2437,11 +2204,11 @@
           <a:bodyPr wrap="square" rtlCol="0" anchor="ctr"/>
           <a:lstStyle/>
           <a:p>
-            <a:pPr indent="0" marL="0">
+            <a:pPr marL="0" indent="0">
               <a:buNone/>
             </a:pPr>
             <a:r>
-              <a:rPr lang="en-US" sz="1300" b="1" dirty="0">
+              <a:rPr lang="en-US" b="1" dirty="0">
                 <a:solidFill>
                   <a:srgbClr val="FFFFFF"/>
                 </a:solidFill>
@@ -2449,57 +2216,42 @@
                 <a:ea typeface="Calibri" pitchFamily="34" charset="-122"/>
                 <a:cs typeface="Calibri" pitchFamily="34" charset="-120"/>
               </a:rPr>
-              <a:t>Answer Key Generator</a:t>
-            </a:r>
-            <a:endParaRPr lang="en-US" sz="1300" dirty="0"/>
-          </a:p>
-        </p:txBody>
-      </p:sp>
-      <p:sp>
-        <p:nvSpPr>
-          <p:cNvPr id="24" name="Shape 16"/>
-          <p:cNvSpPr/>
-          <p:nvPr/>
-        </p:nvSpPr>
-        <p:spPr>
-          <a:xfrm>
-            <a:off x="548640" y="4114800"/>
-            <a:ext cx="6492240" cy="1417320"/>
-          </a:xfrm>
-          <a:prstGeom prst="roundRect">
-            <a:avLst>
-              <a:gd name="adj" fmla="val 6452"/>
-            </a:avLst>
-          </a:prstGeom>
-          <a:solidFill>
-            <a:srgbClr val="F7E6E0"/>
-          </a:solidFill>
-          <a:ln/>
-        </p:spPr>
-      </p:sp>
-      <p:sp>
-        <p:nvSpPr>
-          <p:cNvPr id="25" name="Shape 17"/>
-          <p:cNvSpPr/>
-          <p:nvPr/>
-        </p:nvSpPr>
-        <p:spPr>
-          <a:xfrm>
-            <a:off x="777240" y="4315968"/>
-            <a:ext cx="1005840" cy="1005840"/>
+              <a:t>AI Doubt Solver</a:t>
+            </a:r>
+            <a:endParaRPr lang="en-US" dirty="0"/>
+          </a:p>
+        </p:txBody>
+      </p:sp>
+      <p:sp>
+        <p:nvSpPr>
+          <p:cNvPr id="18" name="Shape 12"/>
+          <p:cNvSpPr/>
+          <p:nvPr/>
+        </p:nvSpPr>
+        <p:spPr>
+          <a:xfrm>
+            <a:off x="7680960" y="4425696"/>
+            <a:ext cx="548640" cy="548640"/>
           </a:xfrm>
           <a:prstGeom prst="ellipse">
             <a:avLst/>
           </a:prstGeom>
           <a:solidFill>
-            <a:srgbClr val="FFFFFF"/>
-          </a:solidFill>
-          <a:ln/>
-        </p:spPr>
+            <a:srgbClr val="473A6E"/>
+          </a:solidFill>
+          <a:ln/>
+        </p:spPr>
+        <p:txBody>
+          <a:bodyPr/>
+          <a:lstStyle/>
+          <a:p>
+            <a:endParaRPr lang="en-IN"/>
+          </a:p>
+        </p:txBody>
       </p:sp>
       <p:pic>
         <p:nvPicPr>
-          <p:cNvPr id="26" name="Image 6" descr="/home/claude/studygenie/icons/robot_violet.png">    </p:cNvPr>
+          <p:cNvPr id="19" name="Image 4" descr="/home/claude/studygenie/icons/clipboardcheck_blush.png"/>
           <p:cNvPicPr>
             <a:picLocks noChangeAspect="1"/>
           </p:cNvPicPr>
@@ -2513,6 +2265,215 @@
         </p:blipFill>
         <p:spPr>
           <a:xfrm>
+            <a:off x="7799832" y="4544568"/>
+            <a:ext cx="310896" cy="310896"/>
+          </a:xfrm>
+          <a:prstGeom prst="rect">
+            <a:avLst/>
+          </a:prstGeom>
+        </p:spPr>
+      </p:pic>
+      <p:sp>
+        <p:nvSpPr>
+          <p:cNvPr id="20" name="Text 13"/>
+          <p:cNvSpPr/>
+          <p:nvPr/>
+        </p:nvSpPr>
+        <p:spPr>
+          <a:xfrm>
+            <a:off x="8366760" y="4425696"/>
+            <a:ext cx="3063240" cy="548640"/>
+          </a:xfrm>
+          <a:prstGeom prst="rect">
+            <a:avLst/>
+          </a:prstGeom>
+          <a:noFill/>
+          <a:ln/>
+        </p:spPr>
+        <p:txBody>
+          <a:bodyPr wrap="square" rtlCol="0" anchor="ctr"/>
+          <a:lstStyle/>
+          <a:p>
+            <a:pPr marL="0" indent="0">
+              <a:buNone/>
+            </a:pPr>
+            <a:r>
+              <a:rPr lang="en-US" b="1" dirty="0">
+                <a:solidFill>
+                  <a:srgbClr val="FFFFFF"/>
+                </a:solidFill>
+                <a:latin typeface="Calibri" pitchFamily="34" charset="0"/>
+                <a:ea typeface="Calibri" pitchFamily="34" charset="-122"/>
+                <a:cs typeface="Calibri" pitchFamily="34" charset="-120"/>
+              </a:rPr>
+              <a:t>AI Quiz Generator</a:t>
+            </a:r>
+            <a:endParaRPr lang="en-US" dirty="0"/>
+          </a:p>
+        </p:txBody>
+      </p:sp>
+      <p:sp>
+        <p:nvSpPr>
+          <p:cNvPr id="21" name="Shape 14"/>
+          <p:cNvSpPr/>
+          <p:nvPr/>
+        </p:nvSpPr>
+        <p:spPr>
+          <a:xfrm>
+            <a:off x="7680960" y="5212080"/>
+            <a:ext cx="548640" cy="548640"/>
+          </a:xfrm>
+          <a:prstGeom prst="ellipse">
+            <a:avLst/>
+          </a:prstGeom>
+          <a:solidFill>
+            <a:srgbClr val="473A6E"/>
+          </a:solidFill>
+          <a:ln/>
+        </p:spPr>
+        <p:txBody>
+          <a:bodyPr/>
+          <a:lstStyle/>
+          <a:p>
+            <a:endParaRPr lang="en-IN"/>
+          </a:p>
+        </p:txBody>
+      </p:sp>
+      <p:pic>
+        <p:nvPicPr>
+          <p:cNvPr id="22" name="Image 5" descr="/home/claude/studygenie/icons/key_blush.png"/>
+          <p:cNvPicPr>
+            <a:picLocks noChangeAspect="1"/>
+          </p:cNvPicPr>
+          <p:nvPr/>
+        </p:nvPicPr>
+        <p:blipFill>
+          <a:blip r:embed="rId8"/>
+          <a:stretch>
+            <a:fillRect/>
+          </a:stretch>
+        </p:blipFill>
+        <p:spPr>
+          <a:xfrm>
+            <a:off x="7799832" y="5330952"/>
+            <a:ext cx="310896" cy="310896"/>
+          </a:xfrm>
+          <a:prstGeom prst="rect">
+            <a:avLst/>
+          </a:prstGeom>
+        </p:spPr>
+      </p:pic>
+      <p:sp>
+        <p:nvSpPr>
+          <p:cNvPr id="23" name="Text 15"/>
+          <p:cNvSpPr/>
+          <p:nvPr/>
+        </p:nvSpPr>
+        <p:spPr>
+          <a:xfrm>
+            <a:off x="8366760" y="5212080"/>
+            <a:ext cx="3063240" cy="548640"/>
+          </a:xfrm>
+          <a:prstGeom prst="rect">
+            <a:avLst/>
+          </a:prstGeom>
+          <a:noFill/>
+          <a:ln/>
+        </p:spPr>
+        <p:txBody>
+          <a:bodyPr wrap="square" rtlCol="0" anchor="ctr"/>
+          <a:lstStyle/>
+          <a:p>
+            <a:pPr marL="0" indent="0">
+              <a:buNone/>
+            </a:pPr>
+            <a:r>
+              <a:rPr lang="en-US" b="1" dirty="0">
+                <a:solidFill>
+                  <a:srgbClr val="FFFFFF"/>
+                </a:solidFill>
+                <a:latin typeface="Calibri" pitchFamily="34" charset="0"/>
+                <a:ea typeface="Calibri" pitchFamily="34" charset="-122"/>
+                <a:cs typeface="Calibri" pitchFamily="34" charset="-120"/>
+              </a:rPr>
+              <a:t>Answer Key Generator</a:t>
+            </a:r>
+            <a:endParaRPr lang="en-US" dirty="0"/>
+          </a:p>
+        </p:txBody>
+      </p:sp>
+      <p:sp>
+        <p:nvSpPr>
+          <p:cNvPr id="24" name="Shape 16"/>
+          <p:cNvSpPr/>
+          <p:nvPr/>
+        </p:nvSpPr>
+        <p:spPr>
+          <a:xfrm>
+            <a:off x="548640" y="4114800"/>
+            <a:ext cx="6492240" cy="1417320"/>
+          </a:xfrm>
+          <a:prstGeom prst="roundRect">
+            <a:avLst>
+              <a:gd name="adj" fmla="val 6452"/>
+            </a:avLst>
+          </a:prstGeom>
+          <a:solidFill>
+            <a:srgbClr val="F7E6E0"/>
+          </a:solidFill>
+          <a:ln/>
+        </p:spPr>
+        <p:txBody>
+          <a:bodyPr/>
+          <a:lstStyle/>
+          <a:p>
+            <a:endParaRPr lang="en-IN"/>
+          </a:p>
+        </p:txBody>
+      </p:sp>
+      <p:sp>
+        <p:nvSpPr>
+          <p:cNvPr id="25" name="Shape 17"/>
+          <p:cNvSpPr/>
+          <p:nvPr/>
+        </p:nvSpPr>
+        <p:spPr>
+          <a:xfrm>
+            <a:off x="777240" y="4315968"/>
+            <a:ext cx="1005840" cy="1005840"/>
+          </a:xfrm>
+          <a:prstGeom prst="ellipse">
+            <a:avLst/>
+          </a:prstGeom>
+          <a:solidFill>
+            <a:srgbClr val="FFFFFF"/>
+          </a:solidFill>
+          <a:ln/>
+        </p:spPr>
+        <p:txBody>
+          <a:bodyPr/>
+          <a:lstStyle/>
+          <a:p>
+            <a:endParaRPr lang="en-IN"/>
+          </a:p>
+        </p:txBody>
+      </p:sp>
+      <p:pic>
+        <p:nvPicPr>
+          <p:cNvPr id="26" name="Image 6" descr="/home/claude/studygenie/icons/robot_violet.png"/>
+          <p:cNvPicPr>
+            <a:picLocks noChangeAspect="1"/>
+          </p:cNvPicPr>
+          <p:nvPr/>
+        </p:nvPicPr>
+        <p:blipFill>
+          <a:blip r:embed="rId9"/>
+          <a:stretch>
+            <a:fillRect/>
+          </a:stretch>
+        </p:blipFill>
+        <p:spPr>
+          <a:xfrm>
             <a:off x="960120" y="4498848"/>
             <a:ext cx="640080" cy="640080"/>
           </a:xfrm>
@@ -2542,14 +2503,14 @@
           <a:bodyPr wrap="square" rtlCol="0" anchor="ctr"/>
           <a:lstStyle/>
           <a:p>
-            <a:pPr indent="0" marL="0">
+            <a:pPr marL="0" indent="0">
               <a:lnSpc>
                 <a:spcPct val="115000"/>
               </a:lnSpc>
               <a:buNone/>
             </a:pPr>
             <a:r>
-              <a:rPr lang="en-US" sz="1250" i="1" dirty="0">
+              <a:rPr lang="en-US" sz="1600" i="1" dirty="0">
                 <a:solidFill>
                   <a:srgbClr val="2D2150"/>
                 </a:solidFill>
@@ -2559,7 +2520,7 @@
               </a:rPr>
               <a:t>An always-on AI study companion — plans, explains, quizzes, and answers doubts, all in one place.</a:t>
             </a:r>
-            <a:endParaRPr lang="en-US" sz="1250" dirty="0"/>
+            <a:endParaRPr lang="en-US" sz="1600" dirty="0"/>
           </a:p>
         </p:txBody>
       </p:sp>
@@ -2568,6 +2529,18 @@
   <p:clrMapOvr>
     <a:masterClrMapping/>
   </p:clrMapOvr>
+  <mc:AlternateContent xmlns:mc="http://schemas.openxmlformats.org/markup-compatibility/2006" xmlns:p159="http://schemas.microsoft.com/office/powerpoint/2015/09/main">
+    <mc:Choice Requires="p159">
+      <p:transition xmlns:p14="http://schemas.microsoft.com/office/powerpoint/2010/main" spd="slow" p14:dur="2000">
+        <p159:morph option="byObject"/>
+      </p:transition>
+    </mc:Choice>
+    <mc:Fallback xmlns="">
+      <p:transition spd="slow">
+        <p:fade/>
+      </p:transition>
+    </mc:Fallback>
+  </mc:AlternateContent>
 </p:sld>
 </file>
 
@@ -2579,6 +2552,7 @@
         <a:solidFill>
           <a:srgbClr val="FAF8FC"/>
         </a:solidFill>
+        <a:effectLst/>
       </p:bgPr>
     </p:bg>
     <p:spTree>
@@ -2616,7 +2590,7 @@
           <a:bodyPr wrap="square" rtlCol="0" anchor="ctr"/>
           <a:lstStyle/>
           <a:p>
-            <a:pPr indent="0" marL="0">
+            <a:pPr marL="0" indent="0">
               <a:buNone/>
             </a:pPr>
             <a:r>
@@ -2655,6 +2629,13 @@
           </a:solidFill>
           <a:ln/>
         </p:spPr>
+        <p:txBody>
+          <a:bodyPr/>
+          <a:lstStyle/>
+          <a:p>
+            <a:endParaRPr lang="en-IN"/>
+          </a:p>
+        </p:txBody>
       </p:sp>
       <p:sp>
         <p:nvSpPr>
@@ -2675,274 +2656,17 @@
           </a:solidFill>
           <a:ln/>
         </p:spPr>
+        <p:txBody>
+          <a:bodyPr/>
+          <a:lstStyle/>
+          <a:p>
+            <a:endParaRPr lang="en-IN"/>
+          </a:p>
+        </p:txBody>
       </p:sp>
       <p:pic>
         <p:nvPicPr>
-          <p:cNvPr id="5" name="Image 0" descr="/home/claude/studygenie/icons/puzzle_peach.png">    </p:cNvPr>
-          <p:cNvPicPr>
-            <a:picLocks noChangeAspect="1"/>
-          </p:cNvPicPr>
-          <p:nvPr/>
-        </p:nvPicPr>
-        <p:blipFill>
-          <a:blip r:embed="rId1"/>
-          <a:stretch>
-            <a:fillRect/>
-          </a:stretch>
-        </p:blipFill>
-        <p:spPr>
-          <a:xfrm>
-            <a:off x="9738360" y="1280160"/>
-            <a:ext cx="822960" cy="822960"/>
-          </a:xfrm>
-          <a:prstGeom prst="rect">
-            <a:avLst/>
-          </a:prstGeom>
-        </p:spPr>
-      </p:pic>
-      <p:sp>
-        <p:nvSpPr>
-          <p:cNvPr id="6" name="Text 3"/>
-          <p:cNvSpPr/>
-          <p:nvPr/>
-        </p:nvSpPr>
-        <p:spPr>
-          <a:xfrm>
-            <a:off x="8869680" y="2606040"/>
-            <a:ext cx="2560320" cy="731520"/>
-          </a:xfrm>
-          <a:prstGeom prst="rect">
-            <a:avLst/>
-          </a:prstGeom>
-          <a:noFill/>
-          <a:ln/>
-        </p:spPr>
-        <p:txBody>
-          <a:bodyPr wrap="square" rtlCol="0" anchor="ctr"/>
-          <a:lstStyle/>
-          <a:p>
-            <a:pPr algn="ctr" indent="0" marL="0">
-              <a:buNone/>
-            </a:pPr>
-            <a:r>
-              <a:rPr lang="en-US" sz="1600" b="1" dirty="0">
-                <a:solidFill>
-                  <a:srgbClr val="FFFFFF"/>
-                </a:solidFill>
-                <a:latin typeface="Cambria" pitchFamily="34" charset="0"/>
-                <a:ea typeface="Cambria" pitchFamily="34" charset="-122"/>
-                <a:cs typeface="Cambria" pitchFamily="34" charset="-120"/>
-              </a:rPr>
-              <a:t>One App.</a:t>
-            </a:r>
-            <a:endParaRPr lang="en-US" sz="1600" dirty="0"/>
-          </a:p>
-          <a:p>
-            <a:pPr algn="ctr" indent="0" marL="0">
-              <a:buNone/>
-            </a:pPr>
-            <a:r>
-              <a:rPr lang="en-US" sz="1600" b="1" dirty="0">
-                <a:solidFill>
-                  <a:srgbClr val="FFFFFF"/>
-                </a:solidFill>
-                <a:latin typeface="Cambria" pitchFamily="34" charset="0"/>
-                <a:ea typeface="Cambria" pitchFamily="34" charset="-122"/>
-                <a:cs typeface="Cambria" pitchFamily="34" charset="-120"/>
-              </a:rPr>
-              <a:t>Every Gap.</a:t>
-            </a:r>
-            <a:endParaRPr lang="en-US" sz="1600" dirty="0"/>
-          </a:p>
-        </p:txBody>
-      </p:sp>
-      <p:sp>
-        <p:nvSpPr>
-          <p:cNvPr id="7" name="Text 4"/>
-          <p:cNvSpPr/>
-          <p:nvPr/>
-        </p:nvSpPr>
-        <p:spPr>
-          <a:xfrm>
-            <a:off x="9006840" y="3383280"/>
-            <a:ext cx="2331720" cy="1463040"/>
-          </a:xfrm>
-          <a:prstGeom prst="rect">
-            <a:avLst/>
-          </a:prstGeom>
-          <a:noFill/>
-          <a:ln/>
-        </p:spPr>
-        <p:txBody>
-          <a:bodyPr wrap="square" rtlCol="0" anchor="ctr"/>
-          <a:lstStyle/>
-          <a:p>
-            <a:pPr algn="ctr" indent="0" marL="0">
-              <a:buNone/>
-            </a:pPr>
-            <a:r>
-              <a:rPr lang="en-US" sz="1150" dirty="0">
-                <a:solidFill>
-                  <a:srgbClr val="D9CFF0"/>
-                </a:solidFill>
-                <a:latin typeface="Calibri" pitchFamily="34" charset="0"/>
-                <a:ea typeface="Calibri" pitchFamily="34" charset="-122"/>
-                <a:cs typeface="Calibri" pitchFamily="34" charset="-120"/>
-              </a:rPr>
-              <a:t>A single AI-powered solution can simplify the entire exam preparation process.</a:t>
-            </a:r>
-            <a:endParaRPr lang="en-US" sz="1150" dirty="0"/>
-          </a:p>
-        </p:txBody>
-      </p:sp>
-      <p:sp>
-        <p:nvSpPr>
-          <p:cNvPr id="8" name="Shape 5"/>
-          <p:cNvSpPr/>
-          <p:nvPr/>
-        </p:nvSpPr>
-        <p:spPr>
-          <a:xfrm>
-            <a:off x="594360" y="1280160"/>
-            <a:ext cx="566928" cy="566928"/>
-          </a:xfrm>
-          <a:prstGeom prst="ellipse">
-            <a:avLst/>
-          </a:prstGeom>
-          <a:solidFill>
-            <a:srgbClr val="F7E6E0"/>
-          </a:solidFill>
-          <a:ln/>
-        </p:spPr>
-      </p:sp>
-      <p:pic>
-        <p:nvPicPr>
-          <p:cNvPr id="9" name="Image 1" descr="/home/claude/studygenie/icons/calendar_blush.png">    </p:cNvPr>
-          <p:cNvPicPr>
-            <a:picLocks noChangeAspect="1"/>
-          </p:cNvPicPr>
-          <p:nvPr/>
-        </p:nvPicPr>
-        <p:blipFill>
-          <a:blip r:embed="rId2"/>
-          <a:stretch>
-            <a:fillRect/>
-          </a:stretch>
-        </p:blipFill>
-        <p:spPr>
-          <a:xfrm>
-            <a:off x="713232" y="1399032"/>
-            <a:ext cx="329184" cy="329184"/>
-          </a:xfrm>
-          <a:prstGeom prst="rect">
-            <a:avLst/>
-          </a:prstGeom>
-        </p:spPr>
-      </p:pic>
-      <p:sp>
-        <p:nvSpPr>
-          <p:cNvPr id="10" name="Text 6"/>
-          <p:cNvSpPr/>
-          <p:nvPr/>
-        </p:nvSpPr>
-        <p:spPr>
-          <a:xfrm>
-            <a:off x="1325880" y="1252728"/>
-            <a:ext cx="7040880" cy="320040"/>
-          </a:xfrm>
-          <a:prstGeom prst="rect">
-            <a:avLst/>
-          </a:prstGeom>
-          <a:noFill/>
-          <a:ln/>
-        </p:spPr>
-        <p:txBody>
-          <a:bodyPr wrap="square" rtlCol="0" anchor="ctr"/>
-          <a:lstStyle/>
-          <a:p>
-            <a:pPr indent="0" marL="0">
-              <a:buNone/>
-            </a:pPr>
-            <a:r>
-              <a:rPr lang="en-US" sz="1450" b="1" dirty="0">
-                <a:solidFill>
-                  <a:srgbClr val="2B2340"/>
-                </a:solidFill>
-                <a:latin typeface="Calibri" pitchFamily="34" charset="0"/>
-                <a:ea typeface="Calibri" pitchFamily="34" charset="-122"/>
-                <a:cs typeface="Calibri" pitchFamily="34" charset="-120"/>
-              </a:rPr>
-              <a:t>Study scheduling</a:t>
-            </a:r>
-            <a:endParaRPr lang="en-US" sz="1450" dirty="0"/>
-          </a:p>
-        </p:txBody>
-      </p:sp>
-      <p:sp>
-        <p:nvSpPr>
-          <p:cNvPr id="11" name="Text 7"/>
-          <p:cNvSpPr/>
-          <p:nvPr/>
-        </p:nvSpPr>
-        <p:spPr>
-          <a:xfrm>
-            <a:off x="1325880" y="1554480"/>
-            <a:ext cx="7040880" cy="457200"/>
-          </a:xfrm>
-          <a:prstGeom prst="rect">
-            <a:avLst/>
-          </a:prstGeom>
-          <a:noFill/>
-          <a:ln/>
-        </p:spPr>
-        <p:txBody>
-          <a:bodyPr wrap="square" rtlCol="0" anchor="ctr"/>
-          <a:lstStyle/>
-          <a:p>
-            <a:pPr indent="0" marL="0">
-              <a:lnSpc>
-                <a:spcPct val="110000"/>
-              </a:lnSpc>
-              <a:buNone/>
-            </a:pPr>
-            <a:r>
-              <a:rPr lang="en-US" sz="1150" dirty="0">
-                <a:solidFill>
-                  <a:srgbClr val="746E8C"/>
-                </a:solidFill>
-                <a:latin typeface="Calibri" pitchFamily="34" charset="0"/>
-                <a:ea typeface="Calibri" pitchFamily="34" charset="-122"/>
-                <a:cs typeface="Calibri" pitchFamily="34" charset="-120"/>
-              </a:rPr>
-              <a:t>Difficulty planning an effective study schedule.</a:t>
-            </a:r>
-            <a:endParaRPr lang="en-US" sz="1150" dirty="0"/>
-          </a:p>
-        </p:txBody>
-      </p:sp>
-      <p:sp>
-        <p:nvSpPr>
-          <p:cNvPr id="12" name="Shape 8"/>
-          <p:cNvSpPr/>
-          <p:nvPr/>
-        </p:nvSpPr>
-        <p:spPr>
-          <a:xfrm>
-            <a:off x="594360" y="2267712"/>
-            <a:ext cx="566928" cy="566928"/>
-          </a:xfrm>
-          <a:prstGeom prst="ellipse">
-            <a:avLst/>
-          </a:prstGeom>
-          <a:solidFill>
-            <a:srgbClr val="F7E6E0"/>
-          </a:solidFill>
-          <a:ln/>
-        </p:spPr>
-      </p:sp>
-      <p:pic>
-        <p:nvPicPr>
-          <p:cNvPr id="13" name="Image 2" descr="/home/claude/studygenie/icons/lightbulb_blush.png">    </p:cNvPr>
+          <p:cNvPr id="5" name="Image 0" descr="/home/claude/studygenie/icons/puzzle_peach.png"/>
           <p:cNvPicPr>
             <a:picLocks noChangeAspect="1"/>
           </p:cNvPicPr>
@@ -2956,8 +2680,8 @@
         </p:blipFill>
         <p:spPr>
           <a:xfrm>
-            <a:off x="713232" y="2386584"/>
-            <a:ext cx="329184" cy="329184"/>
+            <a:off x="9738360" y="1280160"/>
+            <a:ext cx="822960" cy="822960"/>
           </a:xfrm>
           <a:prstGeom prst="rect">
             <a:avLst/>
@@ -2966,14 +2690,14 @@
       </p:pic>
       <p:sp>
         <p:nvSpPr>
-          <p:cNvPr id="14" name="Text 9"/>
-          <p:cNvSpPr/>
-          <p:nvPr/>
-        </p:nvSpPr>
-        <p:spPr>
-          <a:xfrm>
-            <a:off x="1325880" y="2240280"/>
-            <a:ext cx="7040880" cy="320040"/>
+          <p:cNvPr id="6" name="Text 3"/>
+          <p:cNvSpPr/>
+          <p:nvPr/>
+        </p:nvSpPr>
+        <p:spPr>
+          <a:xfrm>
+            <a:off x="8869680" y="2606040"/>
+            <a:ext cx="2560320" cy="731520"/>
           </a:xfrm>
           <a:prstGeom prst="rect">
             <a:avLst/>
@@ -2985,75 +2709,89 @@
           <a:bodyPr wrap="square" rtlCol="0" anchor="ctr"/>
           <a:lstStyle/>
           <a:p>
-            <a:pPr indent="0" marL="0">
+            <a:pPr marL="0" indent="0" algn="ctr">
               <a:buNone/>
             </a:pPr>
             <a:r>
-              <a:rPr lang="en-US" sz="1450" b="1" dirty="0">
-                <a:solidFill>
-                  <a:srgbClr val="2B2340"/>
+              <a:rPr lang="en-US" sz="2400" b="1" dirty="0">
+                <a:solidFill>
+                  <a:srgbClr val="FFFFFF"/>
+                </a:solidFill>
+                <a:latin typeface="Cambria" pitchFamily="34" charset="0"/>
+                <a:ea typeface="Cambria" pitchFamily="34" charset="-122"/>
+                <a:cs typeface="Cambria" pitchFamily="34" charset="-120"/>
+              </a:rPr>
+              <a:t>One App.</a:t>
+            </a:r>
+            <a:endParaRPr lang="en-US" sz="2400" dirty="0"/>
+          </a:p>
+          <a:p>
+            <a:pPr marL="0" indent="0" algn="ctr">
+              <a:buNone/>
+            </a:pPr>
+            <a:r>
+              <a:rPr lang="en-US" sz="2400" b="1" dirty="0">
+                <a:solidFill>
+                  <a:srgbClr val="FFFFFF"/>
+                </a:solidFill>
+                <a:latin typeface="Cambria" pitchFamily="34" charset="0"/>
+                <a:ea typeface="Cambria" pitchFamily="34" charset="-122"/>
+                <a:cs typeface="Cambria" pitchFamily="34" charset="-120"/>
+              </a:rPr>
+              <a:t>Every Gap.</a:t>
+            </a:r>
+            <a:endParaRPr lang="en-US" sz="2400" dirty="0"/>
+          </a:p>
+        </p:txBody>
+      </p:sp>
+      <p:sp>
+        <p:nvSpPr>
+          <p:cNvPr id="7" name="Text 4"/>
+          <p:cNvSpPr/>
+          <p:nvPr/>
+        </p:nvSpPr>
+        <p:spPr>
+          <a:xfrm>
+            <a:off x="9006840" y="3672529"/>
+            <a:ext cx="2331720" cy="1463040"/>
+          </a:xfrm>
+          <a:prstGeom prst="rect">
+            <a:avLst/>
+          </a:prstGeom>
+          <a:noFill/>
+          <a:ln/>
+        </p:spPr>
+        <p:txBody>
+          <a:bodyPr wrap="square" rtlCol="0" anchor="ctr"/>
+          <a:lstStyle/>
+          <a:p>
+            <a:pPr marL="0" indent="0" algn="ctr">
+              <a:buNone/>
+            </a:pPr>
+            <a:r>
+              <a:rPr lang="en-US" sz="2000" dirty="0">
+                <a:solidFill>
+                  <a:srgbClr val="D9CFF0"/>
                 </a:solidFill>
                 <a:latin typeface="Calibri" pitchFamily="34" charset="0"/>
                 <a:ea typeface="Calibri" pitchFamily="34" charset="-122"/>
                 <a:cs typeface="Calibri" pitchFamily="34" charset="-120"/>
               </a:rPr>
-              <a:t>Personalized guidance</a:t>
-            </a:r>
-            <a:endParaRPr lang="en-US" sz="1450" dirty="0"/>
-          </a:p>
-        </p:txBody>
-      </p:sp>
-      <p:sp>
-        <p:nvSpPr>
-          <p:cNvPr id="15" name="Text 10"/>
-          <p:cNvSpPr/>
-          <p:nvPr/>
-        </p:nvSpPr>
-        <p:spPr>
-          <a:xfrm>
-            <a:off x="1325880" y="2542032"/>
-            <a:ext cx="7040880" cy="457200"/>
-          </a:xfrm>
-          <a:prstGeom prst="rect">
-            <a:avLst/>
-          </a:prstGeom>
-          <a:noFill/>
-          <a:ln/>
-        </p:spPr>
-        <p:txBody>
-          <a:bodyPr wrap="square" rtlCol="0" anchor="ctr"/>
-          <a:lstStyle/>
-          <a:p>
-            <a:pPr indent="0" marL="0">
-              <a:lnSpc>
-                <a:spcPct val="110000"/>
-              </a:lnSpc>
-              <a:buNone/>
-            </a:pPr>
-            <a:r>
-              <a:rPr lang="en-US" sz="1150" dirty="0">
-                <a:solidFill>
-                  <a:srgbClr val="746E8C"/>
-                </a:solidFill>
-                <a:latin typeface="Calibri" pitchFamily="34" charset="0"/>
-                <a:ea typeface="Calibri" pitchFamily="34" charset="-122"/>
-                <a:cs typeface="Calibri" pitchFamily="34" charset="-120"/>
-              </a:rPr>
-              <a:t>Lack of personalized learning guidance for each student.</a:t>
-            </a:r>
-            <a:endParaRPr lang="en-US" sz="1150" dirty="0"/>
-          </a:p>
-        </p:txBody>
-      </p:sp>
-      <p:sp>
-        <p:nvSpPr>
-          <p:cNvPr id="16" name="Shape 11"/>
-          <p:cNvSpPr/>
-          <p:nvPr/>
-        </p:nvSpPr>
-        <p:spPr>
-          <a:xfrm>
-            <a:off x="594360" y="3255264"/>
+              <a:t>A single AI-powered solution can simplify the entire exam preparation process.</a:t>
+            </a:r>
+            <a:endParaRPr lang="en-US" sz="2000" dirty="0"/>
+          </a:p>
+        </p:txBody>
+      </p:sp>
+      <p:sp>
+        <p:nvSpPr>
+          <p:cNvPr id="8" name="Shape 5"/>
+          <p:cNvSpPr/>
+          <p:nvPr/>
+        </p:nvSpPr>
+        <p:spPr>
+          <a:xfrm>
+            <a:off x="594360" y="1280160"/>
             <a:ext cx="566928" cy="566928"/>
           </a:xfrm>
           <a:prstGeom prst="ellipse">
@@ -3064,10 +2802,17 @@
           </a:solidFill>
           <a:ln/>
         </p:spPr>
+        <p:txBody>
+          <a:bodyPr/>
+          <a:lstStyle/>
+          <a:p>
+            <a:endParaRPr lang="en-IN"/>
+          </a:p>
+        </p:txBody>
       </p:sp>
       <p:pic>
         <p:nvPicPr>
-          <p:cNvPr id="17" name="Image 3" descr="/home/claude/studygenie/icons/clock_blush.png">    </p:cNvPr>
+          <p:cNvPr id="9" name="Image 1" descr="/home/claude/studygenie/icons/calendar_blush.png"/>
           <p:cNvPicPr>
             <a:picLocks noChangeAspect="1"/>
           </p:cNvPicPr>
@@ -3081,7 +2826,7 @@
         </p:blipFill>
         <p:spPr>
           <a:xfrm>
-            <a:off x="713232" y="3374136"/>
+            <a:off x="713232" y="1399032"/>
             <a:ext cx="329184" cy="329184"/>
           </a:xfrm>
           <a:prstGeom prst="rect">
@@ -3091,13 +2836,13 @@
       </p:pic>
       <p:sp>
         <p:nvSpPr>
-          <p:cNvPr id="18" name="Text 12"/>
-          <p:cNvSpPr/>
-          <p:nvPr/>
-        </p:nvSpPr>
-        <p:spPr>
-          <a:xfrm>
-            <a:off x="1325880" y="3227832"/>
+          <p:cNvPr id="10" name="Text 6"/>
+          <p:cNvSpPr/>
+          <p:nvPr/>
+        </p:nvSpPr>
+        <p:spPr>
+          <a:xfrm>
+            <a:off x="1325880" y="1252728"/>
             <a:ext cx="7040880" cy="320040"/>
           </a:xfrm>
           <a:prstGeom prst="rect">
@@ -3110,11 +2855,11 @@
           <a:bodyPr wrap="square" rtlCol="0" anchor="ctr"/>
           <a:lstStyle/>
           <a:p>
-            <a:pPr indent="0" marL="0">
+            <a:pPr marL="0" indent="0">
               <a:buNone/>
             </a:pPr>
             <a:r>
-              <a:rPr lang="en-US" sz="1450" b="1" dirty="0">
+              <a:rPr lang="en-US" b="1" dirty="0">
                 <a:solidFill>
                   <a:srgbClr val="2B2340"/>
                 </a:solidFill>
@@ -3122,21 +2867,21 @@
                 <a:ea typeface="Calibri" pitchFamily="34" charset="-122"/>
                 <a:cs typeface="Calibri" pitchFamily="34" charset="-120"/>
               </a:rPr>
-              <a:t>Time-consuming prep</a:t>
-            </a:r>
-            <a:endParaRPr lang="en-US" sz="1450" dirty="0"/>
-          </a:p>
-        </p:txBody>
-      </p:sp>
-      <p:sp>
-        <p:nvSpPr>
-          <p:cNvPr id="19" name="Text 13"/>
-          <p:cNvSpPr/>
-          <p:nvPr/>
-        </p:nvSpPr>
-        <p:spPr>
-          <a:xfrm>
-            <a:off x="1325880" y="3529584"/>
+              <a:t>Study scheduling</a:t>
+            </a:r>
+            <a:endParaRPr lang="en-US" dirty="0"/>
+          </a:p>
+        </p:txBody>
+      </p:sp>
+      <p:sp>
+        <p:nvSpPr>
+          <p:cNvPr id="11" name="Text 7"/>
+          <p:cNvSpPr/>
+          <p:nvPr/>
+        </p:nvSpPr>
+        <p:spPr>
+          <a:xfrm>
+            <a:off x="1325880" y="1554480"/>
             <a:ext cx="7040880" cy="457200"/>
           </a:xfrm>
           <a:prstGeom prst="rect">
@@ -3149,14 +2894,14 @@
           <a:bodyPr wrap="square" rtlCol="0" anchor="ctr"/>
           <a:lstStyle/>
           <a:p>
-            <a:pPr indent="0" marL="0">
+            <a:pPr marL="0" indent="0">
               <a:lnSpc>
                 <a:spcPct val="110000"/>
               </a:lnSpc>
               <a:buNone/>
             </a:pPr>
             <a:r>
-              <a:rPr lang="en-US" sz="1150" dirty="0">
+              <a:rPr lang="en-US" sz="2000" dirty="0">
                 <a:solidFill>
                   <a:srgbClr val="746E8C"/>
                 </a:solidFill>
@@ -3164,21 +2909,21 @@
                 <a:ea typeface="Calibri" pitchFamily="34" charset="-122"/>
                 <a:cs typeface="Calibri" pitchFamily="34" charset="-120"/>
               </a:rPr>
-              <a:t>Exam preparation takes significant time and effort.</a:t>
-            </a:r>
-            <a:endParaRPr lang="en-US" sz="1150" dirty="0"/>
-          </a:p>
-        </p:txBody>
-      </p:sp>
-      <p:sp>
-        <p:nvSpPr>
-          <p:cNvPr id="20" name="Shape 14"/>
-          <p:cNvSpPr/>
-          <p:nvPr/>
-        </p:nvSpPr>
-        <p:spPr>
-          <a:xfrm>
-            <a:off x="594360" y="4242816"/>
+              <a:t>Difficulty planning an effective study schedule.</a:t>
+            </a:r>
+            <a:endParaRPr lang="en-US" sz="2000" dirty="0"/>
+          </a:p>
+        </p:txBody>
+      </p:sp>
+      <p:sp>
+        <p:nvSpPr>
+          <p:cNvPr id="12" name="Shape 8"/>
+          <p:cNvSpPr/>
+          <p:nvPr/>
+        </p:nvSpPr>
+        <p:spPr>
+          <a:xfrm>
+            <a:off x="594360" y="2267712"/>
             <a:ext cx="566928" cy="566928"/>
           </a:xfrm>
           <a:prstGeom prst="ellipse">
@@ -3189,10 +2934,17 @@
           </a:solidFill>
           <a:ln/>
         </p:spPr>
+        <p:txBody>
+          <a:bodyPr/>
+          <a:lstStyle/>
+          <a:p>
+            <a:endParaRPr lang="en-IN"/>
+          </a:p>
+        </p:txBody>
       </p:sp>
       <p:pic>
         <p:nvPicPr>
-          <p:cNvPr id="21" name="Image 4" descr="/home/claude/studygenie/icons/question_blush.png">    </p:cNvPr>
+          <p:cNvPr id="13" name="Image 2" descr="/home/claude/studygenie/icons/lightbulb_blush.png"/>
           <p:cNvPicPr>
             <a:picLocks noChangeAspect="1"/>
           </p:cNvPicPr>
@@ -3206,7 +2958,7 @@
         </p:blipFill>
         <p:spPr>
           <a:xfrm>
-            <a:off x="713232" y="4361688"/>
+            <a:off x="713232" y="2386584"/>
             <a:ext cx="329184" cy="329184"/>
           </a:xfrm>
           <a:prstGeom prst="rect">
@@ -3216,13 +2968,13 @@
       </p:pic>
       <p:sp>
         <p:nvSpPr>
-          <p:cNvPr id="22" name="Text 15"/>
-          <p:cNvSpPr/>
-          <p:nvPr/>
-        </p:nvSpPr>
-        <p:spPr>
-          <a:xfrm>
-            <a:off x="1325880" y="4215384"/>
+          <p:cNvPr id="14" name="Text 9"/>
+          <p:cNvSpPr/>
+          <p:nvPr/>
+        </p:nvSpPr>
+        <p:spPr>
+          <a:xfrm>
+            <a:off x="1325880" y="2240280"/>
             <a:ext cx="7040880" cy="320040"/>
           </a:xfrm>
           <a:prstGeom prst="rect">
@@ -3235,11 +2987,11 @@
           <a:bodyPr wrap="square" rtlCol="0" anchor="ctr"/>
           <a:lstStyle/>
           <a:p>
-            <a:pPr indent="0" marL="0">
+            <a:pPr marL="0" indent="0">
               <a:buNone/>
             </a:pPr>
             <a:r>
-              <a:rPr lang="en-US" sz="1450" b="1" dirty="0">
+              <a:rPr lang="en-US" b="1" dirty="0">
                 <a:solidFill>
                   <a:srgbClr val="2B2340"/>
                 </a:solidFill>
@@ -3247,21 +2999,21 @@
                 <a:ea typeface="Calibri" pitchFamily="34" charset="-122"/>
                 <a:cs typeface="Calibri" pitchFamily="34" charset="-120"/>
               </a:rPr>
-              <a:t>Doubt clarification</a:t>
-            </a:r>
-            <a:endParaRPr lang="en-US" sz="1450" dirty="0"/>
-          </a:p>
-        </p:txBody>
-      </p:sp>
-      <p:sp>
-        <p:nvSpPr>
-          <p:cNvPr id="23" name="Text 16"/>
-          <p:cNvSpPr/>
-          <p:nvPr/>
-        </p:nvSpPr>
-        <p:spPr>
-          <a:xfrm>
-            <a:off x="1325880" y="4517136"/>
+              <a:t>Personalized guidance</a:t>
+            </a:r>
+            <a:endParaRPr lang="en-US" dirty="0"/>
+          </a:p>
+        </p:txBody>
+      </p:sp>
+      <p:sp>
+        <p:nvSpPr>
+          <p:cNvPr id="15" name="Text 10"/>
+          <p:cNvSpPr/>
+          <p:nvPr/>
+        </p:nvSpPr>
+        <p:spPr>
+          <a:xfrm>
+            <a:off x="1325880" y="2542032"/>
             <a:ext cx="7040880" cy="457200"/>
           </a:xfrm>
           <a:prstGeom prst="rect">
@@ -3274,14 +3026,14 @@
           <a:bodyPr wrap="square" rtlCol="0" anchor="ctr"/>
           <a:lstStyle/>
           <a:p>
-            <a:pPr indent="0" marL="0">
+            <a:pPr marL="0" indent="0">
               <a:lnSpc>
                 <a:spcPct val="110000"/>
               </a:lnSpc>
               <a:buNone/>
             </a:pPr>
             <a:r>
-              <a:rPr lang="en-US" sz="1150" dirty="0">
+              <a:rPr lang="en-US" sz="2000" dirty="0">
                 <a:solidFill>
                   <a:srgbClr val="746E8C"/>
                 </a:solidFill>
@@ -3289,7 +3041,18 @@
                 <a:ea typeface="Calibri" pitchFamily="34" charset="-122"/>
                 <a:cs typeface="Calibri" pitchFamily="34" charset="-120"/>
               </a:rPr>
-              <a:t>Limited access to instant doubt clarification.</a:t>
+              <a:t>Lack of personalized learning guidance for each student</a:t>
+            </a:r>
+            <a:r>
+              <a:rPr lang="en-US" sz="1150" dirty="0">
+                <a:solidFill>
+                  <a:srgbClr val="746E8C"/>
+                </a:solidFill>
+                <a:latin typeface="Calibri" pitchFamily="34" charset="0"/>
+                <a:ea typeface="Calibri" pitchFamily="34" charset="-122"/>
+                <a:cs typeface="Calibri" pitchFamily="34" charset="-120"/>
+              </a:rPr>
+              <a:t>.</a:t>
             </a:r>
             <a:endParaRPr lang="en-US" sz="1150" dirty="0"/>
           </a:p>
@@ -3297,13 +3060,13 @@
       </p:sp>
       <p:sp>
         <p:nvSpPr>
-          <p:cNvPr id="24" name="Shape 17"/>
-          <p:cNvSpPr/>
-          <p:nvPr/>
-        </p:nvSpPr>
-        <p:spPr>
-          <a:xfrm>
-            <a:off x="594360" y="5230368"/>
+          <p:cNvPr id="16" name="Shape 11"/>
+          <p:cNvSpPr/>
+          <p:nvPr/>
+        </p:nvSpPr>
+        <p:spPr>
+          <a:xfrm>
+            <a:off x="594360" y="3255264"/>
             <a:ext cx="566928" cy="566928"/>
           </a:xfrm>
           <a:prstGeom prst="ellipse">
@@ -3314,10 +3077,17 @@
           </a:solidFill>
           <a:ln/>
         </p:spPr>
+        <p:txBody>
+          <a:bodyPr/>
+          <a:lstStyle/>
+          <a:p>
+            <a:endParaRPr lang="en-IN"/>
+          </a:p>
+        </p:txBody>
       </p:sp>
       <p:pic>
         <p:nvPicPr>
-          <p:cNvPr id="25" name="Image 5" descr="/home/claude/studygenie/icons/clipboardcheck_blush.png">    </p:cNvPr>
+          <p:cNvPr id="17" name="Image 3" descr="/home/claude/studygenie/icons/clock_blush.png"/>
           <p:cNvPicPr>
             <a:picLocks noChangeAspect="1"/>
           </p:cNvPicPr>
@@ -3331,7 +3101,7 @@
         </p:blipFill>
         <p:spPr>
           <a:xfrm>
-            <a:off x="713232" y="5349240"/>
+            <a:off x="713232" y="3374136"/>
             <a:ext cx="329184" cy="329184"/>
           </a:xfrm>
           <a:prstGeom prst="rect">
@@ -3341,13 +3111,13 @@
       </p:pic>
       <p:sp>
         <p:nvSpPr>
-          <p:cNvPr id="26" name="Text 18"/>
-          <p:cNvSpPr/>
-          <p:nvPr/>
-        </p:nvSpPr>
-        <p:spPr>
-          <a:xfrm>
-            <a:off x="1325880" y="5202936"/>
+          <p:cNvPr id="18" name="Text 12"/>
+          <p:cNvSpPr/>
+          <p:nvPr/>
+        </p:nvSpPr>
+        <p:spPr>
+          <a:xfrm>
+            <a:off x="1325880" y="3227832"/>
             <a:ext cx="7040880" cy="320040"/>
           </a:xfrm>
           <a:prstGeom prst="rect">
@@ -3360,11 +3130,11 @@
           <a:bodyPr wrap="square" rtlCol="0" anchor="ctr"/>
           <a:lstStyle/>
           <a:p>
-            <a:pPr indent="0" marL="0">
+            <a:pPr marL="0" indent="0">
               <a:buNone/>
             </a:pPr>
             <a:r>
-              <a:rPr lang="en-US" sz="1450" b="1" dirty="0">
+              <a:rPr lang="en-US" b="1" dirty="0">
                 <a:solidFill>
                   <a:srgbClr val="2B2340"/>
                 </a:solidFill>
@@ -3372,21 +3142,21 @@
                 <a:ea typeface="Calibri" pitchFamily="34" charset="-122"/>
                 <a:cs typeface="Calibri" pitchFamily="34" charset="-120"/>
               </a:rPr>
-              <a:t>Practice &amp; revision</a:t>
-            </a:r>
-            <a:endParaRPr lang="en-US" sz="1450" dirty="0"/>
-          </a:p>
-        </p:txBody>
-      </p:sp>
-      <p:sp>
-        <p:nvSpPr>
-          <p:cNvPr id="27" name="Text 19"/>
-          <p:cNvSpPr/>
-          <p:nvPr/>
-        </p:nvSpPr>
-        <p:spPr>
-          <a:xfrm>
-            <a:off x="1325880" y="5504688"/>
+              <a:t>Time-consuming prep</a:t>
+            </a:r>
+            <a:endParaRPr lang="en-US" dirty="0"/>
+          </a:p>
+        </p:txBody>
+      </p:sp>
+      <p:sp>
+        <p:nvSpPr>
+          <p:cNvPr id="19" name="Text 13"/>
+          <p:cNvSpPr/>
+          <p:nvPr/>
+        </p:nvSpPr>
+        <p:spPr>
+          <a:xfrm>
+            <a:off x="1325880" y="3529584"/>
             <a:ext cx="7040880" cy="457200"/>
           </a:xfrm>
           <a:prstGeom prst="rect">
@@ -3399,14 +3169,14 @@
           <a:bodyPr wrap="square" rtlCol="0" anchor="ctr"/>
           <a:lstStyle/>
           <a:p>
-            <a:pPr indent="0" marL="0">
+            <a:pPr marL="0" indent="0">
               <a:lnSpc>
                 <a:spcPct val="110000"/>
               </a:lnSpc>
               <a:buNone/>
             </a:pPr>
             <a:r>
-              <a:rPr lang="en-US" sz="1150" dirty="0">
+              <a:rPr lang="en-US" sz="2000" dirty="0">
                 <a:solidFill>
                   <a:srgbClr val="746E8C"/>
                 </a:solidFill>
@@ -3414,7 +3184,293 @@
                 <a:ea typeface="Calibri" pitchFamily="34" charset="-122"/>
                 <a:cs typeface="Calibri" pitchFamily="34" charset="-120"/>
               </a:rPr>
-              <a:t>Need for practice quizzes and concise revision materials.</a:t>
+              <a:t>Exam preparation takes significant time and effort</a:t>
+            </a:r>
+            <a:r>
+              <a:rPr lang="en-US" sz="1150" dirty="0">
+                <a:solidFill>
+                  <a:srgbClr val="746E8C"/>
+                </a:solidFill>
+                <a:latin typeface="Calibri" pitchFamily="34" charset="0"/>
+                <a:ea typeface="Calibri" pitchFamily="34" charset="-122"/>
+                <a:cs typeface="Calibri" pitchFamily="34" charset="-120"/>
+              </a:rPr>
+              <a:t>.</a:t>
+            </a:r>
+            <a:endParaRPr lang="en-US" sz="1150" dirty="0"/>
+          </a:p>
+        </p:txBody>
+      </p:sp>
+      <p:sp>
+        <p:nvSpPr>
+          <p:cNvPr id="20" name="Shape 14"/>
+          <p:cNvSpPr/>
+          <p:nvPr/>
+        </p:nvSpPr>
+        <p:spPr>
+          <a:xfrm>
+            <a:off x="594360" y="4242816"/>
+            <a:ext cx="566928" cy="566928"/>
+          </a:xfrm>
+          <a:prstGeom prst="ellipse">
+            <a:avLst/>
+          </a:prstGeom>
+          <a:solidFill>
+            <a:srgbClr val="F7E6E0"/>
+          </a:solidFill>
+          <a:ln/>
+        </p:spPr>
+        <p:txBody>
+          <a:bodyPr/>
+          <a:lstStyle/>
+          <a:p>
+            <a:endParaRPr lang="en-IN"/>
+          </a:p>
+        </p:txBody>
+      </p:sp>
+      <p:pic>
+        <p:nvPicPr>
+          <p:cNvPr id="21" name="Image 4" descr="/home/claude/studygenie/icons/question_blush.png"/>
+          <p:cNvPicPr>
+            <a:picLocks noChangeAspect="1"/>
+          </p:cNvPicPr>
+          <p:nvPr/>
+        </p:nvPicPr>
+        <p:blipFill>
+          <a:blip r:embed="rId7"/>
+          <a:stretch>
+            <a:fillRect/>
+          </a:stretch>
+        </p:blipFill>
+        <p:spPr>
+          <a:xfrm>
+            <a:off x="713232" y="4361688"/>
+            <a:ext cx="329184" cy="329184"/>
+          </a:xfrm>
+          <a:prstGeom prst="rect">
+            <a:avLst/>
+          </a:prstGeom>
+        </p:spPr>
+      </p:pic>
+      <p:sp>
+        <p:nvSpPr>
+          <p:cNvPr id="22" name="Text 15"/>
+          <p:cNvSpPr/>
+          <p:nvPr/>
+        </p:nvSpPr>
+        <p:spPr>
+          <a:xfrm>
+            <a:off x="1325880" y="4215384"/>
+            <a:ext cx="7040880" cy="320040"/>
+          </a:xfrm>
+          <a:prstGeom prst="rect">
+            <a:avLst/>
+          </a:prstGeom>
+          <a:noFill/>
+          <a:ln/>
+        </p:spPr>
+        <p:txBody>
+          <a:bodyPr wrap="square" rtlCol="0" anchor="ctr"/>
+          <a:lstStyle/>
+          <a:p>
+            <a:pPr marL="0" indent="0">
+              <a:buNone/>
+            </a:pPr>
+            <a:r>
+              <a:rPr lang="en-US" b="1" dirty="0">
+                <a:solidFill>
+                  <a:srgbClr val="2B2340"/>
+                </a:solidFill>
+                <a:latin typeface="Calibri" pitchFamily="34" charset="0"/>
+                <a:ea typeface="Calibri" pitchFamily="34" charset="-122"/>
+                <a:cs typeface="Calibri" pitchFamily="34" charset="-120"/>
+              </a:rPr>
+              <a:t>Doubt clarification</a:t>
+            </a:r>
+            <a:endParaRPr lang="en-US" dirty="0"/>
+          </a:p>
+        </p:txBody>
+      </p:sp>
+      <p:sp>
+        <p:nvSpPr>
+          <p:cNvPr id="23" name="Text 16"/>
+          <p:cNvSpPr/>
+          <p:nvPr/>
+        </p:nvSpPr>
+        <p:spPr>
+          <a:xfrm>
+            <a:off x="1325880" y="4517136"/>
+            <a:ext cx="7040880" cy="457200"/>
+          </a:xfrm>
+          <a:prstGeom prst="rect">
+            <a:avLst/>
+          </a:prstGeom>
+          <a:noFill/>
+          <a:ln/>
+        </p:spPr>
+        <p:txBody>
+          <a:bodyPr wrap="square" rtlCol="0" anchor="ctr"/>
+          <a:lstStyle/>
+          <a:p>
+            <a:pPr marL="0" indent="0">
+              <a:lnSpc>
+                <a:spcPct val="110000"/>
+              </a:lnSpc>
+              <a:buNone/>
+            </a:pPr>
+            <a:r>
+              <a:rPr lang="en-US" dirty="0">
+                <a:solidFill>
+                  <a:srgbClr val="746E8C"/>
+                </a:solidFill>
+                <a:latin typeface="Calibri" pitchFamily="34" charset="0"/>
+                <a:ea typeface="Calibri" pitchFamily="34" charset="-122"/>
+                <a:cs typeface="Calibri" pitchFamily="34" charset="-120"/>
+              </a:rPr>
+              <a:t>Limited access to instant doubt clarification.</a:t>
+            </a:r>
+            <a:endParaRPr lang="en-US" dirty="0"/>
+          </a:p>
+        </p:txBody>
+      </p:sp>
+      <p:sp>
+        <p:nvSpPr>
+          <p:cNvPr id="24" name="Shape 17"/>
+          <p:cNvSpPr/>
+          <p:nvPr/>
+        </p:nvSpPr>
+        <p:spPr>
+          <a:xfrm>
+            <a:off x="594360" y="5230368"/>
+            <a:ext cx="566928" cy="566928"/>
+          </a:xfrm>
+          <a:prstGeom prst="ellipse">
+            <a:avLst/>
+          </a:prstGeom>
+          <a:solidFill>
+            <a:srgbClr val="F7E6E0"/>
+          </a:solidFill>
+          <a:ln/>
+        </p:spPr>
+        <p:txBody>
+          <a:bodyPr/>
+          <a:lstStyle/>
+          <a:p>
+            <a:endParaRPr lang="en-IN"/>
+          </a:p>
+        </p:txBody>
+      </p:sp>
+      <p:pic>
+        <p:nvPicPr>
+          <p:cNvPr id="25" name="Image 5" descr="/home/claude/studygenie/icons/clipboardcheck_blush.png"/>
+          <p:cNvPicPr>
+            <a:picLocks noChangeAspect="1"/>
+          </p:cNvPicPr>
+          <p:nvPr/>
+        </p:nvPicPr>
+        <p:blipFill>
+          <a:blip r:embed="rId8"/>
+          <a:stretch>
+            <a:fillRect/>
+          </a:stretch>
+        </p:blipFill>
+        <p:spPr>
+          <a:xfrm>
+            <a:off x="713232" y="5349240"/>
+            <a:ext cx="329184" cy="329184"/>
+          </a:xfrm>
+          <a:prstGeom prst="rect">
+            <a:avLst/>
+          </a:prstGeom>
+        </p:spPr>
+      </p:pic>
+      <p:sp>
+        <p:nvSpPr>
+          <p:cNvPr id="26" name="Text 18"/>
+          <p:cNvSpPr/>
+          <p:nvPr/>
+        </p:nvSpPr>
+        <p:spPr>
+          <a:xfrm>
+            <a:off x="1325880" y="5202936"/>
+            <a:ext cx="7040880" cy="320040"/>
+          </a:xfrm>
+          <a:prstGeom prst="rect">
+            <a:avLst/>
+          </a:prstGeom>
+          <a:noFill/>
+          <a:ln/>
+        </p:spPr>
+        <p:txBody>
+          <a:bodyPr wrap="square" rtlCol="0" anchor="ctr"/>
+          <a:lstStyle/>
+          <a:p>
+            <a:pPr marL="0" indent="0">
+              <a:buNone/>
+            </a:pPr>
+            <a:r>
+              <a:rPr lang="en-US" b="1" dirty="0">
+                <a:solidFill>
+                  <a:srgbClr val="2B2340"/>
+                </a:solidFill>
+                <a:latin typeface="Calibri" pitchFamily="34" charset="0"/>
+                <a:ea typeface="Calibri" pitchFamily="34" charset="-122"/>
+                <a:cs typeface="Calibri" pitchFamily="34" charset="-120"/>
+              </a:rPr>
+              <a:t>Practice &amp; revision</a:t>
+            </a:r>
+            <a:endParaRPr lang="en-US" dirty="0"/>
+          </a:p>
+        </p:txBody>
+      </p:sp>
+      <p:sp>
+        <p:nvSpPr>
+          <p:cNvPr id="27" name="Text 19"/>
+          <p:cNvSpPr/>
+          <p:nvPr/>
+        </p:nvSpPr>
+        <p:spPr>
+          <a:xfrm>
+            <a:off x="1325880" y="5504688"/>
+            <a:ext cx="7040880" cy="457200"/>
+          </a:xfrm>
+          <a:prstGeom prst="rect">
+            <a:avLst/>
+          </a:prstGeom>
+          <a:noFill/>
+          <a:ln/>
+        </p:spPr>
+        <p:txBody>
+          <a:bodyPr wrap="square" rtlCol="0" anchor="ctr"/>
+          <a:lstStyle/>
+          <a:p>
+            <a:pPr marL="0" indent="0">
+              <a:lnSpc>
+                <a:spcPct val="110000"/>
+              </a:lnSpc>
+              <a:buNone/>
+            </a:pPr>
+            <a:r>
+              <a:rPr lang="en-US" sz="2000" dirty="0">
+                <a:solidFill>
+                  <a:srgbClr val="746E8C"/>
+                </a:solidFill>
+                <a:latin typeface="Calibri" pitchFamily="34" charset="0"/>
+                <a:ea typeface="Calibri" pitchFamily="34" charset="-122"/>
+                <a:cs typeface="Calibri" pitchFamily="34" charset="-120"/>
+              </a:rPr>
+              <a:t>Need for practice quizzes and concise revision materials</a:t>
+            </a:r>
+            <a:r>
+              <a:rPr lang="en-US" sz="1150" dirty="0">
+                <a:solidFill>
+                  <a:srgbClr val="746E8C"/>
+                </a:solidFill>
+                <a:latin typeface="Calibri" pitchFamily="34" charset="0"/>
+                <a:ea typeface="Calibri" pitchFamily="34" charset="-122"/>
+                <a:cs typeface="Calibri" pitchFamily="34" charset="-120"/>
+              </a:rPr>
+              <a:t>.</a:t>
             </a:r>
             <a:endParaRPr lang="en-US" sz="1150" dirty="0"/>
           </a:p>
@@ -3425,6 +3481,18 @@
   <p:clrMapOvr>
     <a:masterClrMapping/>
   </p:clrMapOvr>
+  <mc:AlternateContent xmlns:mc="http://schemas.openxmlformats.org/markup-compatibility/2006" xmlns:p159="http://schemas.microsoft.com/office/powerpoint/2015/09/main">
+    <mc:Choice Requires="p159">
+      <p:transition xmlns:p14="http://schemas.microsoft.com/office/powerpoint/2010/main" spd="slow" p14:dur="2000">
+        <p159:morph option="byObject"/>
+      </p:transition>
+    </mc:Choice>
+    <mc:Fallback xmlns="">
+      <p:transition spd="slow">
+        <p:fade/>
+      </p:transition>
+    </mc:Fallback>
+  </mc:AlternateContent>
 </p:sld>
 </file>
 
@@ -3436,6 +3504,7 @@
         <a:solidFill>
           <a:srgbClr val="FAF8FC"/>
         </a:solidFill>
+        <a:effectLst/>
       </p:bgPr>
     </p:bg>
     <p:spTree>
@@ -3460,7 +3529,7 @@
         </p:nvSpPr>
         <p:spPr>
           <a:xfrm>
-            <a:off x="548640" y="457200"/>
+            <a:off x="548640" y="363893"/>
             <a:ext cx="7315200" cy="640080"/>
           </a:xfrm>
           <a:prstGeom prst="rect">
@@ -3473,7 +3542,7 @@
           <a:bodyPr wrap="square" rtlCol="0" anchor="ctr"/>
           <a:lstStyle/>
           <a:p>
-            <a:pPr indent="0" marL="0">
+            <a:pPr marL="0" indent="0">
               <a:buNone/>
             </a:pPr>
             <a:r>
@@ -3512,11 +3581,11 @@
           <a:bodyPr wrap="square" rtlCol="0" anchor="ctr"/>
           <a:lstStyle/>
           <a:p>
-            <a:pPr indent="0" marL="0">
+            <a:pPr marL="0" indent="0">
               <a:buNone/>
             </a:pPr>
             <a:r>
-              <a:rPr lang="en-US" sz="1400" dirty="0">
+              <a:rPr lang="en-US" sz="2400" dirty="0">
                 <a:solidFill>
                   <a:srgbClr val="746E8C"/>
                 </a:solidFill>
@@ -3526,7 +3595,7 @@
               </a:rPr>
               <a:t>What StudyGenie AI is built to achieve</a:t>
             </a:r>
-            <a:endParaRPr lang="en-US" sz="1400" dirty="0"/>
+            <a:endParaRPr lang="en-US" sz="2400" dirty="0"/>
           </a:p>
         </p:txBody>
       </p:sp>
@@ -3538,7 +3607,7 @@
         </p:nvSpPr>
         <p:spPr>
           <a:xfrm>
-            <a:off x="548640" y="1600200"/>
+            <a:off x="550320" y="1463040"/>
             <a:ext cx="3566160" cy="2011680"/>
           </a:xfrm>
           <a:prstGeom prst="roundRect">
@@ -3556,13 +3625,20 @@
             <a:prstDash val="solid"/>
           </a:ln>
           <a:effectLst>
-            <a:outerShdw sx="100000" sy="100000" kx="0" ky="0" algn="bl" rotWithShape="0" blurRad="88900" dist="38100" dir="5400000">
+            <a:outerShdw blurRad="88900" dist="38100" dir="5400000" algn="bl" rotWithShape="0">
               <a:srgbClr val="3D2E5C">
                 <a:alpha val="15000"/>
               </a:srgbClr>
             </a:outerShdw>
           </a:effectLst>
         </p:spPr>
+        <p:txBody>
+          <a:bodyPr/>
+          <a:lstStyle/>
+          <a:p>
+            <a:endParaRPr lang="en-IN" sz="1600"/>
+          </a:p>
+        </p:txBody>
       </p:sp>
       <p:sp>
         <p:nvSpPr>
@@ -3583,24 +3659,31 @@
           </a:solidFill>
           <a:ln/>
         </p:spPr>
+        <p:txBody>
+          <a:bodyPr/>
+          <a:lstStyle/>
+          <a:p>
+            <a:endParaRPr lang="en-IN" sz="1600"/>
+          </a:p>
+        </p:txBody>
       </p:sp>
       <p:pic>
         <p:nvPicPr>
-          <p:cNvPr id="6" name="Image 0" descr="/home/claude/studygenie/icons/layerGroup_white.png">    </p:cNvPr>
+          <p:cNvPr id="6" name="Image 0" descr="/home/claude/studygenie/icons/layerGroup_white.png"/>
           <p:cNvPicPr>
             <a:picLocks noChangeAspect="1"/>
           </p:cNvPicPr>
           <p:nvPr/>
         </p:nvPicPr>
         <p:blipFill>
-          <a:blip r:embed="rId1"/>
+          <a:blip r:embed="rId3"/>
           <a:stretch>
             <a:fillRect/>
           </a:stretch>
         </p:blipFill>
         <p:spPr>
           <a:xfrm>
-            <a:off x="886968" y="1938528"/>
+            <a:off x="886968" y="1919866"/>
             <a:ext cx="347472" cy="347472"/>
           </a:xfrm>
           <a:prstGeom prst="rect">
@@ -3629,11 +3712,11 @@
           <a:bodyPr wrap="square" rtlCol="0" anchor="ctr"/>
           <a:lstStyle/>
           <a:p>
-            <a:pPr indent="0" marL="0">
+            <a:pPr marL="0" indent="0">
               <a:buNone/>
             </a:pPr>
             <a:r>
-              <a:rPr lang="en-US" sz="1350" b="1" dirty="0">
+              <a:rPr lang="en-US" sz="1600" b="1" dirty="0">
                 <a:solidFill>
                   <a:srgbClr val="2B2340"/>
                 </a:solidFill>
@@ -3643,7 +3726,7 @@
               </a:rPr>
               <a:t>Build the application</a:t>
             </a:r>
-            <a:endParaRPr lang="en-US" sz="1350" dirty="0"/>
+            <a:endParaRPr lang="en-US" sz="1600" dirty="0"/>
           </a:p>
         </p:txBody>
       </p:sp>
@@ -3668,14 +3751,14 @@
           <a:bodyPr wrap="square" rtlCol="0" anchor="ctr"/>
           <a:lstStyle/>
           <a:p>
-            <a:pPr indent="0" marL="0">
+            <a:pPr marL="0" indent="0">
               <a:lnSpc>
                 <a:spcPct val="110000"/>
               </a:lnSpc>
               <a:buNone/>
             </a:pPr>
             <a:r>
-              <a:rPr lang="en-US" sz="1050" dirty="0">
+              <a:rPr lang="en-US" sz="1600" dirty="0">
                 <a:solidFill>
                   <a:srgbClr val="746E8C"/>
                 </a:solidFill>
@@ -3685,7 +3768,7 @@
               </a:rPr>
               <a:t>Develop an AI-based study planning application.</a:t>
             </a:r>
-            <a:endParaRPr lang="en-US" sz="1050" dirty="0"/>
+            <a:endParaRPr lang="en-US" sz="1600" dirty="0"/>
           </a:p>
         </p:txBody>
       </p:sp>
@@ -3715,13 +3798,20 @@
             <a:prstDash val="solid"/>
           </a:ln>
           <a:effectLst>
-            <a:outerShdw sx="100000" sy="100000" kx="0" ky="0" algn="bl" rotWithShape="0" blurRad="88900" dist="38100" dir="5400000">
+            <a:outerShdw blurRad="88900" dist="38100" dir="5400000" algn="bl" rotWithShape="0">
               <a:srgbClr val="3D2E5C">
                 <a:alpha val="15000"/>
               </a:srgbClr>
             </a:outerShdw>
           </a:effectLst>
         </p:spPr>
+        <p:txBody>
+          <a:bodyPr/>
+          <a:lstStyle/>
+          <a:p>
+            <a:endParaRPr lang="en-IN" sz="1600"/>
+          </a:p>
+        </p:txBody>
       </p:sp>
       <p:sp>
         <p:nvSpPr>
@@ -3742,17 +3832,24 @@
           </a:solidFill>
           <a:ln/>
         </p:spPr>
+        <p:txBody>
+          <a:bodyPr/>
+          <a:lstStyle/>
+          <a:p>
+            <a:endParaRPr lang="en-IN" sz="1600"/>
+          </a:p>
+        </p:txBody>
       </p:sp>
       <p:pic>
         <p:nvPicPr>
-          <p:cNvPr id="11" name="Image 1" descr="/home/claude/studygenie/icons/calendar_white.png">    </p:cNvPr>
+          <p:cNvPr id="11" name="Image 1" descr="/home/claude/studygenie/icons/calendar_white.png"/>
           <p:cNvPicPr>
             <a:picLocks noChangeAspect="1"/>
           </p:cNvPicPr>
           <p:nvPr/>
         </p:nvPicPr>
         <p:blipFill>
-          <a:blip r:embed="rId2"/>
+          <a:blip r:embed="rId4"/>
           <a:stretch>
             <a:fillRect/>
           </a:stretch>
@@ -3788,11 +3885,11 @@
           <a:bodyPr wrap="square" rtlCol="0" anchor="ctr"/>
           <a:lstStyle/>
           <a:p>
-            <a:pPr indent="0" marL="0">
+            <a:pPr marL="0" indent="0">
               <a:buNone/>
             </a:pPr>
             <a:r>
-              <a:rPr lang="en-US" sz="1350" b="1" dirty="0">
+              <a:rPr lang="en-US" sz="1600" b="1" dirty="0">
                 <a:solidFill>
                   <a:srgbClr val="2B2340"/>
                 </a:solidFill>
@@ -3802,7 +3899,7 @@
               </a:rPr>
               <a:t>Generate schedules</a:t>
             </a:r>
-            <a:endParaRPr lang="en-US" sz="1350" dirty="0"/>
+            <a:endParaRPr lang="en-US" sz="1600" dirty="0"/>
           </a:p>
         </p:txBody>
       </p:sp>
@@ -3827,14 +3924,14 @@
           <a:bodyPr wrap="square" rtlCol="0" anchor="ctr"/>
           <a:lstStyle/>
           <a:p>
-            <a:pPr indent="0" marL="0">
+            <a:pPr marL="0" indent="0">
               <a:lnSpc>
                 <a:spcPct val="110000"/>
               </a:lnSpc>
               <a:buNone/>
             </a:pPr>
             <a:r>
-              <a:rPr lang="en-US" sz="1050" dirty="0">
+              <a:rPr lang="en-US" sz="1600" dirty="0">
                 <a:solidFill>
                   <a:srgbClr val="746E8C"/>
                 </a:solidFill>
@@ -3844,7 +3941,7 @@
               </a:rPr>
               <a:t>Generate personalized study schedules for each student.</a:t>
             </a:r>
-            <a:endParaRPr lang="en-US" sz="1050" dirty="0"/>
+            <a:endParaRPr lang="en-US" sz="1600" dirty="0"/>
           </a:p>
         </p:txBody>
       </p:sp>
@@ -3874,13 +3971,20 @@
             <a:prstDash val="solid"/>
           </a:ln>
           <a:effectLst>
-            <a:outerShdw sx="100000" sy="100000" kx="0" ky="0" algn="bl" rotWithShape="0" blurRad="88900" dist="38100" dir="5400000">
+            <a:outerShdw blurRad="88900" dist="38100" dir="5400000" algn="bl" rotWithShape="0">
               <a:srgbClr val="3D2E5C">
                 <a:alpha val="15000"/>
               </a:srgbClr>
             </a:outerShdw>
           </a:effectLst>
         </p:spPr>
+        <p:txBody>
+          <a:bodyPr/>
+          <a:lstStyle/>
+          <a:p>
+            <a:endParaRPr lang="en-IN"/>
+          </a:p>
+        </p:txBody>
       </p:sp>
       <p:sp>
         <p:nvSpPr>
@@ -3901,17 +4005,24 @@
           </a:solidFill>
           <a:ln/>
         </p:spPr>
+        <p:txBody>
+          <a:bodyPr/>
+          <a:lstStyle/>
+          <a:p>
+            <a:endParaRPr lang="en-IN" sz="1600"/>
+          </a:p>
+        </p:txBody>
       </p:sp>
       <p:pic>
         <p:nvPicPr>
-          <p:cNvPr id="16" name="Image 2" descr="/home/claude/studygenie/icons/lightbulb_white.png">    </p:cNvPr>
+          <p:cNvPr id="16" name="Image 2" descr="/home/claude/studygenie/icons/lightbulb_white.png"/>
           <p:cNvPicPr>
             <a:picLocks noChangeAspect="1"/>
           </p:cNvPicPr>
           <p:nvPr/>
         </p:nvPicPr>
         <p:blipFill>
-          <a:blip r:embed="rId3"/>
+          <a:blip r:embed="rId5"/>
           <a:stretch>
             <a:fillRect/>
           </a:stretch>
@@ -3947,11 +4058,11 @@
           <a:bodyPr wrap="square" rtlCol="0" anchor="ctr"/>
           <a:lstStyle/>
           <a:p>
-            <a:pPr indent="0" marL="0">
+            <a:pPr marL="0" indent="0">
               <a:buNone/>
             </a:pPr>
             <a:r>
-              <a:rPr lang="en-US" sz="1350" b="1" dirty="0">
+              <a:rPr lang="en-US" sz="1600" b="1" dirty="0">
                 <a:solidFill>
                   <a:srgbClr val="2B2340"/>
                 </a:solidFill>
@@ -3961,7 +4072,7 @@
               </a:rPr>
               <a:t>Simplify concepts</a:t>
             </a:r>
-            <a:endParaRPr lang="en-US" sz="1350" dirty="0"/>
+            <a:endParaRPr lang="en-US" sz="1600" dirty="0"/>
           </a:p>
         </p:txBody>
       </p:sp>
@@ -3986,14 +4097,14 @@
           <a:bodyPr wrap="square" rtlCol="0" anchor="ctr"/>
           <a:lstStyle/>
           <a:p>
-            <a:pPr indent="0" marL="0">
+            <a:pPr marL="0" indent="0">
               <a:lnSpc>
                 <a:spcPct val="110000"/>
               </a:lnSpc>
               <a:buNone/>
             </a:pPr>
             <a:r>
-              <a:rPr lang="en-US" sz="1050" dirty="0">
+              <a:rPr lang="en-US" sz="1600" dirty="0">
                 <a:solidFill>
                   <a:srgbClr val="746E8C"/>
                 </a:solidFill>
@@ -4003,7 +4114,7 @@
               </a:rPr>
               <a:t>Explain difficult concepts in simple, clear language.</a:t>
             </a:r>
-            <a:endParaRPr lang="en-US" sz="1050" dirty="0"/>
+            <a:endParaRPr lang="en-US" sz="1600" dirty="0"/>
           </a:p>
         </p:txBody>
       </p:sp>
@@ -4015,7 +4126,7 @@
         </p:nvSpPr>
         <p:spPr>
           <a:xfrm>
-            <a:off x="548640" y="3794760"/>
+            <a:off x="550320" y="3863340"/>
             <a:ext cx="3566160" cy="2011680"/>
           </a:xfrm>
           <a:prstGeom prst="roundRect">
@@ -4033,13 +4144,20 @@
             <a:prstDash val="solid"/>
           </a:ln>
           <a:effectLst>
-            <a:outerShdw sx="100000" sy="100000" kx="0" ky="0" algn="bl" rotWithShape="0" blurRad="88900" dist="38100" dir="5400000">
+            <a:outerShdw blurRad="88900" dist="38100" dir="5400000" algn="bl" rotWithShape="0">
               <a:srgbClr val="3D2E5C">
                 <a:alpha val="15000"/>
               </a:srgbClr>
             </a:outerShdw>
           </a:effectLst>
         </p:spPr>
+        <p:txBody>
+          <a:bodyPr/>
+          <a:lstStyle/>
+          <a:p>
+            <a:endParaRPr lang="en-IN"/>
+          </a:p>
+        </p:txBody>
       </p:sp>
       <p:sp>
         <p:nvSpPr>
@@ -4060,17 +4178,24 @@
           </a:solidFill>
           <a:ln/>
         </p:spPr>
+        <p:txBody>
+          <a:bodyPr/>
+          <a:lstStyle/>
+          <a:p>
+            <a:endParaRPr lang="en-IN" sz="1600"/>
+          </a:p>
+        </p:txBody>
       </p:sp>
       <p:pic>
         <p:nvPicPr>
-          <p:cNvPr id="21" name="Image 3" descr="/home/claude/studygenie/icons/book_white.png">    </p:cNvPr>
+          <p:cNvPr id="21" name="Image 3" descr="/home/claude/studygenie/icons/book_white.png"/>
           <p:cNvPicPr>
             <a:picLocks noChangeAspect="1"/>
           </p:cNvPicPr>
           <p:nvPr/>
         </p:nvPicPr>
         <p:blipFill>
-          <a:blip r:embed="rId4"/>
+          <a:blip r:embed="rId6"/>
           <a:stretch>
             <a:fillRect/>
           </a:stretch>
@@ -4106,11 +4231,11 @@
           <a:bodyPr wrap="square" rtlCol="0" anchor="ctr"/>
           <a:lstStyle/>
           <a:p>
-            <a:pPr indent="0" marL="0">
+            <a:pPr marL="0" indent="0">
               <a:buNone/>
             </a:pPr>
             <a:r>
-              <a:rPr lang="en-US" sz="1350" b="1" dirty="0">
+              <a:rPr lang="en-US" sz="1600" b="1" dirty="0">
                 <a:solidFill>
                   <a:srgbClr val="2B2340"/>
                 </a:solidFill>
@@ -4120,7 +4245,7 @@
               </a:rPr>
               <a:t>Concise notes</a:t>
             </a:r>
-            <a:endParaRPr lang="en-US" sz="1350" dirty="0"/>
+            <a:endParaRPr lang="en-US" sz="1600" dirty="0"/>
           </a:p>
         </p:txBody>
       </p:sp>
@@ -4145,14 +4270,14 @@
           <a:bodyPr wrap="square" rtlCol="0" anchor="ctr"/>
           <a:lstStyle/>
           <a:p>
-            <a:pPr indent="0" marL="0">
+            <a:pPr marL="0" indent="0">
               <a:lnSpc>
                 <a:spcPct val="110000"/>
               </a:lnSpc>
               <a:buNone/>
             </a:pPr>
             <a:r>
-              <a:rPr lang="en-US" sz="1050" dirty="0">
+              <a:rPr lang="en-US" sz="1600" dirty="0">
                 <a:solidFill>
                   <a:srgbClr val="746E8C"/>
                 </a:solidFill>
@@ -4160,7 +4285,18 @@
                 <a:ea typeface="Calibri" pitchFamily="34" charset="-122"/>
                 <a:cs typeface="Calibri" pitchFamily="34" charset="-120"/>
               </a:rPr>
-              <a:t>Provide concise revision notes for quick recall.</a:t>
+              <a:t>Provide concise revision notes for quick recall</a:t>
+            </a:r>
+            <a:r>
+              <a:rPr lang="en-US" sz="1050" dirty="0">
+                <a:solidFill>
+                  <a:srgbClr val="746E8C"/>
+                </a:solidFill>
+                <a:latin typeface="Calibri" pitchFamily="34" charset="0"/>
+                <a:ea typeface="Calibri" pitchFamily="34" charset="-122"/>
+                <a:cs typeface="Calibri" pitchFamily="34" charset="-120"/>
+              </a:rPr>
+              <a:t>.</a:t>
             </a:r>
             <a:endParaRPr lang="en-US" sz="1050" dirty="0"/>
           </a:p>
@@ -4192,13 +4328,20 @@
             <a:prstDash val="solid"/>
           </a:ln>
           <a:effectLst>
-            <a:outerShdw sx="100000" sy="100000" kx="0" ky="0" algn="bl" rotWithShape="0" blurRad="88900" dist="38100" dir="5400000">
+            <a:outerShdw blurRad="88900" dist="38100" dir="5400000" algn="bl" rotWithShape="0">
               <a:srgbClr val="3D2E5C">
                 <a:alpha val="15000"/>
               </a:srgbClr>
             </a:outerShdw>
           </a:effectLst>
         </p:spPr>
+        <p:txBody>
+          <a:bodyPr/>
+          <a:lstStyle/>
+          <a:p>
+            <a:endParaRPr lang="en-IN"/>
+          </a:p>
+        </p:txBody>
       </p:sp>
       <p:sp>
         <p:nvSpPr>
@@ -4219,17 +4362,24 @@
           </a:solidFill>
           <a:ln/>
         </p:spPr>
+        <p:txBody>
+          <a:bodyPr/>
+          <a:lstStyle/>
+          <a:p>
+            <a:endParaRPr lang="en-IN" sz="1600"/>
+          </a:p>
+        </p:txBody>
       </p:sp>
       <p:pic>
         <p:nvPicPr>
-          <p:cNvPr id="26" name="Image 4" descr="/home/claude/studygenie/icons/clipboardcheck_white.png">    </p:cNvPr>
+          <p:cNvPr id="26" name="Image 4" descr="/home/claude/studygenie/icons/clipboardcheck_white.png"/>
           <p:cNvPicPr>
             <a:picLocks noChangeAspect="1"/>
           </p:cNvPicPr>
           <p:nvPr/>
         </p:nvPicPr>
         <p:blipFill>
-          <a:blip r:embed="rId5"/>
+          <a:blip r:embed="rId7"/>
           <a:stretch>
             <a:fillRect/>
           </a:stretch>
@@ -4265,11 +4415,11 @@
           <a:bodyPr wrap="square" rtlCol="0" anchor="ctr"/>
           <a:lstStyle/>
           <a:p>
-            <a:pPr indent="0" marL="0">
+            <a:pPr marL="0" indent="0">
               <a:buNone/>
             </a:pPr>
             <a:r>
-              <a:rPr lang="en-US" sz="1350" b="1" dirty="0">
+              <a:rPr lang="en-US" sz="1600" b="1" dirty="0">
                 <a:solidFill>
                   <a:srgbClr val="2B2340"/>
                 </a:solidFill>
@@ -4279,7 +4429,7 @@
               </a:rPr>
               <a:t>Self-assessment</a:t>
             </a:r>
-            <a:endParaRPr lang="en-US" sz="1350" dirty="0"/>
+            <a:endParaRPr lang="en-US" sz="1600" dirty="0"/>
           </a:p>
         </p:txBody>
       </p:sp>
@@ -4304,14 +4454,14 @@
           <a:bodyPr wrap="square" rtlCol="0" anchor="ctr"/>
           <a:lstStyle/>
           <a:p>
-            <a:pPr indent="0" marL="0">
+            <a:pPr marL="0" indent="0">
               <a:lnSpc>
                 <a:spcPct val="110000"/>
               </a:lnSpc>
               <a:buNone/>
             </a:pPr>
             <a:r>
-              <a:rPr lang="en-US" sz="1050" dirty="0">
+              <a:rPr lang="en-US" sz="1600" dirty="0">
                 <a:solidFill>
                   <a:srgbClr val="746E8C"/>
                 </a:solidFill>
@@ -4319,7 +4469,18 @@
                 <a:ea typeface="Calibri" pitchFamily="34" charset="-122"/>
                 <a:cs typeface="Calibri" pitchFamily="34" charset="-120"/>
               </a:rPr>
-              <a:t>Generate AI-based quizzes for self-assessment.</a:t>
+              <a:t>Generate AI-based quizzes for self-assessment</a:t>
+            </a:r>
+            <a:r>
+              <a:rPr lang="en-US" sz="1050" dirty="0">
+                <a:solidFill>
+                  <a:srgbClr val="746E8C"/>
+                </a:solidFill>
+                <a:latin typeface="Calibri" pitchFamily="34" charset="0"/>
+                <a:ea typeface="Calibri" pitchFamily="34" charset="-122"/>
+                <a:cs typeface="Calibri" pitchFamily="34" charset="-120"/>
+              </a:rPr>
+              <a:t>.</a:t>
             </a:r>
             <a:endParaRPr lang="en-US" sz="1050" dirty="0"/>
           </a:p>
@@ -4351,13 +4512,20 @@
             <a:prstDash val="solid"/>
           </a:ln>
           <a:effectLst>
-            <a:outerShdw sx="100000" sy="100000" kx="0" ky="0" algn="bl" rotWithShape="0" blurRad="88900" dist="38100" dir="5400000">
+            <a:outerShdw blurRad="88900" dist="38100" dir="5400000" algn="bl" rotWithShape="0">
               <a:srgbClr val="3D2E5C">
                 <a:alpha val="15000"/>
               </a:srgbClr>
             </a:outerShdw>
           </a:effectLst>
         </p:spPr>
+        <p:txBody>
+          <a:bodyPr/>
+          <a:lstStyle/>
+          <a:p>
+            <a:endParaRPr lang="en-IN"/>
+          </a:p>
+        </p:txBody>
       </p:sp>
       <p:sp>
         <p:nvSpPr>
@@ -4378,17 +4546,24 @@
           </a:solidFill>
           <a:ln/>
         </p:spPr>
+        <p:txBody>
+          <a:bodyPr/>
+          <a:lstStyle/>
+          <a:p>
+            <a:endParaRPr lang="en-IN" sz="1600"/>
+          </a:p>
+        </p:txBody>
       </p:sp>
       <p:pic>
         <p:nvPicPr>
-          <p:cNvPr id="31" name="Image 5" descr="/home/claude/studygenie/icons/question_white.png">    </p:cNvPr>
+          <p:cNvPr id="31" name="Image 5" descr="/home/claude/studygenie/icons/question_white.png"/>
           <p:cNvPicPr>
             <a:picLocks noChangeAspect="1"/>
           </p:cNvPicPr>
           <p:nvPr/>
         </p:nvPicPr>
         <p:blipFill>
-          <a:blip r:embed="rId6"/>
+          <a:blip r:embed="rId8"/>
           <a:stretch>
             <a:fillRect/>
           </a:stretch>
@@ -4424,11 +4599,11 @@
           <a:bodyPr wrap="square" rtlCol="0" anchor="ctr"/>
           <a:lstStyle/>
           <a:p>
-            <a:pPr indent="0" marL="0">
+            <a:pPr marL="0" indent="0">
               <a:buNone/>
             </a:pPr>
             <a:r>
-              <a:rPr lang="en-US" sz="1350" b="1" dirty="0">
+              <a:rPr lang="en-US" sz="1600" b="1" dirty="0">
                 <a:solidFill>
                   <a:srgbClr val="2B2340"/>
                 </a:solidFill>
@@ -4438,7 +4613,7 @@
               </a:rPr>
               <a:t>Instant doubt-solving</a:t>
             </a:r>
-            <a:endParaRPr lang="en-US" sz="1350" dirty="0"/>
+            <a:endParaRPr lang="en-US" sz="1600" dirty="0"/>
           </a:p>
         </p:txBody>
       </p:sp>
@@ -4463,14 +4638,14 @@
           <a:bodyPr wrap="square" rtlCol="0" anchor="ctr"/>
           <a:lstStyle/>
           <a:p>
-            <a:pPr indent="0" marL="0">
+            <a:pPr marL="0" indent="0">
               <a:lnSpc>
                 <a:spcPct val="110000"/>
               </a:lnSpc>
               <a:buNone/>
             </a:pPr>
             <a:r>
-              <a:rPr lang="en-US" sz="1050" dirty="0">
+              <a:rPr lang="en-US" sz="1600" dirty="0">
                 <a:solidFill>
                   <a:srgbClr val="746E8C"/>
                 </a:solidFill>
@@ -4478,7 +4653,18 @@
                 <a:ea typeface="Calibri" pitchFamily="34" charset="-122"/>
                 <a:cs typeface="Calibri" pitchFamily="34" charset="-120"/>
               </a:rPr>
-              <a:t>Solve students' doubts instantly, any time.</a:t>
+              <a:t>Solve students' doubts instantly, any time</a:t>
+            </a:r>
+            <a:r>
+              <a:rPr lang="en-US" sz="1050" dirty="0">
+                <a:solidFill>
+                  <a:srgbClr val="746E8C"/>
+                </a:solidFill>
+                <a:latin typeface="Calibri" pitchFamily="34" charset="0"/>
+                <a:ea typeface="Calibri" pitchFamily="34" charset="-122"/>
+                <a:cs typeface="Calibri" pitchFamily="34" charset="-120"/>
+              </a:rPr>
+              <a:t>.</a:t>
             </a:r>
             <a:endParaRPr lang="en-US" sz="1050" dirty="0"/>
           </a:p>
@@ -4503,6 +4689,13 @@
           </a:solidFill>
           <a:ln/>
         </p:spPr>
+        <p:txBody>
+          <a:bodyPr/>
+          <a:lstStyle/>
+          <a:p>
+            <a:endParaRPr lang="en-IN"/>
+          </a:p>
+        </p:txBody>
       </p:sp>
       <p:sp>
         <p:nvSpPr>
@@ -4525,6 +4718,13 @@
           </a:solidFill>
           <a:ln/>
         </p:spPr>
+        <p:txBody>
+          <a:bodyPr/>
+          <a:lstStyle/>
+          <a:p>
+            <a:endParaRPr lang="en-IN"/>
+          </a:p>
+        </p:txBody>
       </p:sp>
       <p:sp>
         <p:nvSpPr>
@@ -4545,17 +4745,24 @@
           </a:solidFill>
           <a:ln/>
         </p:spPr>
+        <p:txBody>
+          <a:bodyPr/>
+          <a:lstStyle/>
+          <a:p>
+            <a:endParaRPr lang="en-IN"/>
+          </a:p>
+        </p:txBody>
       </p:sp>
       <p:pic>
         <p:nvPicPr>
-          <p:cNvPr id="37" name="Image 6" descr="/home/claude/studygenie/icons/chartline_white.png">    </p:cNvPr>
+          <p:cNvPr id="37" name="Image 6" descr="/home/claude/studygenie/icons/chartline_white.png"/>
           <p:cNvPicPr>
             <a:picLocks noChangeAspect="1"/>
           </p:cNvPicPr>
           <p:nvPr/>
         </p:nvPicPr>
         <p:blipFill>
-          <a:blip r:embed="rId7"/>
+          <a:blip r:embed="rId9"/>
           <a:stretch>
             <a:fillRect/>
           </a:stretch>
@@ -4591,7 +4798,7 @@
           <a:bodyPr wrap="square" rtlCol="0" anchor="ctr"/>
           <a:lstStyle/>
           <a:p>
-            <a:pPr indent="0" marL="0">
+            <a:pPr marL="0" indent="0">
               <a:buNone/>
             </a:pPr>
             <a:r>
@@ -4630,7 +4837,7 @@
           <a:bodyPr wrap="square" rtlCol="0" anchor="ctr"/>
           <a:lstStyle/>
           <a:p>
-            <a:pPr indent="0" marL="0">
+            <a:pPr marL="0" indent="0">
               <a:buNone/>
             </a:pPr>
             <a:r>
@@ -4653,6 +4860,18 @@
   <p:clrMapOvr>
     <a:masterClrMapping/>
   </p:clrMapOvr>
+  <mc:AlternateContent xmlns:mc="http://schemas.openxmlformats.org/markup-compatibility/2006" xmlns:p159="http://schemas.microsoft.com/office/powerpoint/2015/09/main">
+    <mc:Choice Requires="p159">
+      <p:transition xmlns:p14="http://schemas.microsoft.com/office/powerpoint/2010/main" spd="slow" p14:dur="2000">
+        <p159:morph option="byObject"/>
+      </p:transition>
+    </mc:Choice>
+    <mc:Fallback xmlns="">
+      <p:transition spd="slow">
+        <p:fade/>
+      </p:transition>
+    </mc:Fallback>
+  </mc:AlternateContent>
 </p:sld>
 </file>
 
@@ -4664,6 +4883,7 @@
         <a:solidFill>
           <a:srgbClr val="FAF8FC"/>
         </a:solidFill>
+        <a:effectLst/>
       </p:bgPr>
     </p:bg>
     <p:spTree>
@@ -4701,7 +4921,7 @@
           <a:bodyPr wrap="square" rtlCol="0" anchor="ctr"/>
           <a:lstStyle/>
           <a:p>
-            <a:pPr indent="0" marL="0">
+            <a:pPr marL="0" indent="0">
               <a:buNone/>
             </a:pPr>
             <a:r>
@@ -4740,11 +4960,11 @@
           <a:bodyPr wrap="square" rtlCol="0" anchor="ctr"/>
           <a:lstStyle/>
           <a:p>
-            <a:pPr indent="0" marL="0">
+            <a:pPr marL="0" indent="0">
               <a:buNone/>
             </a:pPr>
             <a:r>
-              <a:rPr lang="en-US" sz="1250" dirty="0">
+              <a:rPr lang="en-US" dirty="0">
                 <a:solidFill>
                   <a:srgbClr val="746E8C"/>
                 </a:solidFill>
@@ -4754,7 +4974,7 @@
               </a:rPr>
               <a:t>From student input to a complete, AI-generated study kit</a:t>
             </a:r>
-            <a:endParaRPr lang="en-US" sz="1250" dirty="0"/>
+            <a:endParaRPr lang="en-US" dirty="0"/>
           </a:p>
         </p:txBody>
       </p:sp>
@@ -4779,6 +4999,13 @@
           </a:solidFill>
           <a:ln/>
         </p:spPr>
+        <p:txBody>
+          <a:bodyPr/>
+          <a:lstStyle/>
+          <a:p>
+            <a:endParaRPr lang="en-IN"/>
+          </a:p>
+        </p:txBody>
       </p:sp>
       <p:sp>
         <p:nvSpPr>
@@ -4788,7 +5015,7 @@
         </p:nvSpPr>
         <p:spPr>
           <a:xfrm>
-            <a:off x="749808" y="1577340"/>
+            <a:off x="8046720" y="5824728"/>
             <a:ext cx="640080" cy="640080"/>
           </a:xfrm>
           <a:prstGeom prst="ellipse">
@@ -4799,422 +5026,17 @@
           </a:solidFill>
           <a:ln/>
         </p:spPr>
+        <p:txBody>
+          <a:bodyPr/>
+          <a:lstStyle/>
+          <a:p>
+            <a:endParaRPr lang="en-IN"/>
+          </a:p>
+        </p:txBody>
       </p:sp>
       <p:pic>
         <p:nvPicPr>
-          <p:cNvPr id="6" name="Image 0" descr="/home/claude/studygenie/icons/penfancy_white.png">    </p:cNvPr>
-          <p:cNvPicPr>
-            <a:picLocks noChangeAspect="1"/>
-          </p:cNvPicPr>
-          <p:nvPr/>
-        </p:nvPicPr>
-        <p:blipFill>
-          <a:blip r:embed="rId1"/>
-          <a:stretch>
-            <a:fillRect/>
-          </a:stretch>
-        </p:blipFill>
-        <p:spPr>
-          <a:xfrm>
-            <a:off x="886968" y="1714500"/>
-            <a:ext cx="365760" cy="365760"/>
-          </a:xfrm>
-          <a:prstGeom prst="rect">
-            <a:avLst/>
-          </a:prstGeom>
-        </p:spPr>
-      </p:pic>
-      <p:sp>
-        <p:nvSpPr>
-          <p:cNvPr id="7" name="Text 4"/>
-          <p:cNvSpPr/>
-          <p:nvPr/>
-        </p:nvSpPr>
-        <p:spPr>
-          <a:xfrm>
-            <a:off x="1508760" y="1527048"/>
-            <a:ext cx="2606040" cy="365760"/>
-          </a:xfrm>
-          <a:prstGeom prst="rect">
-            <a:avLst/>
-          </a:prstGeom>
-          <a:noFill/>
-          <a:ln/>
-        </p:spPr>
-        <p:txBody>
-          <a:bodyPr wrap="square" rtlCol="0" anchor="ctr"/>
-          <a:lstStyle/>
-          <a:p>
-            <a:pPr indent="0" marL="0">
-              <a:buNone/>
-            </a:pPr>
-            <a:r>
-              <a:rPr lang="en-US" sz="1250" b="1" dirty="0">
-                <a:solidFill>
-                  <a:srgbClr val="FFFFFF"/>
-                </a:solidFill>
-                <a:latin typeface="Calibri" pitchFamily="34" charset="0"/>
-                <a:ea typeface="Calibri" pitchFamily="34" charset="-122"/>
-                <a:cs typeface="Calibri" pitchFamily="34" charset="-120"/>
-              </a:rPr>
-              <a:t>User Input</a:t>
-            </a:r>
-            <a:endParaRPr lang="en-US" sz="1250" dirty="0"/>
-          </a:p>
-        </p:txBody>
-      </p:sp>
-      <p:sp>
-        <p:nvSpPr>
-          <p:cNvPr id="8" name="Text 5"/>
-          <p:cNvSpPr/>
-          <p:nvPr/>
-        </p:nvSpPr>
-        <p:spPr>
-          <a:xfrm>
-            <a:off x="1508760" y="1874520"/>
-            <a:ext cx="2606040" cy="411480"/>
-          </a:xfrm>
-          <a:prstGeom prst="rect">
-            <a:avLst/>
-          </a:prstGeom>
-          <a:noFill/>
-          <a:ln/>
-        </p:spPr>
-        <p:txBody>
-          <a:bodyPr wrap="square" rtlCol="0" anchor="ctr"/>
-          <a:lstStyle/>
-          <a:p>
-            <a:pPr indent="0" marL="0">
-              <a:lnSpc>
-                <a:spcPct val="110000"/>
-              </a:lnSpc>
-              <a:buNone/>
-            </a:pPr>
-            <a:r>
-              <a:rPr lang="en-US" sz="1000" dirty="0">
-                <a:solidFill>
-                  <a:srgbClr val="E4DBF5"/>
-                </a:solidFill>
-                <a:latin typeface="Calibri" pitchFamily="34" charset="0"/>
-                <a:ea typeface="Calibri" pitchFamily="34" charset="-122"/>
-                <a:cs typeface="Calibri" pitchFamily="34" charset="-120"/>
-              </a:rPr>
-              <a:t>Enter subject, topics, days left, and study hours.</a:t>
-            </a:r>
-            <a:endParaRPr lang="en-US" sz="1000" dirty="0"/>
-          </a:p>
-        </p:txBody>
-      </p:sp>
-      <p:sp>
-        <p:nvSpPr>
-          <p:cNvPr id="9" name="Shape 6"/>
-          <p:cNvSpPr/>
-          <p:nvPr/>
-        </p:nvSpPr>
-        <p:spPr>
-          <a:xfrm>
-            <a:off x="2276856" y="2377440"/>
-            <a:ext cx="292608" cy="292608"/>
-          </a:xfrm>
-          <a:prstGeom prst="ellipse">
-            <a:avLst/>
-          </a:prstGeom>
-          <a:solidFill>
-            <a:srgbClr val="F2957D"/>
-          </a:solidFill>
-          <a:ln/>
-        </p:spPr>
-      </p:sp>
-      <p:sp>
-        <p:nvSpPr>
-          <p:cNvPr id="10" name="Text 7"/>
-          <p:cNvSpPr/>
-          <p:nvPr/>
-        </p:nvSpPr>
-        <p:spPr>
-          <a:xfrm>
-            <a:off x="2240280" y="2359152"/>
-            <a:ext cx="365760" cy="320040"/>
-          </a:xfrm>
-          <a:prstGeom prst="rect">
-            <a:avLst/>
-          </a:prstGeom>
-          <a:noFill/>
-          <a:ln/>
-        </p:spPr>
-        <p:txBody>
-          <a:bodyPr wrap="square" rtlCol="0" anchor="ctr"/>
-          <a:lstStyle/>
-          <a:p>
-            <a:pPr algn="ctr" indent="0" marL="0">
-              <a:buNone/>
-            </a:pPr>
-            <a:r>
-              <a:rPr lang="en-US" sz="1200" b="1" dirty="0">
-                <a:solidFill>
-                  <a:srgbClr val="FFFFFF"/>
-                </a:solidFill>
-                <a:latin typeface="Calibri" pitchFamily="34" charset="0"/>
-                <a:ea typeface="Calibri" pitchFamily="34" charset="-122"/>
-                <a:cs typeface="Calibri" pitchFamily="34" charset="-120"/>
-              </a:rPr>
-              <a:t>▼</a:t>
-            </a:r>
-            <a:endParaRPr lang="en-US" sz="1200" dirty="0"/>
-          </a:p>
-        </p:txBody>
-      </p:sp>
-      <p:sp>
-        <p:nvSpPr>
-          <p:cNvPr id="11" name="Shape 8"/>
-          <p:cNvSpPr/>
-          <p:nvPr/>
-        </p:nvSpPr>
-        <p:spPr>
-          <a:xfrm>
-            <a:off x="548640" y="2743200"/>
-            <a:ext cx="3749040" cy="960120"/>
-          </a:xfrm>
-          <a:prstGeom prst="roundRect">
-            <a:avLst>
-              <a:gd name="adj" fmla="val 9524"/>
-            </a:avLst>
-          </a:prstGeom>
-          <a:solidFill>
-            <a:srgbClr val="5FCFB0"/>
-          </a:solidFill>
-          <a:ln/>
-        </p:spPr>
-      </p:sp>
-      <p:sp>
-        <p:nvSpPr>
-          <p:cNvPr id="12" name="Shape 9"/>
-          <p:cNvSpPr/>
-          <p:nvPr/>
-        </p:nvSpPr>
-        <p:spPr>
-          <a:xfrm>
-            <a:off x="749808" y="2903220"/>
-            <a:ext cx="640080" cy="640080"/>
-          </a:xfrm>
-          <a:prstGeom prst="ellipse">
-            <a:avLst/>
-          </a:prstGeom>
-          <a:solidFill>
-            <a:srgbClr val="FFFFFF"/>
-          </a:solidFill>
-          <a:ln/>
-        </p:spPr>
-      </p:sp>
-      <p:pic>
-        <p:nvPicPr>
-          <p:cNvPr id="13" name="Image 1" descr="/home/claude/studygenie/icons/robot_white.png">    </p:cNvPr>
-          <p:cNvPicPr>
-            <a:picLocks noChangeAspect="1"/>
-          </p:cNvPicPr>
-          <p:nvPr/>
-        </p:nvPicPr>
-        <p:blipFill>
-          <a:blip r:embed="rId2"/>
-          <a:stretch>
-            <a:fillRect/>
-          </a:stretch>
-        </p:blipFill>
-        <p:spPr>
-          <a:xfrm>
-            <a:off x="886968" y="3040380"/>
-            <a:ext cx="365760" cy="365760"/>
-          </a:xfrm>
-          <a:prstGeom prst="rect">
-            <a:avLst/>
-          </a:prstGeom>
-        </p:spPr>
-      </p:pic>
-      <p:sp>
-        <p:nvSpPr>
-          <p:cNvPr id="14" name="Text 10"/>
-          <p:cNvSpPr/>
-          <p:nvPr/>
-        </p:nvSpPr>
-        <p:spPr>
-          <a:xfrm>
-            <a:off x="1508760" y="2852928"/>
-            <a:ext cx="2606040" cy="365760"/>
-          </a:xfrm>
-          <a:prstGeom prst="rect">
-            <a:avLst/>
-          </a:prstGeom>
-          <a:noFill/>
-          <a:ln/>
-        </p:spPr>
-        <p:txBody>
-          <a:bodyPr wrap="square" rtlCol="0" anchor="ctr"/>
-          <a:lstStyle/>
-          <a:p>
-            <a:pPr indent="0" marL="0">
-              <a:buNone/>
-            </a:pPr>
-            <a:r>
-              <a:rPr lang="en-US" sz="1250" b="1" dirty="0">
-                <a:solidFill>
-                  <a:srgbClr val="FFFFFF"/>
-                </a:solidFill>
-                <a:latin typeface="Calibri" pitchFamily="34" charset="0"/>
-                <a:ea typeface="Calibri" pitchFamily="34" charset="-122"/>
-                <a:cs typeface="Calibri" pitchFamily="34" charset="-120"/>
-              </a:rPr>
-              <a:t>Generative AI Model</a:t>
-            </a:r>
-            <a:endParaRPr lang="en-US" sz="1250" dirty="0"/>
-          </a:p>
-        </p:txBody>
-      </p:sp>
-      <p:sp>
-        <p:nvSpPr>
-          <p:cNvPr id="15" name="Text 11"/>
-          <p:cNvSpPr/>
-          <p:nvPr/>
-        </p:nvSpPr>
-        <p:spPr>
-          <a:xfrm>
-            <a:off x="1508760" y="3200400"/>
-            <a:ext cx="2606040" cy="411480"/>
-          </a:xfrm>
-          <a:prstGeom prst="rect">
-            <a:avLst/>
-          </a:prstGeom>
-          <a:noFill/>
-          <a:ln/>
-        </p:spPr>
-        <p:txBody>
-          <a:bodyPr wrap="square" rtlCol="0" anchor="ctr"/>
-          <a:lstStyle/>
-          <a:p>
-            <a:pPr indent="0" marL="0">
-              <a:lnSpc>
-                <a:spcPct val="110000"/>
-              </a:lnSpc>
-              <a:buNone/>
-            </a:pPr>
-            <a:r>
-              <a:rPr lang="en-US" sz="1000" dirty="0">
-                <a:solidFill>
-                  <a:srgbClr val="E4DBF5"/>
-                </a:solidFill>
-                <a:latin typeface="Calibri" pitchFamily="34" charset="0"/>
-                <a:ea typeface="Calibri" pitchFamily="34" charset="-122"/>
-                <a:cs typeface="Calibri" pitchFamily="34" charset="-120"/>
-              </a:rPr>
-              <a:t>Processed by the AI engine (gpt-4.1-nano).</a:t>
-            </a:r>
-            <a:endParaRPr lang="en-US" sz="1000" dirty="0"/>
-          </a:p>
-        </p:txBody>
-      </p:sp>
-      <p:sp>
-        <p:nvSpPr>
-          <p:cNvPr id="16" name="Shape 12"/>
-          <p:cNvSpPr/>
-          <p:nvPr/>
-        </p:nvSpPr>
-        <p:spPr>
-          <a:xfrm>
-            <a:off x="2276856" y="3703320"/>
-            <a:ext cx="292608" cy="292608"/>
-          </a:xfrm>
-          <a:prstGeom prst="ellipse">
-            <a:avLst/>
-          </a:prstGeom>
-          <a:solidFill>
-            <a:srgbClr val="F2957D"/>
-          </a:solidFill>
-          <a:ln/>
-        </p:spPr>
-      </p:sp>
-      <p:sp>
-        <p:nvSpPr>
-          <p:cNvPr id="17" name="Text 13"/>
-          <p:cNvSpPr/>
-          <p:nvPr/>
-        </p:nvSpPr>
-        <p:spPr>
-          <a:xfrm>
-            <a:off x="2240280" y="3685032"/>
-            <a:ext cx="365760" cy="320040"/>
-          </a:xfrm>
-          <a:prstGeom prst="rect">
-            <a:avLst/>
-          </a:prstGeom>
-          <a:noFill/>
-          <a:ln/>
-        </p:spPr>
-        <p:txBody>
-          <a:bodyPr wrap="square" rtlCol="0" anchor="ctr"/>
-          <a:lstStyle/>
-          <a:p>
-            <a:pPr algn="ctr" indent="0" marL="0">
-              <a:buNone/>
-            </a:pPr>
-            <a:r>
-              <a:rPr lang="en-US" sz="1200" b="1" dirty="0">
-                <a:solidFill>
-                  <a:srgbClr val="FFFFFF"/>
-                </a:solidFill>
-                <a:latin typeface="Calibri" pitchFamily="34" charset="0"/>
-                <a:ea typeface="Calibri" pitchFamily="34" charset="-122"/>
-                <a:cs typeface="Calibri" pitchFamily="34" charset="-120"/>
-              </a:rPr>
-              <a:t>▼</a:t>
-            </a:r>
-            <a:endParaRPr lang="en-US" sz="1200" dirty="0"/>
-          </a:p>
-        </p:txBody>
-      </p:sp>
-      <p:sp>
-        <p:nvSpPr>
-          <p:cNvPr id="18" name="Shape 14"/>
-          <p:cNvSpPr/>
-          <p:nvPr/>
-        </p:nvSpPr>
-        <p:spPr>
-          <a:xfrm>
-            <a:off x="548640" y="4069080"/>
-            <a:ext cx="3749040" cy="960120"/>
-          </a:xfrm>
-          <a:prstGeom prst="roundRect">
-            <a:avLst>
-              <a:gd name="adj" fmla="val 9524"/>
-            </a:avLst>
-          </a:prstGeom>
-          <a:solidFill>
-            <a:srgbClr val="2D2150"/>
-          </a:solidFill>
-          <a:ln/>
-        </p:spPr>
-      </p:sp>
-      <p:sp>
-        <p:nvSpPr>
-          <p:cNvPr id="19" name="Shape 15"/>
-          <p:cNvSpPr/>
-          <p:nvPr/>
-        </p:nvSpPr>
-        <p:spPr>
-          <a:xfrm>
-            <a:off x="749808" y="4229100"/>
-            <a:ext cx="640080" cy="640080"/>
-          </a:xfrm>
-          <a:prstGeom prst="ellipse">
-            <a:avLst/>
-          </a:prstGeom>
-          <a:solidFill>
-            <a:srgbClr val="FFFFFF"/>
-          </a:solidFill>
-          <a:ln/>
-        </p:spPr>
-      </p:sp>
-      <p:pic>
-        <p:nvPicPr>
-          <p:cNvPr id="20" name="Image 2" descr="/home/claude/studygenie/icons/slidersh_white.png">    </p:cNvPr>
+          <p:cNvPr id="6" name="Image 0" descr="/home/claude/studygenie/icons/penfancy_white.png"/>
           <p:cNvPicPr>
             <a:picLocks noChangeAspect="1"/>
           </p:cNvPicPr>
@@ -5228,7 +5050,7 @@
         </p:blipFill>
         <p:spPr>
           <a:xfrm>
-            <a:off x="886968" y="4366260"/>
+            <a:off x="886968" y="1714500"/>
             <a:ext cx="365760" cy="365760"/>
           </a:xfrm>
           <a:prstGeom prst="rect">
@@ -5238,13 +5060,13 @@
       </p:pic>
       <p:sp>
         <p:nvSpPr>
-          <p:cNvPr id="21" name="Text 16"/>
-          <p:cNvSpPr/>
-          <p:nvPr/>
-        </p:nvSpPr>
-        <p:spPr>
-          <a:xfrm>
-            <a:off x="1508760" y="4178808"/>
+          <p:cNvPr id="7" name="Text 4"/>
+          <p:cNvSpPr/>
+          <p:nvPr/>
+        </p:nvSpPr>
+        <p:spPr>
+          <a:xfrm>
+            <a:off x="1508760" y="1527048"/>
             <a:ext cx="2606040" cy="365760"/>
           </a:xfrm>
           <a:prstGeom prst="rect">
@@ -5257,11 +5079,11 @@
           <a:bodyPr wrap="square" rtlCol="0" anchor="ctr"/>
           <a:lstStyle/>
           <a:p>
-            <a:pPr indent="0" marL="0">
+            <a:pPr marL="0" indent="0">
               <a:buNone/>
             </a:pPr>
             <a:r>
-              <a:rPr lang="en-US" sz="1200" b="1" dirty="0">
+              <a:rPr lang="en-US" b="1" dirty="0">
                 <a:solidFill>
                   <a:srgbClr val="FFFFFF"/>
                 </a:solidFill>
@@ -5269,21 +5091,21 @@
                 <a:ea typeface="Calibri" pitchFamily="34" charset="-122"/>
                 <a:cs typeface="Calibri" pitchFamily="34" charset="-120"/>
               </a:rPr>
-              <a:t>Display through Gradio</a:t>
-            </a:r>
-            <a:endParaRPr lang="en-US" sz="1200" dirty="0"/>
-          </a:p>
-        </p:txBody>
-      </p:sp>
-      <p:sp>
-        <p:nvSpPr>
-          <p:cNvPr id="22" name="Text 17"/>
-          <p:cNvSpPr/>
-          <p:nvPr/>
-        </p:nvSpPr>
-        <p:spPr>
-          <a:xfrm>
-            <a:off x="1508760" y="4526280"/>
+              <a:t>User Input</a:t>
+            </a:r>
+            <a:endParaRPr lang="en-US" dirty="0"/>
+          </a:p>
+        </p:txBody>
+      </p:sp>
+      <p:sp>
+        <p:nvSpPr>
+          <p:cNvPr id="8" name="Text 5"/>
+          <p:cNvSpPr/>
+          <p:nvPr/>
+        </p:nvSpPr>
+        <p:spPr>
+          <a:xfrm>
+            <a:off x="1508760" y="1874520"/>
             <a:ext cx="2606040" cy="411480"/>
           </a:xfrm>
           <a:prstGeom prst="rect">
@@ -5296,14 +5118,14 @@
           <a:bodyPr wrap="square" rtlCol="0" anchor="ctr"/>
           <a:lstStyle/>
           <a:p>
-            <a:pPr indent="0" marL="0">
+            <a:pPr marL="0" indent="0">
               <a:lnSpc>
                 <a:spcPct val="110000"/>
               </a:lnSpc>
               <a:buNone/>
             </a:pPr>
             <a:r>
-              <a:rPr lang="en-US" sz="1000" dirty="0">
+              <a:rPr lang="en-US" sz="1400" dirty="0">
                 <a:solidFill>
                   <a:srgbClr val="E4DBF5"/>
                 </a:solidFill>
@@ -5311,7 +5133,18 @@
                 <a:ea typeface="Calibri" pitchFamily="34" charset="-122"/>
                 <a:cs typeface="Calibri" pitchFamily="34" charset="-120"/>
               </a:rPr>
-              <a:t>Results are shown to the student via the Gradio interface.</a:t>
+              <a:t>Enter subject, topics, days left, and study hours</a:t>
+            </a:r>
+            <a:r>
+              <a:rPr lang="en-US" sz="1000" dirty="0">
+                <a:solidFill>
+                  <a:srgbClr val="E4DBF5"/>
+                </a:solidFill>
+                <a:latin typeface="Calibri" pitchFamily="34" charset="0"/>
+                <a:ea typeface="Calibri" pitchFamily="34" charset="-122"/>
+                <a:cs typeface="Calibri" pitchFamily="34" charset="-120"/>
+              </a:rPr>
+              <a:t>.</a:t>
             </a:r>
             <a:endParaRPr lang="en-US" sz="1000" dirty="0"/>
           </a:p>
@@ -5319,120 +5152,129 @@
       </p:sp>
       <p:sp>
         <p:nvSpPr>
-          <p:cNvPr id="23" name="Shape 18"/>
-          <p:cNvSpPr/>
-          <p:nvPr/>
-        </p:nvSpPr>
-        <p:spPr>
-          <a:xfrm>
-            <a:off x="4709160" y="1417320"/>
-            <a:ext cx="6903720" cy="4892040"/>
+          <p:cNvPr id="9" name="Shape 6"/>
+          <p:cNvSpPr/>
+          <p:nvPr/>
+        </p:nvSpPr>
+        <p:spPr>
+          <a:xfrm>
+            <a:off x="2276856" y="2377440"/>
+            <a:ext cx="292608" cy="292608"/>
+          </a:xfrm>
+          <a:prstGeom prst="ellipse">
+            <a:avLst/>
+          </a:prstGeom>
+          <a:solidFill>
+            <a:srgbClr val="F2957D"/>
+          </a:solidFill>
+          <a:ln/>
+        </p:spPr>
+        <p:txBody>
+          <a:bodyPr/>
+          <a:lstStyle/>
+          <a:p>
+            <a:endParaRPr lang="en-IN"/>
+          </a:p>
+        </p:txBody>
+      </p:sp>
+      <p:sp>
+        <p:nvSpPr>
+          <p:cNvPr id="10" name="Text 7"/>
+          <p:cNvSpPr/>
+          <p:nvPr/>
+        </p:nvSpPr>
+        <p:spPr>
+          <a:xfrm>
+            <a:off x="2240280" y="2359152"/>
+            <a:ext cx="365760" cy="320040"/>
+          </a:xfrm>
+          <a:prstGeom prst="rect">
+            <a:avLst/>
+          </a:prstGeom>
+          <a:noFill/>
+          <a:ln/>
+        </p:spPr>
+        <p:txBody>
+          <a:bodyPr wrap="square" rtlCol="0" anchor="ctr"/>
+          <a:lstStyle/>
+          <a:p>
+            <a:pPr marL="0" indent="0" algn="ctr">
+              <a:buNone/>
+            </a:pPr>
+            <a:r>
+              <a:rPr lang="en-US" sz="1200" b="1" dirty="0">
+                <a:solidFill>
+                  <a:srgbClr val="FFFFFF"/>
+                </a:solidFill>
+                <a:latin typeface="Calibri" pitchFamily="34" charset="0"/>
+                <a:ea typeface="Calibri" pitchFamily="34" charset="-122"/>
+                <a:cs typeface="Calibri" pitchFamily="34" charset="-120"/>
+              </a:rPr>
+              <a:t>▼</a:t>
+            </a:r>
+            <a:endParaRPr lang="en-US" sz="1200" dirty="0"/>
+          </a:p>
+        </p:txBody>
+      </p:sp>
+      <p:sp>
+        <p:nvSpPr>
+          <p:cNvPr id="11" name="Shape 8"/>
+          <p:cNvSpPr/>
+          <p:nvPr/>
+        </p:nvSpPr>
+        <p:spPr>
+          <a:xfrm>
+            <a:off x="548640" y="2743200"/>
+            <a:ext cx="3749040" cy="960120"/>
           </a:xfrm>
           <a:prstGeom prst="roundRect">
             <a:avLst>
-              <a:gd name="adj" fmla="val 2243"/>
+              <a:gd name="adj" fmla="val 9524"/>
             </a:avLst>
           </a:prstGeom>
           <a:solidFill>
+            <a:srgbClr val="5FCFB0"/>
+          </a:solidFill>
+          <a:ln/>
+        </p:spPr>
+        <p:txBody>
+          <a:bodyPr/>
+          <a:lstStyle/>
+          <a:p>
+            <a:endParaRPr lang="en-IN"/>
+          </a:p>
+        </p:txBody>
+      </p:sp>
+      <p:sp>
+        <p:nvSpPr>
+          <p:cNvPr id="12" name="Shape 9"/>
+          <p:cNvSpPr/>
+          <p:nvPr/>
+        </p:nvSpPr>
+        <p:spPr>
+          <a:xfrm>
+            <a:off x="749808" y="2903220"/>
+            <a:ext cx="640080" cy="640080"/>
+          </a:xfrm>
+          <a:prstGeom prst="ellipse">
+            <a:avLst/>
+          </a:prstGeom>
+          <a:solidFill>
             <a:srgbClr val="FFFFFF"/>
           </a:solidFill>
-          <a:ln w="12700">
-            <a:solidFill>
-              <a:srgbClr val="E9E4F2"/>
-            </a:solidFill>
-            <a:prstDash val="solid"/>
-          </a:ln>
-        </p:spPr>
-      </p:sp>
-      <p:sp>
-        <p:nvSpPr>
-          <p:cNvPr id="24" name="Text 19"/>
-          <p:cNvSpPr/>
-          <p:nvPr/>
-        </p:nvSpPr>
-        <p:spPr>
-          <a:xfrm>
-            <a:off x="4983480" y="1572768"/>
-            <a:ext cx="4572000" cy="411480"/>
-          </a:xfrm>
-          <a:prstGeom prst="rect">
-            <a:avLst/>
-          </a:prstGeom>
-          <a:noFill/>
-          <a:ln/>
-        </p:spPr>
-        <p:txBody>
-          <a:bodyPr wrap="square" rtlCol="0" anchor="ctr"/>
-          <a:lstStyle/>
-          <a:p>
-            <a:pPr indent="0" marL="0">
-              <a:buNone/>
-            </a:pPr>
-            <a:r>
-              <a:rPr lang="en-US" sz="1600" b="1" dirty="0">
-                <a:solidFill>
-                  <a:srgbClr val="2D2150"/>
-                </a:solidFill>
-                <a:latin typeface="Cambria" pitchFamily="34" charset="0"/>
-                <a:ea typeface="Cambria" pitchFamily="34" charset="-122"/>
-                <a:cs typeface="Cambria" pitchFamily="34" charset="-120"/>
-              </a:rPr>
-              <a:t>AI Generates</a:t>
-            </a:r>
-            <a:endParaRPr lang="en-US" sz="1600" dirty="0"/>
-          </a:p>
-        </p:txBody>
-      </p:sp>
-      <p:sp>
-        <p:nvSpPr>
-          <p:cNvPr id="25" name="Shape 20"/>
-          <p:cNvSpPr/>
-          <p:nvPr/>
-        </p:nvSpPr>
-        <p:spPr>
-          <a:xfrm>
-            <a:off x="4983480" y="2148840"/>
-            <a:ext cx="3246120" cy="868680"/>
-          </a:xfrm>
-          <a:prstGeom prst="roundRect">
-            <a:avLst>
-              <a:gd name="adj" fmla="val 9474"/>
-            </a:avLst>
-          </a:prstGeom>
-          <a:solidFill>
-            <a:srgbClr val="FAF8FD"/>
-          </a:solidFill>
-          <a:ln w="12700">
-            <a:solidFill>
-              <a:srgbClr val="E9E4F2"/>
-            </a:solidFill>
-            <a:prstDash val="solid"/>
-          </a:ln>
-        </p:spPr>
-      </p:sp>
-      <p:sp>
-        <p:nvSpPr>
-          <p:cNvPr id="26" name="Shape 21"/>
-          <p:cNvSpPr/>
-          <p:nvPr/>
-        </p:nvSpPr>
-        <p:spPr>
-          <a:xfrm>
-            <a:off x="5120640" y="2327148"/>
-            <a:ext cx="512064" cy="512064"/>
-          </a:xfrm>
-          <a:prstGeom prst="ellipse">
-            <a:avLst/>
-          </a:prstGeom>
-          <a:solidFill>
-            <a:srgbClr val="F7E6E0"/>
-          </a:solidFill>
-          <a:ln/>
-        </p:spPr>
+          <a:ln/>
+        </p:spPr>
+        <p:txBody>
+          <a:bodyPr/>
+          <a:lstStyle/>
+          <a:p>
+            <a:endParaRPr lang="en-IN"/>
+          </a:p>
+        </p:txBody>
       </p:sp>
       <p:pic>
         <p:nvPicPr>
-          <p:cNvPr id="27" name="Image 3" descr="/home/claude/studygenie/icons/calendar_blush.png">    </p:cNvPr>
+          <p:cNvPr id="13" name="Image 1" descr="/home/claude/studygenie/icons/robot_white.png"/>
           <p:cNvPicPr>
             <a:picLocks noChangeAspect="1"/>
           </p:cNvPicPr>
@@ -5446,8 +5288,8 @@
         </p:blipFill>
         <p:spPr>
           <a:xfrm>
-            <a:off x="5230368" y="2436876"/>
-            <a:ext cx="292608" cy="292608"/>
+            <a:off x="886968" y="3040380"/>
+            <a:ext cx="365760" cy="365760"/>
           </a:xfrm>
           <a:prstGeom prst="rect">
             <a:avLst/>
@@ -5456,14 +5298,14 @@
       </p:pic>
       <p:sp>
         <p:nvSpPr>
-          <p:cNvPr id="28" name="Text 22"/>
-          <p:cNvSpPr/>
-          <p:nvPr/>
-        </p:nvSpPr>
-        <p:spPr>
-          <a:xfrm>
-            <a:off x="5715000" y="2148840"/>
-            <a:ext cx="2377440" cy="868680"/>
+          <p:cNvPr id="14" name="Text 10"/>
+          <p:cNvSpPr/>
+          <p:nvPr/>
+        </p:nvSpPr>
+        <p:spPr>
+          <a:xfrm>
+            <a:off x="1508760" y="2852928"/>
+            <a:ext cx="2606040" cy="365760"/>
           </a:xfrm>
           <a:prstGeom prst="rect">
             <a:avLst/>
@@ -5475,74 +5317,202 @@
           <a:bodyPr wrap="square" rtlCol="0" anchor="ctr"/>
           <a:lstStyle/>
           <a:p>
-            <a:pPr indent="0" marL="0">
+            <a:pPr marL="0" indent="0">
               <a:buNone/>
             </a:pPr>
             <a:r>
-              <a:rPr lang="en-US" sz="1250" b="1" dirty="0">
-                <a:solidFill>
-                  <a:srgbClr val="2B2340"/>
+              <a:rPr lang="en-US" b="1" dirty="0">
+                <a:solidFill>
+                  <a:srgbClr val="FFFFFF"/>
                 </a:solidFill>
                 <a:latin typeface="Calibri" pitchFamily="34" charset="0"/>
                 <a:ea typeface="Calibri" pitchFamily="34" charset="-122"/>
                 <a:cs typeface="Calibri" pitchFamily="34" charset="-120"/>
               </a:rPr>
-              <a:t>Study Plan</a:t>
-            </a:r>
-            <a:endParaRPr lang="en-US" sz="1250" dirty="0"/>
-          </a:p>
-        </p:txBody>
-      </p:sp>
-      <p:sp>
-        <p:nvSpPr>
-          <p:cNvPr id="29" name="Shape 23"/>
-          <p:cNvSpPr/>
-          <p:nvPr/>
-        </p:nvSpPr>
-        <p:spPr>
-          <a:xfrm>
-            <a:off x="8458200" y="2148840"/>
-            <a:ext cx="3246120" cy="868680"/>
+              <a:t>Generative AI Model</a:t>
+            </a:r>
+            <a:endParaRPr lang="en-US" dirty="0"/>
+          </a:p>
+        </p:txBody>
+      </p:sp>
+      <p:sp>
+        <p:nvSpPr>
+          <p:cNvPr id="15" name="Text 11"/>
+          <p:cNvSpPr/>
+          <p:nvPr/>
+        </p:nvSpPr>
+        <p:spPr>
+          <a:xfrm>
+            <a:off x="1508760" y="3200400"/>
+            <a:ext cx="2606040" cy="411480"/>
+          </a:xfrm>
+          <a:prstGeom prst="rect">
+            <a:avLst/>
+          </a:prstGeom>
+          <a:noFill/>
+          <a:ln/>
+        </p:spPr>
+        <p:txBody>
+          <a:bodyPr wrap="square" rtlCol="0" anchor="ctr"/>
+          <a:lstStyle/>
+          <a:p>
+            <a:pPr marL="0" indent="0">
+              <a:lnSpc>
+                <a:spcPct val="110000"/>
+              </a:lnSpc>
+              <a:buNone/>
+            </a:pPr>
+            <a:r>
+              <a:rPr lang="en-US" sz="1400" dirty="0">
+                <a:solidFill>
+                  <a:srgbClr val="E4DBF5"/>
+                </a:solidFill>
+                <a:latin typeface="Calibri" pitchFamily="34" charset="0"/>
+                <a:ea typeface="Calibri" pitchFamily="34" charset="-122"/>
+                <a:cs typeface="Calibri" pitchFamily="34" charset="-120"/>
+              </a:rPr>
+              <a:t>Processed by the AI engine (gpt-4.1-nano</a:t>
+            </a:r>
+            <a:r>
+              <a:rPr lang="en-US" sz="1000" dirty="0">
+                <a:solidFill>
+                  <a:srgbClr val="E4DBF5"/>
+                </a:solidFill>
+                <a:latin typeface="Calibri" pitchFamily="34" charset="0"/>
+                <a:ea typeface="Calibri" pitchFamily="34" charset="-122"/>
+                <a:cs typeface="Calibri" pitchFamily="34" charset="-120"/>
+              </a:rPr>
+              <a:t>).</a:t>
+            </a:r>
+            <a:endParaRPr lang="en-US" sz="1000" dirty="0"/>
+          </a:p>
+        </p:txBody>
+      </p:sp>
+      <p:sp>
+        <p:nvSpPr>
+          <p:cNvPr id="16" name="Shape 12"/>
+          <p:cNvSpPr/>
+          <p:nvPr/>
+        </p:nvSpPr>
+        <p:spPr>
+          <a:xfrm>
+            <a:off x="2276856" y="3703320"/>
+            <a:ext cx="292608" cy="292608"/>
+          </a:xfrm>
+          <a:prstGeom prst="ellipse">
+            <a:avLst/>
+          </a:prstGeom>
+          <a:solidFill>
+            <a:srgbClr val="F2957D"/>
+          </a:solidFill>
+          <a:ln/>
+        </p:spPr>
+        <p:txBody>
+          <a:bodyPr/>
+          <a:lstStyle/>
+          <a:p>
+            <a:endParaRPr lang="en-IN"/>
+          </a:p>
+        </p:txBody>
+      </p:sp>
+      <p:sp>
+        <p:nvSpPr>
+          <p:cNvPr id="17" name="Text 13"/>
+          <p:cNvSpPr/>
+          <p:nvPr/>
+        </p:nvSpPr>
+        <p:spPr>
+          <a:xfrm>
+            <a:off x="2240280" y="3685032"/>
+            <a:ext cx="365760" cy="320040"/>
+          </a:xfrm>
+          <a:prstGeom prst="rect">
+            <a:avLst/>
+          </a:prstGeom>
+          <a:noFill/>
+          <a:ln/>
+        </p:spPr>
+        <p:txBody>
+          <a:bodyPr wrap="square" rtlCol="0" anchor="ctr"/>
+          <a:lstStyle/>
+          <a:p>
+            <a:pPr marL="0" indent="0" algn="ctr">
+              <a:buNone/>
+            </a:pPr>
+            <a:r>
+              <a:rPr lang="en-US" sz="1200" b="1" dirty="0">
+                <a:solidFill>
+                  <a:srgbClr val="FFFFFF"/>
+                </a:solidFill>
+                <a:latin typeface="Calibri" pitchFamily="34" charset="0"/>
+                <a:ea typeface="Calibri" pitchFamily="34" charset="-122"/>
+                <a:cs typeface="Calibri" pitchFamily="34" charset="-120"/>
+              </a:rPr>
+              <a:t>▼</a:t>
+            </a:r>
+            <a:endParaRPr lang="en-US" sz="1200" dirty="0"/>
+          </a:p>
+        </p:txBody>
+      </p:sp>
+      <p:sp>
+        <p:nvSpPr>
+          <p:cNvPr id="18" name="Shape 14"/>
+          <p:cNvSpPr/>
+          <p:nvPr/>
+        </p:nvSpPr>
+        <p:spPr>
+          <a:xfrm>
+            <a:off x="548640" y="4069080"/>
+            <a:ext cx="3749040" cy="960120"/>
           </a:xfrm>
           <a:prstGeom prst="roundRect">
             <a:avLst>
-              <a:gd name="adj" fmla="val 9474"/>
+              <a:gd name="adj" fmla="val 9524"/>
             </a:avLst>
           </a:prstGeom>
           <a:solidFill>
-            <a:srgbClr val="FAF8FD"/>
-          </a:solidFill>
-          <a:ln w="12700">
-            <a:solidFill>
-              <a:srgbClr val="E9E4F2"/>
-            </a:solidFill>
-            <a:prstDash val="solid"/>
-          </a:ln>
-        </p:spPr>
-      </p:sp>
-      <p:sp>
-        <p:nvSpPr>
-          <p:cNvPr id="30" name="Shape 24"/>
-          <p:cNvSpPr/>
-          <p:nvPr/>
-        </p:nvSpPr>
-        <p:spPr>
-          <a:xfrm>
-            <a:off x="8595360" y="2327148"/>
-            <a:ext cx="512064" cy="512064"/>
+            <a:srgbClr val="2D2150"/>
+          </a:solidFill>
+          <a:ln/>
+        </p:spPr>
+        <p:txBody>
+          <a:bodyPr/>
+          <a:lstStyle/>
+          <a:p>
+            <a:endParaRPr lang="en-IN"/>
+          </a:p>
+        </p:txBody>
+      </p:sp>
+      <p:sp>
+        <p:nvSpPr>
+          <p:cNvPr id="19" name="Shape 15"/>
+          <p:cNvSpPr/>
+          <p:nvPr/>
+        </p:nvSpPr>
+        <p:spPr>
+          <a:xfrm>
+            <a:off x="749808" y="4229100"/>
+            <a:ext cx="640080" cy="640080"/>
           </a:xfrm>
           <a:prstGeom prst="ellipse">
             <a:avLst/>
           </a:prstGeom>
           <a:solidFill>
-            <a:srgbClr val="F7E6E0"/>
-          </a:solidFill>
-          <a:ln/>
-        </p:spPr>
+            <a:srgbClr val="FFFFFF"/>
+          </a:solidFill>
+          <a:ln/>
+        </p:spPr>
+        <p:txBody>
+          <a:bodyPr/>
+          <a:lstStyle/>
+          <a:p>
+            <a:endParaRPr lang="en-IN"/>
+          </a:p>
+        </p:txBody>
       </p:sp>
       <p:pic>
         <p:nvPicPr>
-          <p:cNvPr id="31" name="Image 4" descr="/home/claude/studygenie/icons/lightbulb_blush.png">    </p:cNvPr>
+          <p:cNvPr id="20" name="Image 2" descr="/home/claude/studygenie/icons/slidersh_white.png"/>
           <p:cNvPicPr>
             <a:picLocks noChangeAspect="1"/>
           </p:cNvPicPr>
@@ -5556,8 +5526,8 @@
         </p:blipFill>
         <p:spPr>
           <a:xfrm>
-            <a:off x="8705088" y="2436876"/>
-            <a:ext cx="292608" cy="292608"/>
+            <a:off x="886968" y="4366260"/>
+            <a:ext cx="365760" cy="365760"/>
           </a:xfrm>
           <a:prstGeom prst="rect">
             <a:avLst/>
@@ -5566,14 +5536,14 @@
       </p:pic>
       <p:sp>
         <p:nvSpPr>
-          <p:cNvPr id="32" name="Text 25"/>
-          <p:cNvSpPr/>
-          <p:nvPr/>
-        </p:nvSpPr>
-        <p:spPr>
-          <a:xfrm>
-            <a:off x="9189720" y="2148840"/>
-            <a:ext cx="2377440" cy="868680"/>
+          <p:cNvPr id="21" name="Text 16"/>
+          <p:cNvSpPr/>
+          <p:nvPr/>
+        </p:nvSpPr>
+        <p:spPr>
+          <a:xfrm>
+            <a:off x="1508760" y="4178808"/>
+            <a:ext cx="2606040" cy="365760"/>
           </a:xfrm>
           <a:prstGeom prst="rect">
             <a:avLst/>
@@ -5585,42 +5555,84 @@
           <a:bodyPr wrap="square" rtlCol="0" anchor="ctr"/>
           <a:lstStyle/>
           <a:p>
-            <a:pPr indent="0" marL="0">
+            <a:pPr marL="0" indent="0">
               <a:buNone/>
             </a:pPr>
             <a:r>
-              <a:rPr lang="en-US" sz="1250" b="1" dirty="0">
-                <a:solidFill>
-                  <a:srgbClr val="2B2340"/>
+              <a:rPr lang="en-US" b="1" dirty="0">
+                <a:solidFill>
+                  <a:srgbClr val="FFFFFF"/>
                 </a:solidFill>
                 <a:latin typeface="Calibri" pitchFamily="34" charset="0"/>
                 <a:ea typeface="Calibri" pitchFamily="34" charset="-122"/>
                 <a:cs typeface="Calibri" pitchFamily="34" charset="-120"/>
               </a:rPr>
-              <a:t>Topic Explanation</a:t>
-            </a:r>
-            <a:endParaRPr lang="en-US" sz="1250" dirty="0"/>
-          </a:p>
-        </p:txBody>
-      </p:sp>
-      <p:sp>
-        <p:nvSpPr>
-          <p:cNvPr id="33" name="Shape 26"/>
-          <p:cNvSpPr/>
-          <p:nvPr/>
-        </p:nvSpPr>
-        <p:spPr>
-          <a:xfrm>
-            <a:off x="4983480" y="3200400"/>
-            <a:ext cx="3246120" cy="868680"/>
+              <a:t>Display through Gradio</a:t>
+            </a:r>
+            <a:endParaRPr lang="en-US" dirty="0"/>
+          </a:p>
+        </p:txBody>
+      </p:sp>
+      <p:sp>
+        <p:nvSpPr>
+          <p:cNvPr id="22" name="Text 17"/>
+          <p:cNvSpPr/>
+          <p:nvPr/>
+        </p:nvSpPr>
+        <p:spPr>
+          <a:xfrm>
+            <a:off x="1508760" y="4526280"/>
+            <a:ext cx="2606040" cy="411480"/>
+          </a:xfrm>
+          <a:prstGeom prst="rect">
+            <a:avLst/>
+          </a:prstGeom>
+          <a:noFill/>
+          <a:ln/>
+        </p:spPr>
+        <p:txBody>
+          <a:bodyPr wrap="square" rtlCol="0" anchor="ctr"/>
+          <a:lstStyle/>
+          <a:p>
+            <a:pPr marL="0" indent="0">
+              <a:lnSpc>
+                <a:spcPct val="110000"/>
+              </a:lnSpc>
+              <a:buNone/>
+            </a:pPr>
+            <a:r>
+              <a:rPr lang="en-US" sz="1400" dirty="0">
+                <a:solidFill>
+                  <a:srgbClr val="E4DBF5"/>
+                </a:solidFill>
+                <a:latin typeface="Calibri" pitchFamily="34" charset="0"/>
+                <a:ea typeface="Calibri" pitchFamily="34" charset="-122"/>
+                <a:cs typeface="Calibri" pitchFamily="34" charset="-120"/>
+              </a:rPr>
+              <a:t>Results are shown to the student via the Gradio interface.</a:t>
+            </a:r>
+            <a:endParaRPr lang="en-US" sz="1400" dirty="0"/>
+          </a:p>
+        </p:txBody>
+      </p:sp>
+      <p:sp>
+        <p:nvSpPr>
+          <p:cNvPr id="23" name="Shape 18"/>
+          <p:cNvSpPr/>
+          <p:nvPr/>
+        </p:nvSpPr>
+        <p:spPr>
+          <a:xfrm>
+            <a:off x="4709160" y="1417320"/>
+            <a:ext cx="7234024" cy="4892040"/>
           </a:xfrm>
           <a:prstGeom prst="roundRect">
             <a:avLst>
-              <a:gd name="adj" fmla="val 9474"/>
+              <a:gd name="adj" fmla="val 2243"/>
             </a:avLst>
           </a:prstGeom>
           <a:solidFill>
-            <a:srgbClr val="FAF8FD"/>
+            <a:srgbClr val="FFFFFF"/>
           </a:solidFill>
           <a:ln w="12700">
             <a:solidFill>
@@ -5629,16 +5641,96 @@
             <a:prstDash val="solid"/>
           </a:ln>
         </p:spPr>
-      </p:sp>
-      <p:sp>
-        <p:nvSpPr>
-          <p:cNvPr id="34" name="Shape 27"/>
-          <p:cNvSpPr/>
-          <p:nvPr/>
-        </p:nvSpPr>
-        <p:spPr>
-          <a:xfrm>
-            <a:off x="5120640" y="3378708"/>
+        <p:txBody>
+          <a:bodyPr/>
+          <a:lstStyle/>
+          <a:p>
+            <a:endParaRPr lang="en-IN" dirty="0"/>
+          </a:p>
+        </p:txBody>
+      </p:sp>
+      <p:sp>
+        <p:nvSpPr>
+          <p:cNvPr id="24" name="Text 19"/>
+          <p:cNvSpPr/>
+          <p:nvPr/>
+        </p:nvSpPr>
+        <p:spPr>
+          <a:xfrm>
+            <a:off x="4983480" y="1572768"/>
+            <a:ext cx="4572000" cy="411480"/>
+          </a:xfrm>
+          <a:prstGeom prst="rect">
+            <a:avLst/>
+          </a:prstGeom>
+          <a:noFill/>
+          <a:ln/>
+        </p:spPr>
+        <p:txBody>
+          <a:bodyPr wrap="square" rtlCol="0" anchor="ctr"/>
+          <a:lstStyle/>
+          <a:p>
+            <a:pPr marL="0" indent="0">
+              <a:buNone/>
+            </a:pPr>
+            <a:r>
+              <a:rPr lang="en-US" sz="2000" b="1" dirty="0">
+                <a:solidFill>
+                  <a:srgbClr val="2D2150"/>
+                </a:solidFill>
+                <a:latin typeface="Cambria" pitchFamily="34" charset="0"/>
+                <a:ea typeface="Cambria" pitchFamily="34" charset="-122"/>
+                <a:cs typeface="Cambria" pitchFamily="34" charset="-120"/>
+              </a:rPr>
+              <a:t>AI Generates</a:t>
+            </a:r>
+            <a:endParaRPr lang="en-US" sz="2000" dirty="0"/>
+          </a:p>
+        </p:txBody>
+      </p:sp>
+      <p:sp>
+        <p:nvSpPr>
+          <p:cNvPr id="25" name="Shape 20"/>
+          <p:cNvSpPr/>
+          <p:nvPr/>
+        </p:nvSpPr>
+        <p:spPr>
+          <a:xfrm>
+            <a:off x="4983480" y="2148840"/>
+            <a:ext cx="3246120" cy="868680"/>
+          </a:xfrm>
+          <a:prstGeom prst="roundRect">
+            <a:avLst>
+              <a:gd name="adj" fmla="val 9474"/>
+            </a:avLst>
+          </a:prstGeom>
+          <a:solidFill>
+            <a:srgbClr val="FAF8FD"/>
+          </a:solidFill>
+          <a:ln w="12700">
+            <a:solidFill>
+              <a:srgbClr val="E9E4F2"/>
+            </a:solidFill>
+            <a:prstDash val="solid"/>
+          </a:ln>
+        </p:spPr>
+        <p:txBody>
+          <a:bodyPr/>
+          <a:lstStyle/>
+          <a:p>
+            <a:endParaRPr lang="en-IN" sz="2000"/>
+          </a:p>
+        </p:txBody>
+      </p:sp>
+      <p:sp>
+        <p:nvSpPr>
+          <p:cNvPr id="26" name="Shape 21"/>
+          <p:cNvSpPr/>
+          <p:nvPr/>
+        </p:nvSpPr>
+        <p:spPr>
+          <a:xfrm>
+            <a:off x="5120640" y="2327148"/>
             <a:ext cx="512064" cy="512064"/>
           </a:xfrm>
           <a:prstGeom prst="ellipse">
@@ -5649,10 +5741,17 @@
           </a:solidFill>
           <a:ln/>
         </p:spPr>
+        <p:txBody>
+          <a:bodyPr/>
+          <a:lstStyle/>
+          <a:p>
+            <a:endParaRPr lang="en-IN" sz="2000"/>
+          </a:p>
+        </p:txBody>
       </p:sp>
       <p:pic>
         <p:nvPicPr>
-          <p:cNvPr id="35" name="Image 5" descr="/home/claude/studygenie/icons/book_blush.png">    </p:cNvPr>
+          <p:cNvPr id="27" name="Image 3" descr="/home/claude/studygenie/icons/calendar_blush.png"/>
           <p:cNvPicPr>
             <a:picLocks noChangeAspect="1"/>
           </p:cNvPicPr>
@@ -5666,7 +5765,7 @@
         </p:blipFill>
         <p:spPr>
           <a:xfrm>
-            <a:off x="5230368" y="3488436"/>
+            <a:off x="5230368" y="2436876"/>
             <a:ext cx="292608" cy="292608"/>
           </a:xfrm>
           <a:prstGeom prst="rect">
@@ -5676,13 +5775,13 @@
       </p:pic>
       <p:sp>
         <p:nvSpPr>
-          <p:cNvPr id="36" name="Text 28"/>
-          <p:cNvSpPr/>
-          <p:nvPr/>
-        </p:nvSpPr>
-        <p:spPr>
-          <a:xfrm>
-            <a:off x="5715000" y="3200400"/>
+          <p:cNvPr id="28" name="Text 22"/>
+          <p:cNvSpPr/>
+          <p:nvPr/>
+        </p:nvSpPr>
+        <p:spPr>
+          <a:xfrm>
+            <a:off x="5715000" y="2148840"/>
             <a:ext cx="2377440" cy="868680"/>
           </a:xfrm>
           <a:prstGeom prst="rect">
@@ -5695,11 +5794,11 @@
           <a:bodyPr wrap="square" rtlCol="0" anchor="ctr"/>
           <a:lstStyle/>
           <a:p>
-            <a:pPr indent="0" marL="0">
+            <a:pPr marL="0" indent="0">
               <a:buNone/>
             </a:pPr>
             <a:r>
-              <a:rPr lang="en-US" sz="1250" b="1" dirty="0">
+              <a:rPr lang="en-US" sz="2000" b="1" dirty="0">
                 <a:solidFill>
                   <a:srgbClr val="2B2340"/>
                 </a:solidFill>
@@ -5707,21 +5806,21 @@
                 <a:ea typeface="Calibri" pitchFamily="34" charset="-122"/>
                 <a:cs typeface="Calibri" pitchFamily="34" charset="-120"/>
               </a:rPr>
-              <a:t>Revision Notes</a:t>
-            </a:r>
-            <a:endParaRPr lang="en-US" sz="1250" dirty="0"/>
-          </a:p>
-        </p:txBody>
-      </p:sp>
-      <p:sp>
-        <p:nvSpPr>
-          <p:cNvPr id="37" name="Shape 29"/>
-          <p:cNvSpPr/>
-          <p:nvPr/>
-        </p:nvSpPr>
-        <p:spPr>
-          <a:xfrm>
-            <a:off x="8458200" y="3200400"/>
+              <a:t>Study Plan</a:t>
+            </a:r>
+            <a:endParaRPr lang="en-US" sz="2000" dirty="0"/>
+          </a:p>
+        </p:txBody>
+      </p:sp>
+      <p:sp>
+        <p:nvSpPr>
+          <p:cNvPr id="29" name="Shape 23"/>
+          <p:cNvSpPr/>
+          <p:nvPr/>
+        </p:nvSpPr>
+        <p:spPr>
+          <a:xfrm>
+            <a:off x="8458200" y="2148840"/>
             <a:ext cx="3246120" cy="868680"/>
           </a:xfrm>
           <a:prstGeom prst="roundRect">
@@ -5739,16 +5838,23 @@
             <a:prstDash val="solid"/>
           </a:ln>
         </p:spPr>
-      </p:sp>
-      <p:sp>
-        <p:nvSpPr>
-          <p:cNvPr id="38" name="Shape 30"/>
-          <p:cNvSpPr/>
-          <p:nvPr/>
-        </p:nvSpPr>
-        <p:spPr>
-          <a:xfrm>
-            <a:off x="8595360" y="3378708"/>
+        <p:txBody>
+          <a:bodyPr/>
+          <a:lstStyle/>
+          <a:p>
+            <a:endParaRPr lang="en-IN"/>
+          </a:p>
+        </p:txBody>
+      </p:sp>
+      <p:sp>
+        <p:nvSpPr>
+          <p:cNvPr id="30" name="Shape 24"/>
+          <p:cNvSpPr/>
+          <p:nvPr/>
+        </p:nvSpPr>
+        <p:spPr>
+          <a:xfrm>
+            <a:off x="8595360" y="2327148"/>
             <a:ext cx="512064" cy="512064"/>
           </a:xfrm>
           <a:prstGeom prst="ellipse">
@@ -5759,10 +5865,17 @@
           </a:solidFill>
           <a:ln/>
         </p:spPr>
+        <p:txBody>
+          <a:bodyPr/>
+          <a:lstStyle/>
+          <a:p>
+            <a:endParaRPr lang="en-IN" sz="2000"/>
+          </a:p>
+        </p:txBody>
       </p:sp>
       <p:pic>
         <p:nvPicPr>
-          <p:cNvPr id="39" name="Image 6" descr="/home/claude/studygenie/icons/clipboardcheck_blush.png">    </p:cNvPr>
+          <p:cNvPr id="31" name="Image 4" descr="/home/claude/studygenie/icons/lightbulb_blush.png"/>
           <p:cNvPicPr>
             <a:picLocks noChangeAspect="1"/>
           </p:cNvPicPr>
@@ -5776,7 +5889,7 @@
         </p:blipFill>
         <p:spPr>
           <a:xfrm>
-            <a:off x="8705088" y="3488436"/>
+            <a:off x="8705088" y="2436876"/>
             <a:ext cx="292608" cy="292608"/>
           </a:xfrm>
           <a:prstGeom prst="rect">
@@ -5786,13 +5899,13 @@
       </p:pic>
       <p:sp>
         <p:nvSpPr>
-          <p:cNvPr id="40" name="Text 31"/>
-          <p:cNvSpPr/>
-          <p:nvPr/>
-        </p:nvSpPr>
-        <p:spPr>
-          <a:xfrm>
-            <a:off x="9189720" y="3200400"/>
+          <p:cNvPr id="32" name="Text 25"/>
+          <p:cNvSpPr/>
+          <p:nvPr/>
+        </p:nvSpPr>
+        <p:spPr>
+          <a:xfrm>
+            <a:off x="9189720" y="2148840"/>
             <a:ext cx="2377440" cy="868680"/>
           </a:xfrm>
           <a:prstGeom prst="rect">
@@ -5805,11 +5918,11 @@
           <a:bodyPr wrap="square" rtlCol="0" anchor="ctr"/>
           <a:lstStyle/>
           <a:p>
-            <a:pPr indent="0" marL="0">
+            <a:pPr marL="0" indent="0">
               <a:buNone/>
             </a:pPr>
             <a:r>
-              <a:rPr lang="en-US" sz="1250" b="1" dirty="0">
+              <a:rPr lang="en-US" sz="2000" b="1" dirty="0">
                 <a:solidFill>
                   <a:srgbClr val="2B2340"/>
                 </a:solidFill>
@@ -5817,21 +5930,21 @@
                 <a:ea typeface="Calibri" pitchFamily="34" charset="-122"/>
                 <a:cs typeface="Calibri" pitchFamily="34" charset="-120"/>
               </a:rPr>
-              <a:t>Practice Quiz</a:t>
-            </a:r>
-            <a:endParaRPr lang="en-US" sz="1250" dirty="0"/>
-          </a:p>
-        </p:txBody>
-      </p:sp>
-      <p:sp>
-        <p:nvSpPr>
-          <p:cNvPr id="41" name="Shape 32"/>
-          <p:cNvSpPr/>
-          <p:nvPr/>
-        </p:nvSpPr>
-        <p:spPr>
-          <a:xfrm>
-            <a:off x="4983480" y="4251960"/>
+              <a:t>Topic Explanation</a:t>
+            </a:r>
+            <a:endParaRPr lang="en-US" sz="2000" dirty="0"/>
+          </a:p>
+        </p:txBody>
+      </p:sp>
+      <p:sp>
+        <p:nvSpPr>
+          <p:cNvPr id="33" name="Shape 26"/>
+          <p:cNvSpPr/>
+          <p:nvPr/>
+        </p:nvSpPr>
+        <p:spPr>
+          <a:xfrm>
+            <a:off x="4983480" y="3200400"/>
             <a:ext cx="3246120" cy="868680"/>
           </a:xfrm>
           <a:prstGeom prst="roundRect">
@@ -5849,16 +5962,23 @@
             <a:prstDash val="solid"/>
           </a:ln>
         </p:spPr>
-      </p:sp>
-      <p:sp>
-        <p:nvSpPr>
-          <p:cNvPr id="42" name="Shape 33"/>
-          <p:cNvSpPr/>
-          <p:nvPr/>
-        </p:nvSpPr>
-        <p:spPr>
-          <a:xfrm>
-            <a:off x="5120640" y="4430268"/>
+        <p:txBody>
+          <a:bodyPr/>
+          <a:lstStyle/>
+          <a:p>
+            <a:endParaRPr lang="en-IN" sz="2000"/>
+          </a:p>
+        </p:txBody>
+      </p:sp>
+      <p:sp>
+        <p:nvSpPr>
+          <p:cNvPr id="34" name="Shape 27"/>
+          <p:cNvSpPr/>
+          <p:nvPr/>
+        </p:nvSpPr>
+        <p:spPr>
+          <a:xfrm>
+            <a:off x="5120640" y="3378708"/>
             <a:ext cx="512064" cy="512064"/>
           </a:xfrm>
           <a:prstGeom prst="ellipse">
@@ -5869,10 +5989,17 @@
           </a:solidFill>
           <a:ln/>
         </p:spPr>
+        <p:txBody>
+          <a:bodyPr/>
+          <a:lstStyle/>
+          <a:p>
+            <a:endParaRPr lang="en-IN" sz="2000"/>
+          </a:p>
+        </p:txBody>
       </p:sp>
       <p:pic>
         <p:nvPicPr>
-          <p:cNvPr id="43" name="Image 7" descr="/home/claude/studygenie/icons/target_blush.png">    </p:cNvPr>
+          <p:cNvPr id="35" name="Image 5" descr="/home/claude/studygenie/icons/book_blush.png"/>
           <p:cNvPicPr>
             <a:picLocks noChangeAspect="1"/>
           </p:cNvPicPr>
@@ -5886,7 +6013,7 @@
         </p:blipFill>
         <p:spPr>
           <a:xfrm>
-            <a:off x="5230368" y="4539996"/>
+            <a:off x="5230368" y="3488436"/>
             <a:ext cx="292608" cy="292608"/>
           </a:xfrm>
           <a:prstGeom prst="rect">
@@ -5896,13 +6023,13 @@
       </p:pic>
       <p:sp>
         <p:nvSpPr>
-          <p:cNvPr id="44" name="Text 34"/>
-          <p:cNvSpPr/>
-          <p:nvPr/>
-        </p:nvSpPr>
-        <p:spPr>
-          <a:xfrm>
-            <a:off x="5715000" y="4251960"/>
+          <p:cNvPr id="36" name="Text 28"/>
+          <p:cNvSpPr/>
+          <p:nvPr/>
+        </p:nvSpPr>
+        <p:spPr>
+          <a:xfrm>
+            <a:off x="5715000" y="3200400"/>
             <a:ext cx="2377440" cy="868680"/>
           </a:xfrm>
           <a:prstGeom prst="rect">
@@ -5915,11 +6042,11 @@
           <a:bodyPr wrap="square" rtlCol="0" anchor="ctr"/>
           <a:lstStyle/>
           <a:p>
-            <a:pPr indent="0" marL="0">
+            <a:pPr marL="0" indent="0">
               <a:buNone/>
             </a:pPr>
             <a:r>
-              <a:rPr lang="en-US" sz="1250" b="1" dirty="0">
+              <a:rPr lang="en-US" sz="2000" b="1" dirty="0">
                 <a:solidFill>
                   <a:srgbClr val="2B2340"/>
                 </a:solidFill>
@@ -5927,21 +6054,21 @@
                 <a:ea typeface="Calibri" pitchFamily="34" charset="-122"/>
                 <a:cs typeface="Calibri" pitchFamily="34" charset="-120"/>
               </a:rPr>
-              <a:t>Exam Tips</a:t>
-            </a:r>
-            <a:endParaRPr lang="en-US" sz="1250" dirty="0"/>
-          </a:p>
-        </p:txBody>
-      </p:sp>
-      <p:sp>
-        <p:nvSpPr>
-          <p:cNvPr id="45" name="Shape 35"/>
-          <p:cNvSpPr/>
-          <p:nvPr/>
-        </p:nvSpPr>
-        <p:spPr>
-          <a:xfrm>
-            <a:off x="8458200" y="4251960"/>
+              <a:t>Revision Notes</a:t>
+            </a:r>
+            <a:endParaRPr lang="en-US" sz="2000" dirty="0"/>
+          </a:p>
+        </p:txBody>
+      </p:sp>
+      <p:sp>
+        <p:nvSpPr>
+          <p:cNvPr id="37" name="Shape 29"/>
+          <p:cNvSpPr/>
+          <p:nvPr/>
+        </p:nvSpPr>
+        <p:spPr>
+          <a:xfrm>
+            <a:off x="8458200" y="3200400"/>
             <a:ext cx="3246120" cy="868680"/>
           </a:xfrm>
           <a:prstGeom prst="roundRect">
@@ -5959,16 +6086,23 @@
             <a:prstDash val="solid"/>
           </a:ln>
         </p:spPr>
-      </p:sp>
-      <p:sp>
-        <p:nvSpPr>
-          <p:cNvPr id="46" name="Shape 36"/>
-          <p:cNvSpPr/>
-          <p:nvPr/>
-        </p:nvSpPr>
-        <p:spPr>
-          <a:xfrm>
-            <a:off x="8595360" y="4430268"/>
+        <p:txBody>
+          <a:bodyPr/>
+          <a:lstStyle/>
+          <a:p>
+            <a:endParaRPr lang="en-IN"/>
+          </a:p>
+        </p:txBody>
+      </p:sp>
+      <p:sp>
+        <p:nvSpPr>
+          <p:cNvPr id="38" name="Shape 30"/>
+          <p:cNvSpPr/>
+          <p:nvPr/>
+        </p:nvSpPr>
+        <p:spPr>
+          <a:xfrm>
+            <a:off x="8595360" y="3378708"/>
             <a:ext cx="512064" cy="512064"/>
           </a:xfrm>
           <a:prstGeom prst="ellipse">
@@ -5979,10 +6113,17 @@
           </a:solidFill>
           <a:ln/>
         </p:spPr>
+        <p:txBody>
+          <a:bodyPr/>
+          <a:lstStyle/>
+          <a:p>
+            <a:endParaRPr lang="en-IN" sz="2000"/>
+          </a:p>
+        </p:txBody>
       </p:sp>
       <p:pic>
         <p:nvPicPr>
-          <p:cNvPr id="47" name="Image 8" descr="/home/claude/studygenie/icons/question_blush.png">    </p:cNvPr>
+          <p:cNvPr id="39" name="Image 6" descr="/home/claude/studygenie/icons/clipboardcheck_blush.png"/>
           <p:cNvPicPr>
             <a:picLocks noChangeAspect="1"/>
           </p:cNvPicPr>
@@ -5996,7 +6137,7 @@
         </p:blipFill>
         <p:spPr>
           <a:xfrm>
-            <a:off x="8705088" y="4539996"/>
+            <a:off x="8705088" y="3488436"/>
             <a:ext cx="292608" cy="292608"/>
           </a:xfrm>
           <a:prstGeom prst="rect">
@@ -6006,13 +6147,13 @@
       </p:pic>
       <p:sp>
         <p:nvSpPr>
-          <p:cNvPr id="48" name="Text 37"/>
-          <p:cNvSpPr/>
-          <p:nvPr/>
-        </p:nvSpPr>
-        <p:spPr>
-          <a:xfrm>
-            <a:off x="9189720" y="4251960"/>
+          <p:cNvPr id="40" name="Text 31"/>
+          <p:cNvSpPr/>
+          <p:nvPr/>
+        </p:nvSpPr>
+        <p:spPr>
+          <a:xfrm>
+            <a:off x="9189720" y="3200400"/>
             <a:ext cx="2377440" cy="868680"/>
           </a:xfrm>
           <a:prstGeom prst="rect">
@@ -6025,11 +6166,11 @@
           <a:bodyPr wrap="square" rtlCol="0" anchor="ctr"/>
           <a:lstStyle/>
           <a:p>
-            <a:pPr indent="0" marL="0">
+            <a:pPr marL="0" indent="0">
               <a:buNone/>
             </a:pPr>
             <a:r>
-              <a:rPr lang="en-US" sz="1250" b="1" dirty="0">
+              <a:rPr lang="en-US" sz="2000" b="1" dirty="0">
                 <a:solidFill>
                   <a:srgbClr val="2B2340"/>
                 </a:solidFill>
@@ -6037,21 +6178,21 @@
                 <a:ea typeface="Calibri" pitchFamily="34" charset="-122"/>
                 <a:cs typeface="Calibri" pitchFamily="34" charset="-120"/>
               </a:rPr>
-              <a:t>Doubt Solutions</a:t>
-            </a:r>
-            <a:endParaRPr lang="en-US" sz="1250" dirty="0"/>
-          </a:p>
-        </p:txBody>
-      </p:sp>
-      <p:sp>
-        <p:nvSpPr>
-          <p:cNvPr id="49" name="Shape 38"/>
-          <p:cNvSpPr/>
-          <p:nvPr/>
-        </p:nvSpPr>
-        <p:spPr>
-          <a:xfrm>
-            <a:off x="4983480" y="5303520"/>
+              <a:t>Practice Quiz</a:t>
+            </a:r>
+            <a:endParaRPr lang="en-US" sz="2000" dirty="0"/>
+          </a:p>
+        </p:txBody>
+      </p:sp>
+      <p:sp>
+        <p:nvSpPr>
+          <p:cNvPr id="41" name="Shape 32"/>
+          <p:cNvSpPr/>
+          <p:nvPr/>
+        </p:nvSpPr>
+        <p:spPr>
+          <a:xfrm>
+            <a:off x="4983480" y="4251960"/>
             <a:ext cx="3246120" cy="868680"/>
           </a:xfrm>
           <a:prstGeom prst="roundRect">
@@ -6069,16 +6210,23 @@
             <a:prstDash val="solid"/>
           </a:ln>
         </p:spPr>
-      </p:sp>
-      <p:sp>
-        <p:nvSpPr>
-          <p:cNvPr id="50" name="Shape 39"/>
-          <p:cNvSpPr/>
-          <p:nvPr/>
-        </p:nvSpPr>
-        <p:spPr>
-          <a:xfrm>
-            <a:off x="5120640" y="5481828"/>
+        <p:txBody>
+          <a:bodyPr/>
+          <a:lstStyle/>
+          <a:p>
+            <a:endParaRPr lang="en-IN" sz="2000"/>
+          </a:p>
+        </p:txBody>
+      </p:sp>
+      <p:sp>
+        <p:nvSpPr>
+          <p:cNvPr id="42" name="Shape 33"/>
+          <p:cNvSpPr/>
+          <p:nvPr/>
+        </p:nvSpPr>
+        <p:spPr>
+          <a:xfrm>
+            <a:off x="5120640" y="4430268"/>
             <a:ext cx="512064" cy="512064"/>
           </a:xfrm>
           <a:prstGeom prst="ellipse">
@@ -6089,10 +6237,17 @@
           </a:solidFill>
           <a:ln/>
         </p:spPr>
+        <p:txBody>
+          <a:bodyPr/>
+          <a:lstStyle/>
+          <a:p>
+            <a:endParaRPr lang="en-IN" sz="2000"/>
+          </a:p>
+        </p:txBody>
       </p:sp>
       <p:pic>
         <p:nvPicPr>
-          <p:cNvPr id="51" name="Image 9" descr="/home/claude/studygenie/icons/key_blush.png">    </p:cNvPr>
+          <p:cNvPr id="43" name="Image 7" descr="/home/claude/studygenie/icons/target_blush.png"/>
           <p:cNvPicPr>
             <a:picLocks noChangeAspect="1"/>
           </p:cNvPicPr>
@@ -6106,7 +6261,7 @@
         </p:blipFill>
         <p:spPr>
           <a:xfrm>
-            <a:off x="5230368" y="5591556"/>
+            <a:off x="5230368" y="4539996"/>
             <a:ext cx="292608" cy="292608"/>
           </a:xfrm>
           <a:prstGeom prst="rect">
@@ -6116,13 +6271,13 @@
       </p:pic>
       <p:sp>
         <p:nvSpPr>
-          <p:cNvPr id="52" name="Text 40"/>
-          <p:cNvSpPr/>
-          <p:nvPr/>
-        </p:nvSpPr>
-        <p:spPr>
-          <a:xfrm>
-            <a:off x="5715000" y="5303520"/>
+          <p:cNvPr id="44" name="Text 34"/>
+          <p:cNvSpPr/>
+          <p:nvPr/>
+        </p:nvSpPr>
+        <p:spPr>
+          <a:xfrm>
+            <a:off x="5715000" y="4251960"/>
             <a:ext cx="2377440" cy="868680"/>
           </a:xfrm>
           <a:prstGeom prst="rect">
@@ -6135,11 +6290,11 @@
           <a:bodyPr wrap="square" rtlCol="0" anchor="ctr"/>
           <a:lstStyle/>
           <a:p>
-            <a:pPr indent="0" marL="0">
+            <a:pPr marL="0" indent="0">
               <a:buNone/>
             </a:pPr>
             <a:r>
-              <a:rPr lang="en-US" sz="1250" b="1" dirty="0">
+              <a:rPr lang="en-US" sz="2000" b="1" dirty="0">
                 <a:solidFill>
                   <a:srgbClr val="2B2340"/>
                 </a:solidFill>
@@ -6147,9 +6302,257 @@
                 <a:ea typeface="Calibri" pitchFamily="34" charset="-122"/>
                 <a:cs typeface="Calibri" pitchFamily="34" charset="-120"/>
               </a:rPr>
+              <a:t>Exam Tips</a:t>
+            </a:r>
+            <a:endParaRPr lang="en-US" sz="2000" dirty="0"/>
+          </a:p>
+        </p:txBody>
+      </p:sp>
+      <p:sp>
+        <p:nvSpPr>
+          <p:cNvPr id="45" name="Shape 35"/>
+          <p:cNvSpPr/>
+          <p:nvPr/>
+        </p:nvSpPr>
+        <p:spPr>
+          <a:xfrm>
+            <a:off x="8458200" y="4251960"/>
+            <a:ext cx="3246120" cy="868680"/>
+          </a:xfrm>
+          <a:prstGeom prst="roundRect">
+            <a:avLst>
+              <a:gd name="adj" fmla="val 9474"/>
+            </a:avLst>
+          </a:prstGeom>
+          <a:solidFill>
+            <a:srgbClr val="FAF8FD"/>
+          </a:solidFill>
+          <a:ln w="12700">
+            <a:solidFill>
+              <a:srgbClr val="E9E4F2"/>
+            </a:solidFill>
+            <a:prstDash val="solid"/>
+          </a:ln>
+        </p:spPr>
+        <p:txBody>
+          <a:bodyPr/>
+          <a:lstStyle/>
+          <a:p>
+            <a:endParaRPr lang="en-IN"/>
+          </a:p>
+        </p:txBody>
+      </p:sp>
+      <p:sp>
+        <p:nvSpPr>
+          <p:cNvPr id="46" name="Shape 36"/>
+          <p:cNvSpPr/>
+          <p:nvPr/>
+        </p:nvSpPr>
+        <p:spPr>
+          <a:xfrm>
+            <a:off x="8595360" y="4430268"/>
+            <a:ext cx="512064" cy="512064"/>
+          </a:xfrm>
+          <a:prstGeom prst="ellipse">
+            <a:avLst/>
+          </a:prstGeom>
+          <a:solidFill>
+            <a:srgbClr val="F7E6E0"/>
+          </a:solidFill>
+          <a:ln/>
+        </p:spPr>
+        <p:txBody>
+          <a:bodyPr/>
+          <a:lstStyle/>
+          <a:p>
+            <a:endParaRPr lang="en-IN" sz="2000"/>
+          </a:p>
+        </p:txBody>
+      </p:sp>
+      <p:pic>
+        <p:nvPicPr>
+          <p:cNvPr id="47" name="Image 8" descr="/home/claude/studygenie/icons/question_blush.png"/>
+          <p:cNvPicPr>
+            <a:picLocks noChangeAspect="1"/>
+          </p:cNvPicPr>
+          <p:nvPr/>
+        </p:nvPicPr>
+        <p:blipFill>
+          <a:blip r:embed="rId11"/>
+          <a:stretch>
+            <a:fillRect/>
+          </a:stretch>
+        </p:blipFill>
+        <p:spPr>
+          <a:xfrm>
+            <a:off x="8705088" y="4539996"/>
+            <a:ext cx="292608" cy="292608"/>
+          </a:xfrm>
+          <a:prstGeom prst="rect">
+            <a:avLst/>
+          </a:prstGeom>
+        </p:spPr>
+      </p:pic>
+      <p:sp>
+        <p:nvSpPr>
+          <p:cNvPr id="48" name="Text 37"/>
+          <p:cNvSpPr/>
+          <p:nvPr/>
+        </p:nvSpPr>
+        <p:spPr>
+          <a:xfrm>
+            <a:off x="9189720" y="4251960"/>
+            <a:ext cx="2377440" cy="868680"/>
+          </a:xfrm>
+          <a:prstGeom prst="rect">
+            <a:avLst/>
+          </a:prstGeom>
+          <a:noFill/>
+          <a:ln/>
+        </p:spPr>
+        <p:txBody>
+          <a:bodyPr wrap="square" rtlCol="0" anchor="ctr"/>
+          <a:lstStyle/>
+          <a:p>
+            <a:pPr marL="0" indent="0">
+              <a:buNone/>
+            </a:pPr>
+            <a:r>
+              <a:rPr lang="en-US" sz="2000" b="1" dirty="0">
+                <a:solidFill>
+                  <a:srgbClr val="2B2340"/>
+                </a:solidFill>
+                <a:latin typeface="Calibri" pitchFamily="34" charset="0"/>
+                <a:ea typeface="Calibri" pitchFamily="34" charset="-122"/>
+                <a:cs typeface="Calibri" pitchFamily="34" charset="-120"/>
+              </a:rPr>
+              <a:t>Doubt Solutions</a:t>
+            </a:r>
+            <a:endParaRPr lang="en-US" sz="2000" dirty="0"/>
+          </a:p>
+        </p:txBody>
+      </p:sp>
+      <p:sp>
+        <p:nvSpPr>
+          <p:cNvPr id="49" name="Shape 38"/>
+          <p:cNvSpPr/>
+          <p:nvPr/>
+        </p:nvSpPr>
+        <p:spPr>
+          <a:xfrm>
+            <a:off x="4983480" y="5303520"/>
+            <a:ext cx="3246120" cy="868680"/>
+          </a:xfrm>
+          <a:prstGeom prst="roundRect">
+            <a:avLst>
+              <a:gd name="adj" fmla="val 9474"/>
+            </a:avLst>
+          </a:prstGeom>
+          <a:solidFill>
+            <a:srgbClr val="FAF8FD"/>
+          </a:solidFill>
+          <a:ln w="12700">
+            <a:solidFill>
+              <a:srgbClr val="E9E4F2"/>
+            </a:solidFill>
+            <a:prstDash val="solid"/>
+          </a:ln>
+        </p:spPr>
+        <p:txBody>
+          <a:bodyPr/>
+          <a:lstStyle/>
+          <a:p>
+            <a:endParaRPr lang="en-IN"/>
+          </a:p>
+        </p:txBody>
+      </p:sp>
+      <p:sp>
+        <p:nvSpPr>
+          <p:cNvPr id="50" name="Shape 39"/>
+          <p:cNvSpPr/>
+          <p:nvPr/>
+        </p:nvSpPr>
+        <p:spPr>
+          <a:xfrm>
+            <a:off x="5120640" y="5481828"/>
+            <a:ext cx="512064" cy="512064"/>
+          </a:xfrm>
+          <a:prstGeom prst="ellipse">
+            <a:avLst/>
+          </a:prstGeom>
+          <a:solidFill>
+            <a:srgbClr val="F7E6E0"/>
+          </a:solidFill>
+          <a:ln/>
+        </p:spPr>
+        <p:txBody>
+          <a:bodyPr/>
+          <a:lstStyle/>
+          <a:p>
+            <a:endParaRPr lang="en-IN" sz="2000"/>
+          </a:p>
+        </p:txBody>
+      </p:sp>
+      <p:pic>
+        <p:nvPicPr>
+          <p:cNvPr id="51" name="Image 9" descr="/home/claude/studygenie/icons/key_blush.png"/>
+          <p:cNvPicPr>
+            <a:picLocks noChangeAspect="1"/>
+          </p:cNvPicPr>
+          <p:nvPr/>
+        </p:nvPicPr>
+        <p:blipFill>
+          <a:blip r:embed="rId12"/>
+          <a:stretch>
+            <a:fillRect/>
+          </a:stretch>
+        </p:blipFill>
+        <p:spPr>
+          <a:xfrm>
+            <a:off x="5230368" y="5591556"/>
+            <a:ext cx="292608" cy="292608"/>
+          </a:xfrm>
+          <a:prstGeom prst="rect">
+            <a:avLst/>
+          </a:prstGeom>
+        </p:spPr>
+      </p:pic>
+      <p:sp>
+        <p:nvSpPr>
+          <p:cNvPr id="52" name="Text 40"/>
+          <p:cNvSpPr/>
+          <p:nvPr/>
+        </p:nvSpPr>
+        <p:spPr>
+          <a:xfrm>
+            <a:off x="5715000" y="5303520"/>
+            <a:ext cx="2377440" cy="868680"/>
+          </a:xfrm>
+          <a:prstGeom prst="rect">
+            <a:avLst/>
+          </a:prstGeom>
+          <a:noFill/>
+          <a:ln/>
+        </p:spPr>
+        <p:txBody>
+          <a:bodyPr wrap="square" rtlCol="0" anchor="ctr"/>
+          <a:lstStyle/>
+          <a:p>
+            <a:pPr marL="0" indent="0">
+              <a:buNone/>
+            </a:pPr>
+            <a:r>
+              <a:rPr lang="en-US" sz="2000" b="1" dirty="0">
+                <a:solidFill>
+                  <a:srgbClr val="2B2340"/>
+                </a:solidFill>
+                <a:latin typeface="Calibri" pitchFamily="34" charset="0"/>
+                <a:ea typeface="Calibri" pitchFamily="34" charset="-122"/>
+                <a:cs typeface="Calibri" pitchFamily="34" charset="-120"/>
+              </a:rPr>
               <a:t>Answer Key</a:t>
             </a:r>
-            <a:endParaRPr lang="en-US" sz="1250" dirty="0"/>
+            <a:endParaRPr lang="en-US" sz="2000" dirty="0"/>
           </a:p>
         </p:txBody>
       </p:sp>
@@ -6158,6 +6561,18 @@
   <p:clrMapOvr>
     <a:masterClrMapping/>
   </p:clrMapOvr>
+  <mc:AlternateContent xmlns:mc="http://schemas.openxmlformats.org/markup-compatibility/2006" xmlns:p159="http://schemas.microsoft.com/office/powerpoint/2015/09/main">
+    <mc:Choice Requires="p159">
+      <p:transition xmlns:p14="http://schemas.microsoft.com/office/powerpoint/2010/main" spd="slow" p14:dur="2000">
+        <p159:morph option="byObject"/>
+      </p:transition>
+    </mc:Choice>
+    <mc:Fallback xmlns="">
+      <p:transition spd="slow">
+        <p:fade/>
+      </p:transition>
+    </mc:Fallback>
+  </mc:AlternateContent>
 </p:sld>
 </file>
 
@@ -6169,6 +6584,7 @@
         <a:solidFill>
           <a:srgbClr val="FAF8FC"/>
         </a:solidFill>
+        <a:effectLst/>
       </p:bgPr>
     </p:bg>
     <p:spTree>
@@ -6206,7 +6622,7 @@
           <a:bodyPr wrap="square" rtlCol="0" anchor="ctr"/>
           <a:lstStyle/>
           <a:p>
-            <a:pPr indent="0" marL="0">
+            <a:pPr marL="0" indent="0">
               <a:buNone/>
             </a:pPr>
             <a:r>
@@ -6245,6 +6661,13 @@
           </a:solidFill>
           <a:ln/>
         </p:spPr>
+        <p:txBody>
+          <a:bodyPr/>
+          <a:lstStyle/>
+          <a:p>
+            <a:endParaRPr lang="en-IN"/>
+          </a:p>
+        </p:txBody>
       </p:sp>
       <p:sp>
         <p:nvSpPr>
@@ -6267,11 +6690,11 @@
           <a:bodyPr wrap="square" rtlCol="0" anchor="ctr"/>
           <a:lstStyle/>
           <a:p>
-            <a:pPr indent="0" marL="0">
+            <a:pPr marL="0" indent="0">
               <a:buNone/>
             </a:pPr>
             <a:r>
-              <a:rPr lang="en-US" sz="1800" b="1" dirty="0">
+              <a:rPr lang="en-US" sz="2800" b="1" dirty="0">
                 <a:solidFill>
                   <a:srgbClr val="FFFFFF"/>
                 </a:solidFill>
@@ -6281,7 +6704,7 @@
               </a:rPr>
               <a:t>Software Used</a:t>
             </a:r>
-            <a:endParaRPr lang="en-US" sz="1800" dirty="0"/>
+            <a:endParaRPr lang="en-US" sz="2800" dirty="0"/>
           </a:p>
         </p:txBody>
       </p:sp>
@@ -6304,176 +6727,17 @@
           </a:solidFill>
           <a:ln/>
         </p:spPr>
+        <p:txBody>
+          <a:bodyPr/>
+          <a:lstStyle/>
+          <a:p>
+            <a:endParaRPr lang="en-IN"/>
+          </a:p>
+        </p:txBody>
       </p:sp>
       <p:pic>
         <p:nvPicPr>
-          <p:cNvPr id="6" name="Image 0" descr="/home/claude/studygenie/icons/python_blush.png">    </p:cNvPr>
-          <p:cNvPicPr>
-            <a:picLocks noChangeAspect="1"/>
-          </p:cNvPicPr>
-          <p:nvPr/>
-        </p:nvPicPr>
-        <p:blipFill>
-          <a:blip r:embed="rId1"/>
-          <a:stretch>
-            <a:fillRect/>
-          </a:stretch>
-        </p:blipFill>
-        <p:spPr>
-          <a:xfrm>
-            <a:off x="987552" y="2221992"/>
-            <a:ext cx="292608" cy="292608"/>
-          </a:xfrm>
-          <a:prstGeom prst="rect">
-            <a:avLst/>
-          </a:prstGeom>
-        </p:spPr>
-      </p:pic>
-      <p:sp>
-        <p:nvSpPr>
-          <p:cNvPr id="7" name="Text 4"/>
-          <p:cNvSpPr/>
-          <p:nvPr/>
-        </p:nvSpPr>
-        <p:spPr>
-          <a:xfrm>
-            <a:off x="1536192" y="2103120"/>
-            <a:ext cx="4206240" cy="530352"/>
-          </a:xfrm>
-          <a:prstGeom prst="rect">
-            <a:avLst/>
-          </a:prstGeom>
-          <a:noFill/>
-          <a:ln/>
-        </p:spPr>
-        <p:txBody>
-          <a:bodyPr wrap="square" rtlCol="0" anchor="ctr"/>
-          <a:lstStyle/>
-          <a:p>
-            <a:pPr indent="0" marL="0">
-              <a:buNone/>
-            </a:pPr>
-            <a:r>
-              <a:rPr lang="en-US" sz="1300" b="1" dirty="0">
-                <a:solidFill>
-                  <a:srgbClr val="FFFFFF"/>
-                </a:solidFill>
-                <a:latin typeface="Calibri" pitchFamily="34" charset="0"/>
-                <a:ea typeface="Calibri" pitchFamily="34" charset="-122"/>
-                <a:cs typeface="Calibri" pitchFamily="34" charset="-120"/>
-              </a:rPr>
-              <a:t>Python</a:t>
-            </a:r>
-            <a:endParaRPr lang="en-US" sz="1300" dirty="0"/>
-          </a:p>
-        </p:txBody>
-      </p:sp>
-      <p:sp>
-        <p:nvSpPr>
-          <p:cNvPr id="8" name="Shape 5"/>
-          <p:cNvSpPr/>
-          <p:nvPr/>
-        </p:nvSpPr>
-        <p:spPr>
-          <a:xfrm>
-            <a:off x="868680" y="2788920"/>
-            <a:ext cx="530352" cy="530352"/>
-          </a:xfrm>
-          <a:prstGeom prst="ellipse">
-            <a:avLst/>
-          </a:prstGeom>
-          <a:solidFill>
-            <a:srgbClr val="473A6E"/>
-          </a:solidFill>
-          <a:ln/>
-        </p:spPr>
-      </p:sp>
-      <p:pic>
-        <p:nvPicPr>
-          <p:cNvPr id="9" name="Image 1" descr="/home/claude/studygenie/icons/cloud_blush.png">    </p:cNvPr>
-          <p:cNvPicPr>
-            <a:picLocks noChangeAspect="1"/>
-          </p:cNvPicPr>
-          <p:nvPr/>
-        </p:nvPicPr>
-        <p:blipFill>
-          <a:blip r:embed="rId2"/>
-          <a:stretch>
-            <a:fillRect/>
-          </a:stretch>
-        </p:blipFill>
-        <p:spPr>
-          <a:xfrm>
-            <a:off x="987552" y="2907792"/>
-            <a:ext cx="292608" cy="292608"/>
-          </a:xfrm>
-          <a:prstGeom prst="rect">
-            <a:avLst/>
-          </a:prstGeom>
-        </p:spPr>
-      </p:pic>
-      <p:sp>
-        <p:nvSpPr>
-          <p:cNvPr id="10" name="Text 6"/>
-          <p:cNvSpPr/>
-          <p:nvPr/>
-        </p:nvSpPr>
-        <p:spPr>
-          <a:xfrm>
-            <a:off x="1536192" y="2788920"/>
-            <a:ext cx="4206240" cy="530352"/>
-          </a:xfrm>
-          <a:prstGeom prst="rect">
-            <a:avLst/>
-          </a:prstGeom>
-          <a:noFill/>
-          <a:ln/>
-        </p:spPr>
-        <p:txBody>
-          <a:bodyPr wrap="square" rtlCol="0" anchor="ctr"/>
-          <a:lstStyle/>
-          <a:p>
-            <a:pPr indent="0" marL="0">
-              <a:buNone/>
-            </a:pPr>
-            <a:r>
-              <a:rPr lang="en-US" sz="1300" b="1" dirty="0">
-                <a:solidFill>
-                  <a:srgbClr val="FFFFFF"/>
-                </a:solidFill>
-                <a:latin typeface="Calibri" pitchFamily="34" charset="0"/>
-                <a:ea typeface="Calibri" pitchFamily="34" charset="-122"/>
-                <a:cs typeface="Calibri" pitchFamily="34" charset="-120"/>
-              </a:rPr>
-              <a:t>Google Colab</a:t>
-            </a:r>
-            <a:endParaRPr lang="en-US" sz="1300" dirty="0"/>
-          </a:p>
-        </p:txBody>
-      </p:sp>
-      <p:sp>
-        <p:nvSpPr>
-          <p:cNvPr id="11" name="Shape 7"/>
-          <p:cNvSpPr/>
-          <p:nvPr/>
-        </p:nvSpPr>
-        <p:spPr>
-          <a:xfrm>
-            <a:off x="868680" y="3474720"/>
-            <a:ext cx="530352" cy="530352"/>
-          </a:xfrm>
-          <a:prstGeom prst="ellipse">
-            <a:avLst/>
-          </a:prstGeom>
-          <a:solidFill>
-            <a:srgbClr val="473A6E"/>
-          </a:solidFill>
-          <a:ln/>
-        </p:spPr>
-      </p:sp>
-      <p:pic>
-        <p:nvPicPr>
-          <p:cNvPr id="12" name="Image 2" descr="/home/claude/studygenie/icons/slidersh_blush.png">    </p:cNvPr>
+          <p:cNvPr id="6" name="Image 0" descr="/home/claude/studygenie/icons/python_blush.png"/>
           <p:cNvPicPr>
             <a:picLocks noChangeAspect="1"/>
           </p:cNvPicPr>
@@ -6487,7 +6751,7 @@
         </p:blipFill>
         <p:spPr>
           <a:xfrm>
-            <a:off x="987552" y="3593592"/>
+            <a:off x="987552" y="2221992"/>
             <a:ext cx="292608" cy="292608"/>
           </a:xfrm>
           <a:prstGeom prst="rect">
@@ -6497,13 +6761,13 @@
       </p:pic>
       <p:sp>
         <p:nvSpPr>
-          <p:cNvPr id="13" name="Text 8"/>
-          <p:cNvSpPr/>
-          <p:nvPr/>
-        </p:nvSpPr>
-        <p:spPr>
-          <a:xfrm>
-            <a:off x="1536192" y="3474720"/>
+          <p:cNvPr id="7" name="Text 4"/>
+          <p:cNvSpPr/>
+          <p:nvPr/>
+        </p:nvSpPr>
+        <p:spPr>
+          <a:xfrm>
+            <a:off x="1536192" y="2103120"/>
             <a:ext cx="4206240" cy="530352"/>
           </a:xfrm>
           <a:prstGeom prst="rect">
@@ -6516,11 +6780,11 @@
           <a:bodyPr wrap="square" rtlCol="0" anchor="ctr"/>
           <a:lstStyle/>
           <a:p>
-            <a:pPr indent="0" marL="0">
+            <a:pPr marL="0" indent="0">
               <a:buNone/>
             </a:pPr>
             <a:r>
-              <a:rPr lang="en-US" sz="1300" b="1" dirty="0">
+              <a:rPr lang="en-US" sz="2400" b="1" dirty="0">
                 <a:solidFill>
                   <a:srgbClr val="FFFFFF"/>
                 </a:solidFill>
@@ -6528,21 +6792,21 @@
                 <a:ea typeface="Calibri" pitchFamily="34" charset="-122"/>
                 <a:cs typeface="Calibri" pitchFamily="34" charset="-120"/>
               </a:rPr>
-              <a:t>Gradio</a:t>
-            </a:r>
-            <a:endParaRPr lang="en-US" sz="1300" dirty="0"/>
-          </a:p>
-        </p:txBody>
-      </p:sp>
-      <p:sp>
-        <p:nvSpPr>
-          <p:cNvPr id="14" name="Shape 9"/>
-          <p:cNvSpPr/>
-          <p:nvPr/>
-        </p:nvSpPr>
-        <p:spPr>
-          <a:xfrm>
-            <a:off x="868680" y="4160520"/>
+              <a:t>Python</a:t>
+            </a:r>
+            <a:endParaRPr lang="en-US" sz="2400" dirty="0"/>
+          </a:p>
+        </p:txBody>
+      </p:sp>
+      <p:sp>
+        <p:nvSpPr>
+          <p:cNvPr id="8" name="Shape 5"/>
+          <p:cNvSpPr/>
+          <p:nvPr/>
+        </p:nvSpPr>
+        <p:spPr>
+          <a:xfrm>
+            <a:off x="868680" y="2788920"/>
             <a:ext cx="530352" cy="530352"/>
           </a:xfrm>
           <a:prstGeom prst="ellipse">
@@ -6553,10 +6817,17 @@
           </a:solidFill>
           <a:ln/>
         </p:spPr>
+        <p:txBody>
+          <a:bodyPr/>
+          <a:lstStyle/>
+          <a:p>
+            <a:endParaRPr lang="en-IN"/>
+          </a:p>
+        </p:txBody>
       </p:sp>
       <p:pic>
         <p:nvPicPr>
-          <p:cNvPr id="15" name="Image 3" descr="/home/claude/studygenie/icons/openai_blush.png">    </p:cNvPr>
+          <p:cNvPr id="9" name="Image 1" descr="/home/claude/studygenie/icons/cloud_blush.png"/>
           <p:cNvPicPr>
             <a:picLocks noChangeAspect="1"/>
           </p:cNvPicPr>
@@ -6570,7 +6841,7 @@
         </p:blipFill>
         <p:spPr>
           <a:xfrm>
-            <a:off x="987552" y="4279392"/>
+            <a:off x="987552" y="2907792"/>
             <a:ext cx="292608" cy="292608"/>
           </a:xfrm>
           <a:prstGeom prst="rect">
@@ -6580,13 +6851,13 @@
       </p:pic>
       <p:sp>
         <p:nvSpPr>
-          <p:cNvPr id="16" name="Text 10"/>
-          <p:cNvSpPr/>
-          <p:nvPr/>
-        </p:nvSpPr>
-        <p:spPr>
-          <a:xfrm>
-            <a:off x="1536192" y="4160520"/>
+          <p:cNvPr id="10" name="Text 6"/>
+          <p:cNvSpPr/>
+          <p:nvPr/>
+        </p:nvSpPr>
+        <p:spPr>
+          <a:xfrm>
+            <a:off x="1536192" y="2788920"/>
             <a:ext cx="4206240" cy="530352"/>
           </a:xfrm>
           <a:prstGeom prst="rect">
@@ -6599,11 +6870,11 @@
           <a:bodyPr wrap="square" rtlCol="0" anchor="ctr"/>
           <a:lstStyle/>
           <a:p>
-            <a:pPr indent="0" marL="0">
+            <a:pPr marL="0" indent="0">
               <a:buNone/>
             </a:pPr>
             <a:r>
-              <a:rPr lang="en-US" sz="1300" b="1" dirty="0">
+              <a:rPr lang="en-US" sz="2400" b="1" dirty="0">
                 <a:solidFill>
                   <a:srgbClr val="FFFFFF"/>
                 </a:solidFill>
@@ -6611,21 +6882,21 @@
                 <a:ea typeface="Calibri" pitchFamily="34" charset="-122"/>
                 <a:cs typeface="Calibri" pitchFamily="34" charset="-120"/>
               </a:rPr>
-              <a:t>OpenAI Python SDK</a:t>
-            </a:r>
-            <a:endParaRPr lang="en-US" sz="1300" dirty="0"/>
-          </a:p>
-        </p:txBody>
-      </p:sp>
-      <p:sp>
-        <p:nvSpPr>
-          <p:cNvPr id="17" name="Shape 11"/>
-          <p:cNvSpPr/>
-          <p:nvPr/>
-        </p:nvSpPr>
-        <p:spPr>
-          <a:xfrm>
-            <a:off x="868680" y="4846320"/>
+              <a:t>Google Colab</a:t>
+            </a:r>
+            <a:endParaRPr lang="en-US" sz="2400" dirty="0"/>
+          </a:p>
+        </p:txBody>
+      </p:sp>
+      <p:sp>
+        <p:nvSpPr>
+          <p:cNvPr id="11" name="Shape 7"/>
+          <p:cNvSpPr/>
+          <p:nvPr/>
+        </p:nvSpPr>
+        <p:spPr>
+          <a:xfrm>
+            <a:off x="868680" y="3474720"/>
             <a:ext cx="530352" cy="530352"/>
           </a:xfrm>
           <a:prstGeom prst="ellipse">
@@ -6636,10 +6907,17 @@
           </a:solidFill>
           <a:ln/>
         </p:spPr>
+        <p:txBody>
+          <a:bodyPr/>
+          <a:lstStyle/>
+          <a:p>
+            <a:endParaRPr lang="en-IN"/>
+          </a:p>
+        </p:txBody>
       </p:sp>
       <p:pic>
         <p:nvPicPr>
-          <p:cNvPr id="18" name="Image 4" descr="/home/claude/studygenie/icons/robot_blush.png">    </p:cNvPr>
+          <p:cNvPr id="12" name="Image 2" descr="/home/claude/studygenie/icons/slidersh_blush.png"/>
           <p:cNvPicPr>
             <a:picLocks noChangeAspect="1"/>
           </p:cNvPicPr>
@@ -6653,7 +6931,7 @@
         </p:blipFill>
         <p:spPr>
           <a:xfrm>
-            <a:off x="987552" y="4965192"/>
+            <a:off x="987552" y="3593592"/>
             <a:ext cx="292608" cy="292608"/>
           </a:xfrm>
           <a:prstGeom prst="rect">
@@ -6663,13 +6941,13 @@
       </p:pic>
       <p:sp>
         <p:nvSpPr>
-          <p:cNvPr id="19" name="Text 12"/>
-          <p:cNvSpPr/>
-          <p:nvPr/>
-        </p:nvSpPr>
-        <p:spPr>
-          <a:xfrm>
-            <a:off x="1536192" y="4846320"/>
+          <p:cNvPr id="13" name="Text 8"/>
+          <p:cNvSpPr/>
+          <p:nvPr/>
+        </p:nvSpPr>
+        <p:spPr>
+          <a:xfrm>
+            <a:off x="1536192" y="3474720"/>
             <a:ext cx="4206240" cy="530352"/>
           </a:xfrm>
           <a:prstGeom prst="rect">
@@ -6682,11 +6960,11 @@
           <a:bodyPr wrap="square" rtlCol="0" anchor="ctr"/>
           <a:lstStyle/>
           <a:p>
-            <a:pPr indent="0" marL="0">
+            <a:pPr marL="0" indent="0">
               <a:buNone/>
             </a:pPr>
             <a:r>
-              <a:rPr lang="en-US" sz="1300" b="1" dirty="0">
+              <a:rPr lang="en-US" sz="2400" b="1" dirty="0">
                 <a:solidFill>
                   <a:srgbClr val="FFFFFF"/>
                 </a:solidFill>
@@ -6694,21 +6972,21 @@
                 <a:ea typeface="Calibri" pitchFamily="34" charset="-122"/>
                 <a:cs typeface="Calibri" pitchFamily="34" charset="-120"/>
               </a:rPr>
-              <a:t>GPT-4.1 Nano API</a:t>
-            </a:r>
-            <a:endParaRPr lang="en-US" sz="1300" dirty="0"/>
-          </a:p>
-        </p:txBody>
-      </p:sp>
-      <p:sp>
-        <p:nvSpPr>
-          <p:cNvPr id="20" name="Shape 13"/>
-          <p:cNvSpPr/>
-          <p:nvPr/>
-        </p:nvSpPr>
-        <p:spPr>
-          <a:xfrm>
-            <a:off x="868680" y="5532120"/>
+              <a:t>Gradio</a:t>
+            </a:r>
+            <a:endParaRPr lang="en-US" sz="2400" dirty="0"/>
+          </a:p>
+        </p:txBody>
+      </p:sp>
+      <p:sp>
+        <p:nvSpPr>
+          <p:cNvPr id="14" name="Shape 9"/>
+          <p:cNvSpPr/>
+          <p:nvPr/>
+        </p:nvSpPr>
+        <p:spPr>
+          <a:xfrm>
+            <a:off x="868680" y="4160520"/>
             <a:ext cx="530352" cy="530352"/>
           </a:xfrm>
           <a:prstGeom prst="ellipse">
@@ -6719,10 +6997,17 @@
           </a:solidFill>
           <a:ln/>
         </p:spPr>
+        <p:txBody>
+          <a:bodyPr/>
+          <a:lstStyle/>
+          <a:p>
+            <a:endParaRPr lang="en-IN"/>
+          </a:p>
+        </p:txBody>
       </p:sp>
       <p:pic>
         <p:nvPicPr>
-          <p:cNvPr id="21" name="Image 5" descr="/home/claude/studygenie/icons/filepdf_blush.png">    </p:cNvPr>
+          <p:cNvPr id="15" name="Image 3" descr="/home/claude/studygenie/icons/openai_blush.png"/>
           <p:cNvPicPr>
             <a:picLocks noChangeAspect="1"/>
           </p:cNvPicPr>
@@ -6736,7 +7021,7 @@
         </p:blipFill>
         <p:spPr>
           <a:xfrm>
-            <a:off x="987552" y="5650992"/>
+            <a:off x="987552" y="4279392"/>
             <a:ext cx="292608" cy="292608"/>
           </a:xfrm>
           <a:prstGeom prst="rect">
@@ -6746,13 +7031,13 @@
       </p:pic>
       <p:sp>
         <p:nvSpPr>
-          <p:cNvPr id="22" name="Text 14"/>
-          <p:cNvSpPr/>
-          <p:nvPr/>
-        </p:nvSpPr>
-        <p:spPr>
-          <a:xfrm>
-            <a:off x="1536192" y="5532120"/>
+          <p:cNvPr id="16" name="Text 10"/>
+          <p:cNvSpPr/>
+          <p:nvPr/>
+        </p:nvSpPr>
+        <p:spPr>
+          <a:xfrm>
+            <a:off x="1536192" y="4160520"/>
             <a:ext cx="4206240" cy="530352"/>
           </a:xfrm>
           <a:prstGeom prst="rect">
@@ -6765,11 +7050,11 @@
           <a:bodyPr wrap="square" rtlCol="0" anchor="ctr"/>
           <a:lstStyle/>
           <a:p>
-            <a:pPr indent="0" marL="0">
+            <a:pPr marL="0" indent="0">
               <a:buNone/>
             </a:pPr>
             <a:r>
-              <a:rPr lang="en-US" sz="1300" b="1" dirty="0">
+              <a:rPr lang="en-US" sz="2400" b="1" dirty="0">
                 <a:solidFill>
                   <a:srgbClr val="FFFFFF"/>
                 </a:solidFill>
@@ -6777,101 +7062,42 @@
                 <a:ea typeface="Calibri" pitchFamily="34" charset="-122"/>
                 <a:cs typeface="Calibri" pitchFamily="34" charset="-120"/>
               </a:rPr>
-              <a:t>FPDF (PDF generation, optional)</a:t>
-            </a:r>
-            <a:endParaRPr lang="en-US" sz="1300" dirty="0"/>
-          </a:p>
-        </p:txBody>
-      </p:sp>
-      <p:sp>
-        <p:nvSpPr>
-          <p:cNvPr id="23" name="Shape 15"/>
-          <p:cNvSpPr/>
-          <p:nvPr/>
-        </p:nvSpPr>
-        <p:spPr>
-          <a:xfrm>
-            <a:off x="6172200" y="1234440"/>
-            <a:ext cx="5440680" cy="5212080"/>
-          </a:xfrm>
-          <a:prstGeom prst="roundRect">
-            <a:avLst>
-              <a:gd name="adj" fmla="val 2105"/>
-            </a:avLst>
-          </a:prstGeom>
-          <a:solidFill>
-            <a:srgbClr val="FFFFFF"/>
-          </a:solidFill>
-          <a:ln w="12700">
-            <a:solidFill>
-              <a:srgbClr val="E9E4F2"/>
-            </a:solidFill>
-            <a:prstDash val="solid"/>
-          </a:ln>
-        </p:spPr>
-      </p:sp>
-      <p:sp>
-        <p:nvSpPr>
-          <p:cNvPr id="24" name="Text 16"/>
-          <p:cNvSpPr/>
-          <p:nvPr/>
-        </p:nvSpPr>
-        <p:spPr>
-          <a:xfrm>
-            <a:off x="6492240" y="1463040"/>
-            <a:ext cx="4572000" cy="457200"/>
-          </a:xfrm>
-          <a:prstGeom prst="rect">
-            <a:avLst/>
-          </a:prstGeom>
-          <a:noFill/>
-          <a:ln/>
-        </p:spPr>
-        <p:txBody>
-          <a:bodyPr wrap="square" rtlCol="0" anchor="ctr"/>
-          <a:lstStyle/>
-          <a:p>
-            <a:pPr indent="0" marL="0">
-              <a:buNone/>
-            </a:pPr>
-            <a:r>
-              <a:rPr lang="en-US" sz="1800" b="1" dirty="0">
-                <a:solidFill>
-                  <a:srgbClr val="2D2150"/>
-                </a:solidFill>
-                <a:latin typeface="Cambria" pitchFamily="34" charset="0"/>
-                <a:ea typeface="Cambria" pitchFamily="34" charset="-122"/>
-                <a:cs typeface="Cambria" pitchFamily="34" charset="-120"/>
-              </a:rPr>
-              <a:t>Expected Output</a:t>
-            </a:r>
-            <a:endParaRPr lang="en-US" sz="1800" dirty="0"/>
-          </a:p>
-        </p:txBody>
-      </p:sp>
-      <p:sp>
-        <p:nvSpPr>
-          <p:cNvPr id="25" name="Shape 17"/>
-          <p:cNvSpPr/>
-          <p:nvPr/>
-        </p:nvSpPr>
-        <p:spPr>
-          <a:xfrm>
-            <a:off x="6492240" y="2103120"/>
+              <a:t>OpenAI Python SDK</a:t>
+            </a:r>
+            <a:endParaRPr lang="en-US" sz="2400" dirty="0"/>
+          </a:p>
+        </p:txBody>
+      </p:sp>
+      <p:sp>
+        <p:nvSpPr>
+          <p:cNvPr id="17" name="Shape 11"/>
+          <p:cNvSpPr/>
+          <p:nvPr/>
+        </p:nvSpPr>
+        <p:spPr>
+          <a:xfrm>
+            <a:off x="868680" y="4846320"/>
             <a:ext cx="530352" cy="530352"/>
           </a:xfrm>
           <a:prstGeom prst="ellipse">
             <a:avLst/>
           </a:prstGeom>
           <a:solidFill>
-            <a:srgbClr val="F7E6E0"/>
-          </a:solidFill>
-          <a:ln/>
-        </p:spPr>
+            <a:srgbClr val="473A6E"/>
+          </a:solidFill>
+          <a:ln/>
+        </p:spPr>
+        <p:txBody>
+          <a:bodyPr/>
+          <a:lstStyle/>
+          <a:p>
+            <a:endParaRPr lang="en-IN"/>
+          </a:p>
+        </p:txBody>
       </p:sp>
       <p:pic>
         <p:nvPicPr>
-          <p:cNvPr id="26" name="Image 6" descr="/home/claude/studygenie/icons/calendar_blush.png">    </p:cNvPr>
+          <p:cNvPr id="18" name="Image 4" descr="/home/claude/studygenie/icons/robot_blush.png"/>
           <p:cNvPicPr>
             <a:picLocks noChangeAspect="1"/>
           </p:cNvPicPr>
@@ -6885,7 +7111,7 @@
         </p:blipFill>
         <p:spPr>
           <a:xfrm>
-            <a:off x="6611112" y="2221992"/>
+            <a:off x="987552" y="4965192"/>
             <a:ext cx="292608" cy="292608"/>
           </a:xfrm>
           <a:prstGeom prst="rect">
@@ -6895,14 +7121,14 @@
       </p:pic>
       <p:sp>
         <p:nvSpPr>
-          <p:cNvPr id="27" name="Text 18"/>
-          <p:cNvSpPr/>
-          <p:nvPr/>
-        </p:nvSpPr>
-        <p:spPr>
-          <a:xfrm>
-            <a:off x="7159752" y="2103120"/>
-            <a:ext cx="4297680" cy="530352"/>
+          <p:cNvPr id="19" name="Text 12"/>
+          <p:cNvSpPr/>
+          <p:nvPr/>
+        </p:nvSpPr>
+        <p:spPr>
+          <a:xfrm>
+            <a:off x="1536192" y="4846320"/>
+            <a:ext cx="4206240" cy="530352"/>
           </a:xfrm>
           <a:prstGeom prst="rect">
             <a:avLst/>
@@ -6914,47 +7140,54 @@
           <a:bodyPr wrap="square" rtlCol="0" anchor="ctr"/>
           <a:lstStyle/>
           <a:p>
-            <a:pPr indent="0" marL="0">
+            <a:pPr marL="0" indent="0">
               <a:buNone/>
             </a:pPr>
             <a:r>
-              <a:rPr lang="en-US" sz="1300" b="1" dirty="0">
-                <a:solidFill>
-                  <a:srgbClr val="2B2340"/>
+              <a:rPr lang="en-US" sz="2400" b="1" dirty="0">
+                <a:solidFill>
+                  <a:srgbClr val="FFFFFF"/>
                 </a:solidFill>
                 <a:latin typeface="Calibri" pitchFamily="34" charset="0"/>
                 <a:ea typeface="Calibri" pitchFamily="34" charset="-122"/>
                 <a:cs typeface="Calibri" pitchFamily="34" charset="-120"/>
               </a:rPr>
-              <a:t>Personalized Study Plan</a:t>
-            </a:r>
-            <a:endParaRPr lang="en-US" sz="1300" dirty="0"/>
-          </a:p>
-        </p:txBody>
-      </p:sp>
-      <p:sp>
-        <p:nvSpPr>
-          <p:cNvPr id="28" name="Shape 19"/>
-          <p:cNvSpPr/>
-          <p:nvPr/>
-        </p:nvSpPr>
-        <p:spPr>
-          <a:xfrm>
-            <a:off x="6492240" y="2724912"/>
+              <a:t>GPT-4.1 Nano API</a:t>
+            </a:r>
+            <a:endParaRPr lang="en-US" sz="2400" dirty="0"/>
+          </a:p>
+        </p:txBody>
+      </p:sp>
+      <p:sp>
+        <p:nvSpPr>
+          <p:cNvPr id="20" name="Shape 13"/>
+          <p:cNvSpPr/>
+          <p:nvPr/>
+        </p:nvSpPr>
+        <p:spPr>
+          <a:xfrm>
+            <a:off x="868680" y="5532120"/>
             <a:ext cx="530352" cy="530352"/>
           </a:xfrm>
           <a:prstGeom prst="ellipse">
             <a:avLst/>
           </a:prstGeom>
           <a:solidFill>
-            <a:srgbClr val="F7E6E0"/>
-          </a:solidFill>
-          <a:ln/>
-        </p:spPr>
+            <a:srgbClr val="473A6E"/>
+          </a:solidFill>
+          <a:ln/>
+        </p:spPr>
+        <p:txBody>
+          <a:bodyPr/>
+          <a:lstStyle/>
+          <a:p>
+            <a:endParaRPr lang="en-IN"/>
+          </a:p>
+        </p:txBody>
       </p:sp>
       <p:pic>
         <p:nvPicPr>
-          <p:cNvPr id="29" name="Image 7" descr="/home/claude/studygenie/icons/lightbulb_blush.png">    </p:cNvPr>
+          <p:cNvPr id="21" name="Image 5" descr="/home/claude/studygenie/icons/filepdf_blush.png"/>
           <p:cNvPicPr>
             <a:picLocks noChangeAspect="1"/>
           </p:cNvPicPr>
@@ -6968,7 +7201,7 @@
         </p:blipFill>
         <p:spPr>
           <a:xfrm>
-            <a:off x="6611112" y="2843784"/>
+            <a:off x="987552" y="5650992"/>
             <a:ext cx="292608" cy="292608"/>
           </a:xfrm>
           <a:prstGeom prst="rect">
@@ -6978,14 +7211,14 @@
       </p:pic>
       <p:sp>
         <p:nvSpPr>
-          <p:cNvPr id="30" name="Text 20"/>
-          <p:cNvSpPr/>
-          <p:nvPr/>
-        </p:nvSpPr>
-        <p:spPr>
-          <a:xfrm>
-            <a:off x="7159752" y="2724912"/>
-            <a:ext cx="4297680" cy="530352"/>
+          <p:cNvPr id="22" name="Text 14"/>
+          <p:cNvSpPr/>
+          <p:nvPr/>
+        </p:nvSpPr>
+        <p:spPr>
+          <a:xfrm>
+            <a:off x="1536192" y="5532120"/>
+            <a:ext cx="4206240" cy="530352"/>
           </a:xfrm>
           <a:prstGeom prst="rect">
             <a:avLst/>
@@ -6997,19 +7230,30 @@
           <a:bodyPr wrap="square" rtlCol="0" anchor="ctr"/>
           <a:lstStyle/>
           <a:p>
-            <a:pPr indent="0" marL="0">
+            <a:pPr marL="0" indent="0">
               <a:buNone/>
             </a:pPr>
             <a:r>
-              <a:rPr lang="en-US" sz="1300" b="1" dirty="0">
-                <a:solidFill>
-                  <a:srgbClr val="2B2340"/>
+              <a:rPr lang="en-US" sz="2400" b="1" dirty="0">
+                <a:solidFill>
+                  <a:srgbClr val="FFFFFF"/>
                 </a:solidFill>
                 <a:latin typeface="Calibri" pitchFamily="34" charset="0"/>
                 <a:ea typeface="Calibri" pitchFamily="34" charset="-122"/>
                 <a:cs typeface="Calibri" pitchFamily="34" charset="-120"/>
               </a:rPr>
-              <a:t>Topic Explanation</a:t>
+              <a:t>FPDF (PDF generation, optional</a:t>
+            </a:r>
+            <a:r>
+              <a:rPr lang="en-US" sz="1300" b="1" dirty="0">
+                <a:solidFill>
+                  <a:srgbClr val="FFFFFF"/>
+                </a:solidFill>
+                <a:latin typeface="Calibri" pitchFamily="34" charset="0"/>
+                <a:ea typeface="Calibri" pitchFamily="34" charset="-122"/>
+                <a:cs typeface="Calibri" pitchFamily="34" charset="-120"/>
+              </a:rPr>
+              <a:t>)</a:t>
             </a:r>
             <a:endParaRPr lang="en-US" sz="1300" dirty="0"/>
           </a:p>
@@ -7017,13 +7261,86 @@
       </p:sp>
       <p:sp>
         <p:nvSpPr>
-          <p:cNvPr id="31" name="Shape 21"/>
-          <p:cNvSpPr/>
-          <p:nvPr/>
-        </p:nvSpPr>
-        <p:spPr>
-          <a:xfrm>
-            <a:off x="6492240" y="3346704"/>
+          <p:cNvPr id="23" name="Shape 15"/>
+          <p:cNvSpPr/>
+          <p:nvPr/>
+        </p:nvSpPr>
+        <p:spPr>
+          <a:xfrm>
+            <a:off x="6172200" y="1234440"/>
+            <a:ext cx="5440680" cy="5408956"/>
+          </a:xfrm>
+          <a:prstGeom prst="roundRect">
+            <a:avLst>
+              <a:gd name="adj" fmla="val 2105"/>
+            </a:avLst>
+          </a:prstGeom>
+          <a:solidFill>
+            <a:srgbClr val="FFFFFF"/>
+          </a:solidFill>
+          <a:ln w="12700">
+            <a:solidFill>
+              <a:srgbClr val="E9E4F2"/>
+            </a:solidFill>
+            <a:prstDash val="solid"/>
+          </a:ln>
+        </p:spPr>
+        <p:txBody>
+          <a:bodyPr/>
+          <a:lstStyle/>
+          <a:p>
+            <a:endParaRPr lang="en-IN" dirty="0"/>
+          </a:p>
+        </p:txBody>
+      </p:sp>
+      <p:sp>
+        <p:nvSpPr>
+          <p:cNvPr id="24" name="Text 16"/>
+          <p:cNvSpPr/>
+          <p:nvPr/>
+        </p:nvSpPr>
+        <p:spPr>
+          <a:xfrm>
+            <a:off x="6492240" y="1463040"/>
+            <a:ext cx="4572000" cy="457200"/>
+          </a:xfrm>
+          <a:prstGeom prst="rect">
+            <a:avLst/>
+          </a:prstGeom>
+          <a:noFill/>
+          <a:ln/>
+        </p:spPr>
+        <p:txBody>
+          <a:bodyPr wrap="square" rtlCol="0" anchor="ctr"/>
+          <a:lstStyle/>
+          <a:p>
+            <a:pPr marL="0" indent="0">
+              <a:buNone/>
+            </a:pPr>
+            <a:r>
+              <a:rPr lang="en-US" sz="2800" b="1" dirty="0">
+                <a:solidFill>
+                  <a:srgbClr val="2D2150"/>
+                </a:solidFill>
+                <a:latin typeface="Cambria" pitchFamily="34" charset="0"/>
+                <a:ea typeface="Cambria" pitchFamily="34" charset="-122"/>
+                <a:cs typeface="Cambria" pitchFamily="34" charset="-120"/>
+              </a:rPr>
+              <a:t>Expected Output</a:t>
+            </a:r>
+            <a:endParaRPr lang="en-US" sz="2800" dirty="0"/>
+          </a:p>
+        </p:txBody>
+      </p:sp>
+      <p:sp>
+        <p:nvSpPr>
+          <p:cNvPr id="25" name="Shape 17"/>
+          <p:cNvSpPr/>
+          <p:nvPr/>
+        </p:nvSpPr>
+        <p:spPr>
+          <a:xfrm>
+            <a:off x="6492240" y="2103120"/>
             <a:ext cx="530352" cy="530352"/>
           </a:xfrm>
           <a:prstGeom prst="ellipse">
@@ -7034,10 +7351,17 @@
           </a:solidFill>
           <a:ln/>
         </p:spPr>
+        <p:txBody>
+          <a:bodyPr/>
+          <a:lstStyle/>
+          <a:p>
+            <a:endParaRPr lang="en-IN"/>
+          </a:p>
+        </p:txBody>
       </p:sp>
       <p:pic>
         <p:nvPicPr>
-          <p:cNvPr id="32" name="Image 8" descr="/home/claude/studygenie/icons/book_blush.png">    </p:cNvPr>
+          <p:cNvPr id="26" name="Image 6" descr="/home/claude/studygenie/icons/calendar_blush.png"/>
           <p:cNvPicPr>
             <a:picLocks noChangeAspect="1"/>
           </p:cNvPicPr>
@@ -7051,7 +7375,7 @@
         </p:blipFill>
         <p:spPr>
           <a:xfrm>
-            <a:off x="6611112" y="3465576"/>
+            <a:off x="6611112" y="2221992"/>
             <a:ext cx="292608" cy="292608"/>
           </a:xfrm>
           <a:prstGeom prst="rect">
@@ -7061,13 +7385,13 @@
       </p:pic>
       <p:sp>
         <p:nvSpPr>
-          <p:cNvPr id="33" name="Text 22"/>
-          <p:cNvSpPr/>
-          <p:nvPr/>
-        </p:nvSpPr>
-        <p:spPr>
-          <a:xfrm>
-            <a:off x="7159752" y="3346704"/>
+          <p:cNvPr id="27" name="Text 18"/>
+          <p:cNvSpPr/>
+          <p:nvPr/>
+        </p:nvSpPr>
+        <p:spPr>
+          <a:xfrm>
+            <a:off x="7159752" y="2103120"/>
             <a:ext cx="4297680" cy="530352"/>
           </a:xfrm>
           <a:prstGeom prst="rect">
@@ -7080,11 +7404,11 @@
           <a:bodyPr wrap="square" rtlCol="0" anchor="ctr"/>
           <a:lstStyle/>
           <a:p>
-            <a:pPr indent="0" marL="0">
+            <a:pPr marL="0" indent="0">
               <a:buNone/>
             </a:pPr>
             <a:r>
-              <a:rPr lang="en-US" sz="1300" b="1" dirty="0">
+              <a:rPr lang="en-US" sz="2400" b="1" dirty="0">
                 <a:solidFill>
                   <a:srgbClr val="2B2340"/>
                 </a:solidFill>
@@ -7092,21 +7416,21 @@
                 <a:ea typeface="Calibri" pitchFamily="34" charset="-122"/>
                 <a:cs typeface="Calibri" pitchFamily="34" charset="-120"/>
               </a:rPr>
-              <a:t>Revision Notes</a:t>
-            </a:r>
-            <a:endParaRPr lang="en-US" sz="1300" dirty="0"/>
-          </a:p>
-        </p:txBody>
-      </p:sp>
-      <p:sp>
-        <p:nvSpPr>
-          <p:cNvPr id="34" name="Shape 23"/>
-          <p:cNvSpPr/>
-          <p:nvPr/>
-        </p:nvSpPr>
-        <p:spPr>
-          <a:xfrm>
-            <a:off x="6492240" y="3968496"/>
+              <a:t>Personalized Study Plan</a:t>
+            </a:r>
+            <a:endParaRPr lang="en-US" sz="2400" dirty="0"/>
+          </a:p>
+        </p:txBody>
+      </p:sp>
+      <p:sp>
+        <p:nvSpPr>
+          <p:cNvPr id="28" name="Shape 19"/>
+          <p:cNvSpPr/>
+          <p:nvPr/>
+        </p:nvSpPr>
+        <p:spPr>
+          <a:xfrm>
+            <a:off x="6492240" y="2724912"/>
             <a:ext cx="530352" cy="530352"/>
           </a:xfrm>
           <a:prstGeom prst="ellipse">
@@ -7117,10 +7441,17 @@
           </a:solidFill>
           <a:ln/>
         </p:spPr>
+        <p:txBody>
+          <a:bodyPr/>
+          <a:lstStyle/>
+          <a:p>
+            <a:endParaRPr lang="en-IN"/>
+          </a:p>
+        </p:txBody>
       </p:sp>
       <p:pic>
         <p:nvPicPr>
-          <p:cNvPr id="35" name="Image 9" descr="/home/claude/studygenie/icons/clipboardcheck_blush.png">    </p:cNvPr>
+          <p:cNvPr id="29" name="Image 7" descr="/home/claude/studygenie/icons/lightbulb_blush.png"/>
           <p:cNvPicPr>
             <a:picLocks noChangeAspect="1"/>
           </p:cNvPicPr>
@@ -7134,7 +7465,7 @@
         </p:blipFill>
         <p:spPr>
           <a:xfrm>
-            <a:off x="6611112" y="4087368"/>
+            <a:off x="6611112" y="2843784"/>
             <a:ext cx="292608" cy="292608"/>
           </a:xfrm>
           <a:prstGeom prst="rect">
@@ -7144,13 +7475,13 @@
       </p:pic>
       <p:sp>
         <p:nvSpPr>
-          <p:cNvPr id="36" name="Text 24"/>
-          <p:cNvSpPr/>
-          <p:nvPr/>
-        </p:nvSpPr>
-        <p:spPr>
-          <a:xfrm>
-            <a:off x="7159752" y="3968496"/>
+          <p:cNvPr id="30" name="Text 20"/>
+          <p:cNvSpPr/>
+          <p:nvPr/>
+        </p:nvSpPr>
+        <p:spPr>
+          <a:xfrm>
+            <a:off x="7159752" y="2724912"/>
             <a:ext cx="4297680" cy="530352"/>
           </a:xfrm>
           <a:prstGeom prst="rect">
@@ -7163,11 +7494,11 @@
           <a:bodyPr wrap="square" rtlCol="0" anchor="ctr"/>
           <a:lstStyle/>
           <a:p>
-            <a:pPr indent="0" marL="0">
+            <a:pPr marL="0" indent="0">
               <a:buNone/>
             </a:pPr>
             <a:r>
-              <a:rPr lang="en-US" sz="1300" b="1" dirty="0">
+              <a:rPr lang="en-US" sz="2400" b="1" dirty="0">
                 <a:solidFill>
                   <a:srgbClr val="2B2340"/>
                 </a:solidFill>
@@ -7175,21 +7506,21 @@
                 <a:ea typeface="Calibri" pitchFamily="34" charset="-122"/>
                 <a:cs typeface="Calibri" pitchFamily="34" charset="-120"/>
               </a:rPr>
-              <a:t>AI-generated Practice Quiz</a:t>
-            </a:r>
-            <a:endParaRPr lang="en-US" sz="1300" dirty="0"/>
-          </a:p>
-        </p:txBody>
-      </p:sp>
-      <p:sp>
-        <p:nvSpPr>
-          <p:cNvPr id="37" name="Shape 25"/>
-          <p:cNvSpPr/>
-          <p:nvPr/>
-        </p:nvSpPr>
-        <p:spPr>
-          <a:xfrm>
-            <a:off x="6492240" y="4590288"/>
+              <a:t>Topic Explanation</a:t>
+            </a:r>
+            <a:endParaRPr lang="en-US" sz="2400" dirty="0"/>
+          </a:p>
+        </p:txBody>
+      </p:sp>
+      <p:sp>
+        <p:nvSpPr>
+          <p:cNvPr id="31" name="Shape 21"/>
+          <p:cNvSpPr/>
+          <p:nvPr/>
+        </p:nvSpPr>
+        <p:spPr>
+          <a:xfrm>
+            <a:off x="6492240" y="3346704"/>
             <a:ext cx="530352" cy="530352"/>
           </a:xfrm>
           <a:prstGeom prst="ellipse">
@@ -7200,10 +7531,17 @@
           </a:solidFill>
           <a:ln/>
         </p:spPr>
+        <p:txBody>
+          <a:bodyPr/>
+          <a:lstStyle/>
+          <a:p>
+            <a:endParaRPr lang="en-IN"/>
+          </a:p>
+        </p:txBody>
       </p:sp>
       <p:pic>
         <p:nvPicPr>
-          <p:cNvPr id="38" name="Image 10" descr="/home/claude/studygenie/icons/key_blush.png">    </p:cNvPr>
+          <p:cNvPr id="32" name="Image 8" descr="/home/claude/studygenie/icons/book_blush.png"/>
           <p:cNvPicPr>
             <a:picLocks noChangeAspect="1"/>
           </p:cNvPicPr>
@@ -7217,7 +7555,7 @@
         </p:blipFill>
         <p:spPr>
           <a:xfrm>
-            <a:off x="6611112" y="4709160"/>
+            <a:off x="6611112" y="3465576"/>
             <a:ext cx="292608" cy="292608"/>
           </a:xfrm>
           <a:prstGeom prst="rect">
@@ -7227,13 +7565,13 @@
       </p:pic>
       <p:sp>
         <p:nvSpPr>
-          <p:cNvPr id="39" name="Text 26"/>
-          <p:cNvSpPr/>
-          <p:nvPr/>
-        </p:nvSpPr>
-        <p:spPr>
-          <a:xfrm>
-            <a:off x="7159752" y="4590288"/>
+          <p:cNvPr id="33" name="Text 22"/>
+          <p:cNvSpPr/>
+          <p:nvPr/>
+        </p:nvSpPr>
+        <p:spPr>
+          <a:xfrm>
+            <a:off x="7159752" y="3346704"/>
             <a:ext cx="4297680" cy="530352"/>
           </a:xfrm>
           <a:prstGeom prst="rect">
@@ -7246,11 +7584,11 @@
           <a:bodyPr wrap="square" rtlCol="0" anchor="ctr"/>
           <a:lstStyle/>
           <a:p>
-            <a:pPr indent="0" marL="0">
+            <a:pPr marL="0" indent="0">
               <a:buNone/>
             </a:pPr>
             <a:r>
-              <a:rPr lang="en-US" sz="1300" b="1" dirty="0">
+              <a:rPr lang="en-US" sz="2400" b="1" dirty="0">
                 <a:solidFill>
                   <a:srgbClr val="2B2340"/>
                 </a:solidFill>
@@ -7258,21 +7596,21 @@
                 <a:ea typeface="Calibri" pitchFamily="34" charset="-122"/>
                 <a:cs typeface="Calibri" pitchFamily="34" charset="-120"/>
               </a:rPr>
-              <a:t>Answer Key</a:t>
-            </a:r>
-            <a:endParaRPr lang="en-US" sz="1300" dirty="0"/>
-          </a:p>
-        </p:txBody>
-      </p:sp>
-      <p:sp>
-        <p:nvSpPr>
-          <p:cNvPr id="40" name="Shape 27"/>
-          <p:cNvSpPr/>
-          <p:nvPr/>
-        </p:nvSpPr>
-        <p:spPr>
-          <a:xfrm>
-            <a:off x="6492240" y="5212080"/>
+              <a:t>Revision Notes</a:t>
+            </a:r>
+            <a:endParaRPr lang="en-US" sz="2400" dirty="0"/>
+          </a:p>
+        </p:txBody>
+      </p:sp>
+      <p:sp>
+        <p:nvSpPr>
+          <p:cNvPr id="34" name="Shape 23"/>
+          <p:cNvSpPr/>
+          <p:nvPr/>
+        </p:nvSpPr>
+        <p:spPr>
+          <a:xfrm>
+            <a:off x="6492240" y="3968496"/>
             <a:ext cx="530352" cy="530352"/>
           </a:xfrm>
           <a:prstGeom prst="ellipse">
@@ -7283,10 +7621,17 @@
           </a:solidFill>
           <a:ln/>
         </p:spPr>
+        <p:txBody>
+          <a:bodyPr/>
+          <a:lstStyle/>
+          <a:p>
+            <a:endParaRPr lang="en-IN"/>
+          </a:p>
+        </p:txBody>
       </p:sp>
       <p:pic>
         <p:nvPicPr>
-          <p:cNvPr id="41" name="Image 11" descr="/home/claude/studygenie/icons/question_blush.png">    </p:cNvPr>
+          <p:cNvPr id="35" name="Image 9" descr="/home/claude/studygenie/icons/clipboardcheck_blush.png"/>
           <p:cNvPicPr>
             <a:picLocks noChangeAspect="1"/>
           </p:cNvPicPr>
@@ -7300,7 +7645,7 @@
         </p:blipFill>
         <p:spPr>
           <a:xfrm>
-            <a:off x="6611112" y="5330952"/>
+            <a:off x="6611112" y="4087368"/>
             <a:ext cx="292608" cy="292608"/>
           </a:xfrm>
           <a:prstGeom prst="rect">
@@ -7310,13 +7655,13 @@
       </p:pic>
       <p:sp>
         <p:nvSpPr>
-          <p:cNvPr id="42" name="Text 28"/>
-          <p:cNvSpPr/>
-          <p:nvPr/>
-        </p:nvSpPr>
-        <p:spPr>
-          <a:xfrm>
-            <a:off x="7159752" y="5212080"/>
+          <p:cNvPr id="36" name="Text 24"/>
+          <p:cNvSpPr/>
+          <p:nvPr/>
+        </p:nvSpPr>
+        <p:spPr>
+          <a:xfrm>
+            <a:off x="7159752" y="3968496"/>
             <a:ext cx="4297680" cy="530352"/>
           </a:xfrm>
           <a:prstGeom prst="rect">
@@ -7329,11 +7674,11 @@
           <a:bodyPr wrap="square" rtlCol="0" anchor="ctr"/>
           <a:lstStyle/>
           <a:p>
-            <a:pPr indent="0" marL="0">
+            <a:pPr marL="0" indent="0">
               <a:buNone/>
             </a:pPr>
             <a:r>
-              <a:rPr lang="en-US" sz="1300" b="1" dirty="0">
+              <a:rPr lang="en-US" sz="2400" b="1" dirty="0">
                 <a:solidFill>
                   <a:srgbClr val="2B2340"/>
                 </a:solidFill>
@@ -7341,21 +7686,21 @@
                 <a:ea typeface="Calibri" pitchFamily="34" charset="-122"/>
                 <a:cs typeface="Calibri" pitchFamily="34" charset="-120"/>
               </a:rPr>
-              <a:t>AI Doubt Solver Response</a:t>
-            </a:r>
-            <a:endParaRPr lang="en-US" sz="1300" dirty="0"/>
-          </a:p>
-        </p:txBody>
-      </p:sp>
-      <p:sp>
-        <p:nvSpPr>
-          <p:cNvPr id="43" name="Shape 29"/>
-          <p:cNvSpPr/>
-          <p:nvPr/>
-        </p:nvSpPr>
-        <p:spPr>
-          <a:xfrm>
-            <a:off x="6492240" y="5833872"/>
+              <a:t>AI-generated Practice Quiz</a:t>
+            </a:r>
+            <a:endParaRPr lang="en-US" sz="2400" dirty="0"/>
+          </a:p>
+        </p:txBody>
+      </p:sp>
+      <p:sp>
+        <p:nvSpPr>
+          <p:cNvPr id="37" name="Shape 25"/>
+          <p:cNvSpPr/>
+          <p:nvPr/>
+        </p:nvSpPr>
+        <p:spPr>
+          <a:xfrm>
+            <a:off x="6492240" y="4590288"/>
             <a:ext cx="530352" cy="530352"/>
           </a:xfrm>
           <a:prstGeom prst="ellipse">
@@ -7366,10 +7711,17 @@
           </a:solidFill>
           <a:ln/>
         </p:spPr>
+        <p:txBody>
+          <a:bodyPr/>
+          <a:lstStyle/>
+          <a:p>
+            <a:endParaRPr lang="en-IN"/>
+          </a:p>
+        </p:txBody>
       </p:sp>
       <p:pic>
         <p:nvPicPr>
-          <p:cNvPr id="44" name="Image 12" descr="/home/claude/studygenie/icons/filepdf_blush.png">    </p:cNvPr>
+          <p:cNvPr id="38" name="Image 10" descr="/home/claude/studygenie/icons/key_blush.png"/>
           <p:cNvPicPr>
             <a:picLocks noChangeAspect="1"/>
           </p:cNvPicPr>
@@ -7383,7 +7735,7 @@
         </p:blipFill>
         <p:spPr>
           <a:xfrm>
-            <a:off x="6611112" y="5952744"/>
+            <a:off x="6611112" y="4709160"/>
             <a:ext cx="292608" cy="292608"/>
           </a:xfrm>
           <a:prstGeom prst="rect">
@@ -7393,13 +7745,13 @@
       </p:pic>
       <p:sp>
         <p:nvSpPr>
-          <p:cNvPr id="45" name="Text 30"/>
-          <p:cNvSpPr/>
-          <p:nvPr/>
-        </p:nvSpPr>
-        <p:spPr>
-          <a:xfrm>
-            <a:off x="7159752" y="5833872"/>
+          <p:cNvPr id="39" name="Text 26"/>
+          <p:cNvSpPr/>
+          <p:nvPr/>
+        </p:nvSpPr>
+        <p:spPr>
+          <a:xfrm>
+            <a:off x="7159752" y="4590288"/>
             <a:ext cx="4297680" cy="530352"/>
           </a:xfrm>
           <a:prstGeom prst="rect">
@@ -7412,11 +7764,11 @@
           <a:bodyPr wrap="square" rtlCol="0" anchor="ctr"/>
           <a:lstStyle/>
           <a:p>
-            <a:pPr indent="0" marL="0">
+            <a:pPr marL="0" indent="0">
               <a:buNone/>
             </a:pPr>
             <a:r>
-              <a:rPr lang="en-US" sz="1300" b="1" dirty="0">
+              <a:rPr lang="en-US" sz="2400" b="1" dirty="0">
                 <a:solidFill>
                   <a:srgbClr val="2B2340"/>
                 </a:solidFill>
@@ -7424,9 +7776,189 @@
                 <a:ea typeface="Calibri" pitchFamily="34" charset="-122"/>
                 <a:cs typeface="Calibri" pitchFamily="34" charset="-120"/>
               </a:rPr>
+              <a:t>Answer Key</a:t>
+            </a:r>
+            <a:endParaRPr lang="en-US" sz="2400" dirty="0"/>
+          </a:p>
+        </p:txBody>
+      </p:sp>
+      <p:sp>
+        <p:nvSpPr>
+          <p:cNvPr id="40" name="Shape 27"/>
+          <p:cNvSpPr/>
+          <p:nvPr/>
+        </p:nvSpPr>
+        <p:spPr>
+          <a:xfrm>
+            <a:off x="6492240" y="5212080"/>
+            <a:ext cx="530352" cy="530352"/>
+          </a:xfrm>
+          <a:prstGeom prst="ellipse">
+            <a:avLst/>
+          </a:prstGeom>
+          <a:solidFill>
+            <a:srgbClr val="F7E6E0"/>
+          </a:solidFill>
+          <a:ln/>
+        </p:spPr>
+        <p:txBody>
+          <a:bodyPr/>
+          <a:lstStyle/>
+          <a:p>
+            <a:endParaRPr lang="en-IN"/>
+          </a:p>
+        </p:txBody>
+      </p:sp>
+      <p:pic>
+        <p:nvPicPr>
+          <p:cNvPr id="41" name="Image 11" descr="/home/claude/studygenie/icons/question_blush.png"/>
+          <p:cNvPicPr>
+            <a:picLocks noChangeAspect="1"/>
+          </p:cNvPicPr>
+          <p:nvPr/>
+        </p:nvPicPr>
+        <p:blipFill>
+          <a:blip r:embed="rId14"/>
+          <a:stretch>
+            <a:fillRect/>
+          </a:stretch>
+        </p:blipFill>
+        <p:spPr>
+          <a:xfrm>
+            <a:off x="6611112" y="5330952"/>
+            <a:ext cx="292608" cy="292608"/>
+          </a:xfrm>
+          <a:prstGeom prst="rect">
+            <a:avLst/>
+          </a:prstGeom>
+        </p:spPr>
+      </p:pic>
+      <p:sp>
+        <p:nvSpPr>
+          <p:cNvPr id="42" name="Text 28"/>
+          <p:cNvSpPr/>
+          <p:nvPr/>
+        </p:nvSpPr>
+        <p:spPr>
+          <a:xfrm>
+            <a:off x="7159752" y="5212080"/>
+            <a:ext cx="4297680" cy="530352"/>
+          </a:xfrm>
+          <a:prstGeom prst="rect">
+            <a:avLst/>
+          </a:prstGeom>
+          <a:noFill/>
+          <a:ln/>
+        </p:spPr>
+        <p:txBody>
+          <a:bodyPr wrap="square" rtlCol="0" anchor="ctr"/>
+          <a:lstStyle/>
+          <a:p>
+            <a:pPr marL="0" indent="0">
+              <a:buNone/>
+            </a:pPr>
+            <a:r>
+              <a:rPr lang="en-US" sz="2400" b="1" dirty="0">
+                <a:solidFill>
+                  <a:srgbClr val="2B2340"/>
+                </a:solidFill>
+                <a:latin typeface="Calibri" pitchFamily="34" charset="0"/>
+                <a:ea typeface="Calibri" pitchFamily="34" charset="-122"/>
+                <a:cs typeface="Calibri" pitchFamily="34" charset="-120"/>
+              </a:rPr>
+              <a:t>AI Doubt Solver Response</a:t>
+            </a:r>
+            <a:endParaRPr lang="en-US" sz="2400" dirty="0"/>
+          </a:p>
+        </p:txBody>
+      </p:sp>
+      <p:sp>
+        <p:nvSpPr>
+          <p:cNvPr id="43" name="Shape 29"/>
+          <p:cNvSpPr/>
+          <p:nvPr/>
+        </p:nvSpPr>
+        <p:spPr>
+          <a:xfrm>
+            <a:off x="6492240" y="5833872"/>
+            <a:ext cx="530352" cy="530352"/>
+          </a:xfrm>
+          <a:prstGeom prst="ellipse">
+            <a:avLst/>
+          </a:prstGeom>
+          <a:solidFill>
+            <a:srgbClr val="F7E6E0"/>
+          </a:solidFill>
+          <a:ln/>
+        </p:spPr>
+        <p:txBody>
+          <a:bodyPr/>
+          <a:lstStyle/>
+          <a:p>
+            <a:endParaRPr lang="en-IN"/>
+          </a:p>
+        </p:txBody>
+      </p:sp>
+      <p:pic>
+        <p:nvPicPr>
+          <p:cNvPr id="44" name="Image 12" descr="/home/claude/studygenie/icons/filepdf_blush.png"/>
+          <p:cNvPicPr>
+            <a:picLocks noChangeAspect="1"/>
+          </p:cNvPicPr>
+          <p:nvPr/>
+        </p:nvPicPr>
+        <p:blipFill>
+          <a:blip r:embed="rId8"/>
+          <a:stretch>
+            <a:fillRect/>
+          </a:stretch>
+        </p:blipFill>
+        <p:spPr>
+          <a:xfrm>
+            <a:off x="6611112" y="5952744"/>
+            <a:ext cx="292608" cy="292608"/>
+          </a:xfrm>
+          <a:prstGeom prst="rect">
+            <a:avLst/>
+          </a:prstGeom>
+        </p:spPr>
+      </p:pic>
+      <p:sp>
+        <p:nvSpPr>
+          <p:cNvPr id="45" name="Text 30"/>
+          <p:cNvSpPr/>
+          <p:nvPr/>
+        </p:nvSpPr>
+        <p:spPr>
+          <a:xfrm>
+            <a:off x="7159752" y="5889858"/>
+            <a:ext cx="4297680" cy="530352"/>
+          </a:xfrm>
+          <a:prstGeom prst="rect">
+            <a:avLst/>
+          </a:prstGeom>
+          <a:noFill/>
+          <a:ln/>
+        </p:spPr>
+        <p:txBody>
+          <a:bodyPr wrap="square" rtlCol="0" anchor="ctr"/>
+          <a:lstStyle/>
+          <a:p>
+            <a:pPr marL="0" indent="0">
+              <a:buNone/>
+            </a:pPr>
+            <a:r>
+              <a:rPr lang="en-US" sz="2400" b="1" dirty="0">
+                <a:solidFill>
+                  <a:srgbClr val="2B2340"/>
+                </a:solidFill>
+                <a:latin typeface="Calibri" pitchFamily="34" charset="0"/>
+                <a:ea typeface="Calibri" pitchFamily="34" charset="-122"/>
+                <a:cs typeface="Calibri" pitchFamily="34" charset="-120"/>
+              </a:rPr>
               <a:t>Downloadable PDF Report (optional)</a:t>
             </a:r>
-            <a:endParaRPr lang="en-US" sz="1300" dirty="0"/>
+            <a:endParaRPr lang="en-US" sz="2400" dirty="0"/>
           </a:p>
         </p:txBody>
       </p:sp>
@@ -7435,6 +7967,18 @@
   <p:clrMapOvr>
     <a:masterClrMapping/>
   </p:clrMapOvr>
+  <mc:AlternateContent xmlns:mc="http://schemas.openxmlformats.org/markup-compatibility/2006" xmlns:p159="http://schemas.microsoft.com/office/powerpoint/2015/09/main">
+    <mc:Choice Requires="p159">
+      <p:transition xmlns:p14="http://schemas.microsoft.com/office/powerpoint/2010/main" spd="slow" p14:dur="2000">
+        <p159:morph option="byObject"/>
+      </p:transition>
+    </mc:Choice>
+    <mc:Fallback xmlns="">
+      <p:transition spd="slow">
+        <p:fade/>
+      </p:transition>
+    </mc:Fallback>
+  </mc:AlternateContent>
 </p:sld>
 </file>
 
@@ -7446,6 +7990,7 @@
         <a:solidFill>
           <a:srgbClr val="2D2150"/>
         </a:solidFill>
+        <a:effectLst/>
       </p:bgPr>
     </p:bg>
     <p:spTree>
@@ -7483,6 +8028,13 @@
           </a:solidFill>
           <a:ln/>
         </p:spPr>
+        <p:txBody>
+          <a:bodyPr/>
+          <a:lstStyle/>
+          <a:p>
+            <a:endParaRPr lang="en-IN"/>
+          </a:p>
+        </p:txBody>
       </p:sp>
       <p:sp>
         <p:nvSpPr>
@@ -7505,6 +8057,13 @@
           </a:solidFill>
           <a:ln/>
         </p:spPr>
+        <p:txBody>
+          <a:bodyPr/>
+          <a:lstStyle/>
+          <a:p>
+            <a:endParaRPr lang="en-IN"/>
+          </a:p>
+        </p:txBody>
       </p:sp>
       <p:sp>
         <p:nvSpPr>
@@ -7527,7 +8086,7 @@
           <a:bodyPr wrap="square" rtlCol="0" anchor="ctr"/>
           <a:lstStyle/>
           <a:p>
-            <a:pPr indent="0" marL="0">
+            <a:pPr marL="0" indent="0">
               <a:buNone/>
             </a:pPr>
             <a:r>
@@ -7564,17 +8123,24 @@
           </a:solidFill>
           <a:ln/>
         </p:spPr>
+        <p:txBody>
+          <a:bodyPr/>
+          <a:lstStyle/>
+          <a:p>
+            <a:endParaRPr lang="en-IN"/>
+          </a:p>
+        </p:txBody>
       </p:sp>
       <p:pic>
         <p:nvPicPr>
-          <p:cNvPr id="6" name="Image 0" descr="/home/claude/studygenie/icons/graduate_peach.png">    </p:cNvPr>
+          <p:cNvPr id="6" name="Image 0" descr="/home/claude/studygenie/icons/graduate_peach.png"/>
           <p:cNvPicPr>
             <a:picLocks noChangeAspect="1"/>
           </p:cNvPicPr>
           <p:nvPr/>
         </p:nvPicPr>
         <p:blipFill>
-          <a:blip r:embed="rId1"/>
+          <a:blip r:embed="rId3"/>
           <a:stretch>
             <a:fillRect/>
           </a:stretch>
@@ -7610,14 +8176,14 @@
           <a:bodyPr wrap="square" rtlCol="0" anchor="ctr"/>
           <a:lstStyle/>
           <a:p>
-            <a:pPr indent="0" marL="0">
+            <a:pPr marL="0" indent="0">
               <a:lnSpc>
                 <a:spcPct val="125000"/>
               </a:lnSpc>
               <a:buNone/>
             </a:pPr>
             <a:r>
-              <a:rPr lang="en-US" sz="1550" dirty="0">
+              <a:rPr lang="en-US" sz="2400" dirty="0">
                 <a:solidFill>
                   <a:srgbClr val="E4DBF5"/>
                 </a:solidFill>
@@ -7627,7 +8193,7 @@
               </a:rPr>
               <a:t>StudyGenie AI simplifies exam preparation by combining study planning, concept explanation, revision support, quiz generation, and doubt solving into a single AI-powered platform.</a:t>
             </a:r>
-            <a:endParaRPr lang="en-US" sz="1550" dirty="0"/>
+            <a:endParaRPr lang="en-US" sz="2400" dirty="0"/>
           </a:p>
         </p:txBody>
       </p:sp>
@@ -7650,17 +8216,24 @@
           </a:solidFill>
           <a:ln/>
         </p:spPr>
+        <p:txBody>
+          <a:bodyPr/>
+          <a:lstStyle/>
+          <a:p>
+            <a:endParaRPr lang="en-IN"/>
+          </a:p>
+        </p:txBody>
       </p:sp>
       <p:pic>
         <p:nvPicPr>
-          <p:cNvPr id="9" name="Image 1" descr="/home/claude/studygenie/icons/brain_peach.png">    </p:cNvPr>
+          <p:cNvPr id="9" name="Image 1" descr="/home/claude/studygenie/icons/brain_peach.png"/>
           <p:cNvPicPr>
             <a:picLocks noChangeAspect="1"/>
           </p:cNvPicPr>
           <p:nvPr/>
         </p:nvPicPr>
         <p:blipFill>
-          <a:blip r:embed="rId2"/>
+          <a:blip r:embed="rId4"/>
           <a:stretch>
             <a:fillRect/>
           </a:stretch>
@@ -7696,14 +8269,14 @@
           <a:bodyPr wrap="square" rtlCol="0" anchor="ctr"/>
           <a:lstStyle/>
           <a:p>
-            <a:pPr indent="0" marL="0">
+            <a:pPr marL="0" indent="0">
               <a:lnSpc>
                 <a:spcPct val="125000"/>
               </a:lnSpc>
               <a:buNone/>
             </a:pPr>
             <a:r>
-              <a:rPr lang="en-US" sz="1550" dirty="0">
+              <a:rPr lang="en-US" sz="2400" dirty="0">
                 <a:solidFill>
                   <a:srgbClr val="E4DBF5"/>
                 </a:solidFill>
@@ -7713,7 +8286,7 @@
               </a:rPr>
               <a:t>The project demonstrates the practical use of Python and Generative AI to enhance personalized learning and improve students' productivity.</a:t>
             </a:r>
-            <a:endParaRPr lang="en-US" sz="1550" dirty="0"/>
+            <a:endParaRPr lang="en-US" sz="2400" dirty="0"/>
           </a:p>
         </p:txBody>
       </p:sp>
@@ -7738,6 +8311,13 @@
           </a:solidFill>
           <a:ln/>
         </p:spPr>
+        <p:txBody>
+          <a:bodyPr/>
+          <a:lstStyle/>
+          <a:p>
+            <a:endParaRPr lang="en-IN"/>
+          </a:p>
+        </p:txBody>
       </p:sp>
       <p:sp>
         <p:nvSpPr>
@@ -7760,11 +8340,11 @@
           <a:bodyPr wrap="square" rtlCol="0" anchor="ctr"/>
           <a:lstStyle/>
           <a:p>
-            <a:pPr algn="ctr" indent="0" marL="0">
+            <a:pPr marL="0" indent="0" algn="ctr">
               <a:buNone/>
             </a:pPr>
             <a:r>
-              <a:rPr lang="en-US" sz="1500" i="1" dirty="0">
+              <a:rPr lang="en-US" sz="2800" i="1" dirty="0">
                 <a:solidFill>
                   <a:srgbClr val="F6C89F"/>
                 </a:solidFill>
@@ -7772,7 +8352,18 @@
                 <a:ea typeface="Cambria" pitchFamily="34" charset="-122"/>
                 <a:cs typeface="Cambria" pitchFamily="34" charset="-120"/>
               </a:rPr>
-              <a:t>One AI companion — from planning to practice to doubt-clearing.</a:t>
+              <a:t>One AI companion — from planning to practice to doubt-clearing</a:t>
+            </a:r>
+            <a:r>
+              <a:rPr lang="en-US" sz="1500" i="1" dirty="0">
+                <a:solidFill>
+                  <a:srgbClr val="F6C89F"/>
+                </a:solidFill>
+                <a:latin typeface="Cambria" pitchFamily="34" charset="0"/>
+                <a:ea typeface="Cambria" pitchFamily="34" charset="-122"/>
+                <a:cs typeface="Cambria" pitchFamily="34" charset="-120"/>
+              </a:rPr>
+              <a:t>.</a:t>
             </a:r>
             <a:endParaRPr lang="en-US" sz="1500" dirty="0"/>
           </a:p>
@@ -7783,6 +8374,18 @@
   <p:clrMapOvr>
     <a:masterClrMapping/>
   </p:clrMapOvr>
+  <mc:AlternateContent xmlns:mc="http://schemas.openxmlformats.org/markup-compatibility/2006" xmlns:p159="http://schemas.microsoft.com/office/powerpoint/2015/09/main">
+    <mc:Choice Requires="p159">
+      <p:transition xmlns:p14="http://schemas.microsoft.com/office/powerpoint/2010/main" spd="slow" p14:dur="2000">
+        <p159:morph option="byObject"/>
+      </p:transition>
+    </mc:Choice>
+    <mc:Fallback xmlns="">
+      <p:transition spd="slow">
+        <p:fade/>
+      </p:transition>
+    </mc:Fallback>
+  </mc:AlternateContent>
 </p:sld>
 </file>
 
@@ -7794,6 +8397,7 @@
         <a:solidFill>
           <a:srgbClr val="2D2150"/>
         </a:solidFill>
+        <a:effectLst/>
       </p:bgPr>
     </p:bg>
     <p:spTree>
@@ -7831,6 +8435,13 @@
           </a:solidFill>
           <a:ln/>
         </p:spPr>
+        <p:txBody>
+          <a:bodyPr/>
+          <a:lstStyle/>
+          <a:p>
+            <a:endParaRPr lang="en-IN"/>
+          </a:p>
+        </p:txBody>
       </p:sp>
       <p:sp>
         <p:nvSpPr>
@@ -7853,6 +8464,13 @@
           </a:solidFill>
           <a:ln/>
         </p:spPr>
+        <p:txBody>
+          <a:bodyPr/>
+          <a:lstStyle/>
+          <a:p>
+            <a:endParaRPr lang="en-IN"/>
+          </a:p>
+        </p:txBody>
       </p:sp>
       <p:sp>
         <p:nvSpPr>
@@ -7873,17 +8491,24 @@
           </a:solidFill>
           <a:ln/>
         </p:spPr>
+        <p:txBody>
+          <a:bodyPr/>
+          <a:lstStyle/>
+          <a:p>
+            <a:endParaRPr lang="en-IN"/>
+          </a:p>
+        </p:txBody>
       </p:sp>
       <p:pic>
         <p:nvPicPr>
-          <p:cNvPr id="5" name="Image 0" descr="/home/claude/studygenie/icons/handshake_peach.png">    </p:cNvPr>
+          <p:cNvPr id="5" name="Image 0" descr="/home/claude/studygenie/icons/handshake_peach.png"/>
           <p:cNvPicPr>
             <a:picLocks noChangeAspect="1"/>
           </p:cNvPicPr>
           <p:nvPr/>
         </p:nvPicPr>
         <p:blipFill>
-          <a:blip r:embed="rId1"/>
+          <a:blip r:embed="rId3"/>
           <a:stretch>
             <a:fillRect/>
           </a:stretch>
@@ -7919,7 +8544,7 @@
           <a:bodyPr wrap="square" rtlCol="0" anchor="ctr"/>
           <a:lstStyle/>
           <a:p>
-            <a:pPr algn="ctr" indent="0" marL="0">
+            <a:pPr marL="0" indent="0" algn="ctr">
               <a:buNone/>
             </a:pPr>
             <a:r>
@@ -7958,11 +8583,11 @@
           <a:bodyPr wrap="square" rtlCol="0" anchor="ctr"/>
           <a:lstStyle/>
           <a:p>
-            <a:pPr algn="ctr" indent="0" marL="0">
+            <a:pPr marL="0" indent="0" algn="ctr">
               <a:buNone/>
             </a:pPr>
             <a:r>
-              <a:rPr lang="en-US" sz="1600" dirty="0">
+              <a:rPr lang="en-US" sz="2800" dirty="0">
                 <a:solidFill>
                   <a:srgbClr val="D9CFF0"/>
                 </a:solidFill>
@@ -7970,7 +8595,18 @@
                 <a:ea typeface="Calibri" pitchFamily="34" charset="-122"/>
                 <a:cs typeface="Calibri" pitchFamily="34" charset="-120"/>
               </a:rPr>
-              <a:t>Questions and feedback are welcome.</a:t>
+              <a:t>Questions and feedback are welcome</a:t>
+            </a:r>
+            <a:r>
+              <a:rPr lang="en-US" sz="1600" dirty="0">
+                <a:solidFill>
+                  <a:srgbClr val="D9CFF0"/>
+                </a:solidFill>
+                <a:latin typeface="Calibri" pitchFamily="34" charset="0"/>
+                <a:ea typeface="Calibri" pitchFamily="34" charset="-122"/>
+                <a:cs typeface="Calibri" pitchFamily="34" charset="-120"/>
+              </a:rPr>
+              <a:t>.</a:t>
             </a:r>
             <a:endParaRPr lang="en-US" sz="1600" dirty="0"/>
           </a:p>
@@ -7998,6 +8634,13 @@
             <a:prstDash val="solid"/>
           </a:ln>
         </p:spPr>
+        <p:txBody>
+          <a:bodyPr/>
+          <a:lstStyle/>
+          <a:p>
+            <a:endParaRPr lang="en-IN"/>
+          </a:p>
+        </p:txBody>
       </p:sp>
       <p:sp>
         <p:nvSpPr>
@@ -8020,11 +8663,11 @@
           <a:bodyPr wrap="square" rtlCol="0" anchor="ctr"/>
           <a:lstStyle/>
           <a:p>
-            <a:pPr algn="ctr" indent="0" marL="0">
+            <a:pPr marL="0" indent="0" algn="ctr">
               <a:buNone/>
             </a:pPr>
             <a:r>
-              <a:rPr lang="en-US" sz="1700" b="1" dirty="0">
+              <a:rPr lang="en-US" sz="2400" b="1" dirty="0">
                 <a:solidFill>
                   <a:srgbClr val="FFFFFF"/>
                 </a:solidFill>
@@ -8034,7 +8677,7 @@
               </a:rPr>
               <a:t>StudyGenie AI</a:t>
             </a:r>
-            <a:endParaRPr lang="en-US" sz="1700" dirty="0"/>
+            <a:endParaRPr lang="en-US" sz="2400" dirty="0"/>
           </a:p>
         </p:txBody>
       </p:sp>
@@ -8046,7 +8689,7 @@
         </p:nvSpPr>
         <p:spPr>
           <a:xfrm>
-            <a:off x="457200" y="5074920"/>
+            <a:off x="457200" y="5141595"/>
             <a:ext cx="11247120" cy="365760"/>
           </a:xfrm>
           <a:prstGeom prst="rect">
@@ -8059,11 +8702,11 @@
           <a:bodyPr wrap="square" rtlCol="0" anchor="ctr"/>
           <a:lstStyle/>
           <a:p>
-            <a:pPr algn="ctr" indent="0" marL="0">
+            <a:pPr marL="0" indent="0" algn="ctr">
               <a:buNone/>
             </a:pPr>
             <a:r>
-              <a:rPr lang="en-US" sz="1300" dirty="0">
+              <a:rPr lang="en-US" sz="2000" dirty="0">
                 <a:solidFill>
                   <a:srgbClr val="D9CFF0"/>
                 </a:solidFill>
@@ -8073,7 +8716,7 @@
               </a:rPr>
               <a:t>Python with Generative AI (VAC)</a:t>
             </a:r>
-            <a:endParaRPr lang="en-US" sz="1300" dirty="0"/>
+            <a:endParaRPr lang="en-US" sz="2000" dirty="0"/>
           </a:p>
         </p:txBody>
       </p:sp>
@@ -8082,6 +8725,18 @@
   <p:clrMapOvr>
     <a:masterClrMapping/>
   </p:clrMapOvr>
+  <mc:AlternateContent xmlns:mc="http://schemas.openxmlformats.org/markup-compatibility/2006" xmlns:p15="http://schemas.microsoft.com/office/powerpoint/2012/main">
+    <mc:Choice Requires="p15">
+      <p:transition xmlns:p14="http://schemas.microsoft.com/office/powerpoint/2010/main" spd="slow" p14:dur="1250">
+        <p15:prstTrans prst="airplane"/>
+      </p:transition>
+    </mc:Choice>
+    <mc:Fallback xmlns="">
+      <p:transition spd="slow">
+        <p:fade/>
+      </p:transition>
+    </mc:Fallback>
+  </mc:AlternateContent>
 </p:sld>
 </file>
 
@@ -8378,4 +9033,319 @@
     </a:ext>
   </a:extLst>
 </a:theme>
+</file>
+
+<file path=ppt/theme/theme2.xml><?xml version="1.0" encoding="utf-8"?>
+<a:theme xmlns:a="http://schemas.openxmlformats.org/drawingml/2006/main" name="Office Theme">
+  <a:themeElements>
+    <a:clrScheme name="Office">
+      <a:dk1>
+        <a:sysClr val="windowText" lastClr="000000"/>
+      </a:dk1>
+      <a:lt1>
+        <a:sysClr val="window" lastClr="FFFFFF"/>
+      </a:lt1>
+      <a:dk2>
+        <a:srgbClr val="0E2841"/>
+      </a:dk2>
+      <a:lt2>
+        <a:srgbClr val="E8E8E8"/>
+      </a:lt2>
+      <a:accent1>
+        <a:srgbClr val="156082"/>
+      </a:accent1>
+      <a:accent2>
+        <a:srgbClr val="E97132"/>
+      </a:accent2>
+      <a:accent3>
+        <a:srgbClr val="196B24"/>
+      </a:accent3>
+      <a:accent4>
+        <a:srgbClr val="0F9ED5"/>
+      </a:accent4>
+      <a:accent5>
+        <a:srgbClr val="A02B93"/>
+      </a:accent5>
+      <a:accent6>
+        <a:srgbClr val="4EA72E"/>
+      </a:accent6>
+      <a:hlink>
+        <a:srgbClr val="467886"/>
+      </a:hlink>
+      <a:folHlink>
+        <a:srgbClr val="96607D"/>
+      </a:folHlink>
+    </a:clrScheme>
+    <a:fontScheme name="Office">
+      <a:majorFont>
+        <a:latin typeface="Aptos Display" panose="02110004020202020204"/>
+        <a:ea typeface=""/>
+        <a:cs typeface=""/>
+        <a:font script="Jpan" typeface="游ゴシック Light"/>
+        <a:font script="Hang" typeface="맑은 고딕"/>
+        <a:font script="Hans" typeface="等线 Light"/>
+        <a:font script="Hant" typeface="新細明體"/>
+        <a:font script="Arab" typeface="Times New Roman"/>
+        <a:font script="Hebr" typeface="Times New Roman"/>
+        <a:font script="Thai" typeface="Angsana New"/>
+        <a:font script="Ethi" typeface="Nyala"/>
+        <a:font script="Beng" typeface="Vrinda"/>
+        <a:font script="Gujr" typeface="Shruti"/>
+        <a:font script="Khmr" typeface="MoolBoran"/>
+        <a:font script="Knda" typeface="Tunga"/>
+        <a:font script="Guru" typeface="Raavi"/>
+        <a:font script="Cans" typeface="Euphemia"/>
+        <a:font script="Cher" typeface="Plantagenet Cherokee"/>
+        <a:font script="Yiii" typeface="Microsoft Yi Baiti"/>
+        <a:font script="Tibt" typeface="Microsoft Himalaya"/>
+        <a:font script="Thaa" typeface="MV Boli"/>
+        <a:font script="Deva" typeface="Mangal"/>
+        <a:font script="Telu" typeface="Gautami"/>
+        <a:font script="Taml" typeface="Latha"/>
+        <a:font script="Syrc" typeface="Estrangelo Edessa"/>
+        <a:font script="Orya" typeface="Kalinga"/>
+        <a:font script="Mlym" typeface="Kartika"/>
+        <a:font script="Laoo" typeface="DokChampa"/>
+        <a:font script="Sinh" typeface="Iskoola Pota"/>
+        <a:font script="Mong" typeface="Mongolian Baiti"/>
+        <a:font script="Viet" typeface="Times New Roman"/>
+        <a:font script="Uigh" typeface="Microsoft Uighur"/>
+        <a:font script="Geor" typeface="Sylfaen"/>
+        <a:font script="Armn" typeface="Arial"/>
+        <a:font script="Bugi" typeface="Leelawadee UI"/>
+        <a:font script="Bopo" typeface="Microsoft JhengHei"/>
+        <a:font script="Java" typeface="Javanese Text"/>
+        <a:font script="Lisu" typeface="Segoe UI"/>
+        <a:font script="Mymr" typeface="Myanmar Text"/>
+        <a:font script="Nkoo" typeface="Ebrima"/>
+        <a:font script="Olck" typeface="Nirmala UI"/>
+        <a:font script="Osma" typeface="Ebrima"/>
+        <a:font script="Phag" typeface="Phagspa"/>
+        <a:font script="Syrn" typeface="Estrangelo Edessa"/>
+        <a:font script="Syrj" typeface="Estrangelo Edessa"/>
+        <a:font script="Syre" typeface="Estrangelo Edessa"/>
+        <a:font script="Sora" typeface="Nirmala UI"/>
+        <a:font script="Tale" typeface="Microsoft Tai Le"/>
+        <a:font script="Talu" typeface="Microsoft New Tai Lue"/>
+        <a:font script="Tfng" typeface="Ebrima"/>
+      </a:majorFont>
+      <a:minorFont>
+        <a:latin typeface="Aptos" panose="02110004020202020204"/>
+        <a:ea typeface=""/>
+        <a:cs typeface=""/>
+        <a:font script="Jpan" typeface="游ゴシック"/>
+        <a:font script="Hang" typeface="맑은 고딕"/>
+        <a:font script="Hans" typeface="等线"/>
+        <a:font script="Hant" typeface="新細明體"/>
+        <a:font script="Arab" typeface="Arial"/>
+        <a:font script="Hebr" typeface="Arial"/>
+        <a:font script="Thai" typeface="Cordia New"/>
+        <a:font script="Ethi" typeface="Nyala"/>
+        <a:font script="Beng" typeface="Vrinda"/>
+        <a:font script="Gujr" typeface="Shruti"/>
+        <a:font script="Khmr" typeface="DaunPenh"/>
+        <a:font script="Knda" typeface="Tunga"/>
+        <a:font script="Guru" typeface="Raavi"/>
+        <a:font script="Cans" typeface="Euphemia"/>
+        <a:font script="Cher" typeface="Plantagenet Cherokee"/>
+        <a:font script="Yiii" typeface="Microsoft Yi Baiti"/>
+        <a:font script="Tibt" typeface="Microsoft Himalaya"/>
+        <a:font script="Thaa" typeface="MV Boli"/>
+        <a:font script="Deva" typeface="Mangal"/>
+        <a:font script="Telu" typeface="Gautami"/>
+        <a:font script="Taml" typeface="Latha"/>
+        <a:font script="Syrc" typeface="Estrangelo Edessa"/>
+        <a:font script="Orya" typeface="Kalinga"/>
+        <a:font script="Mlym" typeface="Kartika"/>
+        <a:font script="Laoo" typeface="DokChampa"/>
+        <a:font script="Sinh" typeface="Iskoola Pota"/>
+        <a:font script="Mong" typeface="Mongolian Baiti"/>
+        <a:font script="Viet" typeface="Arial"/>
+        <a:font script="Uigh" typeface="Microsoft Uighur"/>
+        <a:font script="Geor" typeface="Sylfaen"/>
+        <a:font script="Armn" typeface="Arial"/>
+        <a:font script="Bugi" typeface="Leelawadee UI"/>
+        <a:font script="Bopo" typeface="Microsoft JhengHei"/>
+        <a:font script="Java" typeface="Javanese Text"/>
+        <a:font script="Lisu" typeface="Segoe UI"/>
+        <a:font script="Mymr" typeface="Myanmar Text"/>
+        <a:font script="Nkoo" typeface="Ebrima"/>
+        <a:font script="Olck" typeface="Nirmala UI"/>
+        <a:font script="Osma" typeface="Ebrima"/>
+        <a:font script="Phag" typeface="Phagspa"/>
+        <a:font script="Syrn" typeface="Estrangelo Edessa"/>
+        <a:font script="Syrj" typeface="Estrangelo Edessa"/>
+        <a:font script="Syre" typeface="Estrangelo Edessa"/>
+        <a:font script="Sora" typeface="Nirmala UI"/>
+        <a:font script="Tale" typeface="Microsoft Tai Le"/>
+        <a:font script="Talu" typeface="Microsoft New Tai Lue"/>
+        <a:font script="Tfng" typeface="Ebrima"/>
+      </a:minorFont>
+    </a:fontScheme>
+    <a:fmtScheme name="Office">
+      <a:fillStyleLst>
+        <a:solidFill>
+          <a:schemeClr val="phClr"/>
+        </a:solidFill>
+        <a:gradFill rotWithShape="1">
+          <a:gsLst>
+            <a:gs pos="0">
+              <a:schemeClr val="phClr">
+                <a:lumMod val="110000"/>
+                <a:satMod val="105000"/>
+                <a:tint val="67000"/>
+              </a:schemeClr>
+            </a:gs>
+            <a:gs pos="50000">
+              <a:schemeClr val="phClr">
+                <a:lumMod val="105000"/>
+                <a:satMod val="103000"/>
+                <a:tint val="73000"/>
+              </a:schemeClr>
+            </a:gs>
+            <a:gs pos="100000">
+              <a:schemeClr val="phClr">
+                <a:lumMod val="105000"/>
+                <a:satMod val="109000"/>
+                <a:tint val="81000"/>
+              </a:schemeClr>
+            </a:gs>
+          </a:gsLst>
+          <a:lin ang="5400000" scaled="0"/>
+        </a:gradFill>
+        <a:gradFill rotWithShape="1">
+          <a:gsLst>
+            <a:gs pos="0">
+              <a:schemeClr val="phClr">
+                <a:satMod val="103000"/>
+                <a:lumMod val="102000"/>
+                <a:tint val="94000"/>
+              </a:schemeClr>
+            </a:gs>
+            <a:gs pos="50000">
+              <a:schemeClr val="phClr">
+                <a:satMod val="110000"/>
+                <a:lumMod val="100000"/>
+                <a:shade val="100000"/>
+              </a:schemeClr>
+            </a:gs>
+            <a:gs pos="100000">
+              <a:schemeClr val="phClr">
+                <a:lumMod val="99000"/>
+                <a:satMod val="120000"/>
+                <a:shade val="78000"/>
+              </a:schemeClr>
+            </a:gs>
+          </a:gsLst>
+          <a:lin ang="5400000" scaled="0"/>
+        </a:gradFill>
+      </a:fillStyleLst>
+      <a:lnStyleLst>
+        <a:ln w="12700" cap="flat" cmpd="sng" algn="ctr">
+          <a:solidFill>
+            <a:schemeClr val="phClr"/>
+          </a:solidFill>
+          <a:prstDash val="solid"/>
+          <a:miter lim="800000"/>
+        </a:ln>
+        <a:ln w="19050" cap="flat" cmpd="sng" algn="ctr">
+          <a:solidFill>
+            <a:schemeClr val="phClr"/>
+          </a:solidFill>
+          <a:prstDash val="solid"/>
+          <a:miter lim="800000"/>
+        </a:ln>
+        <a:ln w="25400" cap="flat" cmpd="sng" algn="ctr">
+          <a:solidFill>
+            <a:schemeClr val="phClr"/>
+          </a:solidFill>
+          <a:prstDash val="solid"/>
+          <a:miter lim="800000"/>
+        </a:ln>
+      </a:lnStyleLst>
+      <a:effectStyleLst>
+        <a:effectStyle>
+          <a:effectLst/>
+        </a:effectStyle>
+        <a:effectStyle>
+          <a:effectLst/>
+        </a:effectStyle>
+        <a:effectStyle>
+          <a:effectLst>
+            <a:outerShdw blurRad="57150" dist="19050" dir="5400000" algn="ctr" rotWithShape="0">
+              <a:srgbClr val="000000">
+                <a:alpha val="63000"/>
+              </a:srgbClr>
+            </a:outerShdw>
+          </a:effectLst>
+        </a:effectStyle>
+      </a:effectStyleLst>
+      <a:bgFillStyleLst>
+        <a:solidFill>
+          <a:schemeClr val="phClr"/>
+        </a:solidFill>
+        <a:solidFill>
+          <a:schemeClr val="phClr">
+            <a:tint val="95000"/>
+            <a:satMod val="170000"/>
+          </a:schemeClr>
+        </a:solidFill>
+        <a:gradFill rotWithShape="1">
+          <a:gsLst>
+            <a:gs pos="0">
+              <a:schemeClr val="phClr">
+                <a:tint val="93000"/>
+                <a:satMod val="150000"/>
+                <a:shade val="98000"/>
+                <a:lumMod val="102000"/>
+              </a:schemeClr>
+            </a:gs>
+            <a:gs pos="50000">
+              <a:schemeClr val="phClr">
+                <a:tint val="98000"/>
+                <a:satMod val="130000"/>
+                <a:shade val="90000"/>
+                <a:lumMod val="103000"/>
+              </a:schemeClr>
+            </a:gs>
+            <a:gs pos="100000">
+              <a:schemeClr val="phClr">
+                <a:shade val="63000"/>
+                <a:satMod val="120000"/>
+              </a:schemeClr>
+            </a:gs>
+          </a:gsLst>
+          <a:lin ang="5400000" scaled="0"/>
+        </a:gradFill>
+      </a:bgFillStyleLst>
+    </a:fmtScheme>
+  </a:themeElements>
+  <a:objectDefaults>
+    <a:lnDef>
+      <a:spPr/>
+      <a:bodyPr/>
+      <a:lstStyle/>
+      <a:style>
+        <a:lnRef idx="2">
+          <a:schemeClr val="accent1"/>
+        </a:lnRef>
+        <a:fillRef idx="0">
+          <a:schemeClr val="accent1"/>
+        </a:fillRef>
+        <a:effectRef idx="1">
+          <a:schemeClr val="accent1"/>
+        </a:effectRef>
+        <a:fontRef idx="minor">
+          <a:schemeClr val="tx1"/>
+        </a:fontRef>
+      </a:style>
+    </a:lnDef>
+  </a:objectDefaults>
+  <a:extraClrSchemeLst/>
+  <a:extLst>
+    <a:ext uri="{05A4C25C-085E-4340-85A3-A5531E510DB2}">
+      <thm15:themeFamily xmlns:thm15="http://schemas.microsoft.com/office/thememl/2012/main" name="Office Theme" id="{2E142A2C-CD16-42D6-873A-C26D2A0506FA}" vid="{1BDDFF52-6CD6-40A5-AB3C-68EB2F1E4D0A}"/>
+    </a:ext>
+  </a:extLst>
+</a:theme>
 </file>